--- a/docs/content/graphing_effectively/graphing_effectively_lecture.pptx
+++ b/docs/content/graphing_effectively/graphing_effectively_lecture.pptx
@@ -18,6 +18,13 @@
     <p:sldId id="266" r:id="rId12"/>
     <p:sldId id="267" r:id="rId13"/>
     <p:sldId id="268" r:id="rId14"/>
+    <p:sldId id="269" r:id="rId15"/>
+    <p:sldId id="270" r:id="rId16"/>
+    <p:sldId id="271" r:id="rId17"/>
+    <p:sldId id="272" r:id="rId18"/>
+    <p:sldId id="273" r:id="rId19"/>
+    <p:sldId id="274" r:id="rId20"/>
+    <p:sldId id="275" r:id="rId21"/>
   </p:sldIdLst>
   <p:sldSz cx="9144000" cy="5143500" type="screen16x9"/>
   <p:notesSz cx="6858000" cy="9144000"/>
@@ -3393,7 +3400,7 @@
             </a:pPr>
             <a:r>
               <a:rPr/>
-              <a:t>Part 6 · A Quick Theme Tour</a:t>
+              <a:t>Mapping Color by Group</a:t>
             </a:r>
           </a:p>
         </p:txBody>
@@ -3423,7 +3430,97 @@
                 </a:solidFill>
                 <a:latin typeface="Courier"/>
               </a:rPr>
-              <a:t>pine_jitter_plot </a:t>
+              <a:t>pine_team_plot &lt;- </a:t>
+            </a:r>
+            <a:r>
+              <a:rPr>
+                <a:solidFill>
+                  <a:srgbClr val="4758AB"/>
+                </a:solidFill>
+                <a:latin typeface="Courier"/>
+              </a:rPr>
+              <a:t>ggplot</a:t>
+            </a:r>
+            <a:r>
+              <a:rPr>
+                <a:solidFill>
+                  <a:srgbClr val="003B4F"/>
+                </a:solidFill>
+                <a:latin typeface="Courier"/>
+              </a:rPr>
+              <a:t>(pine_df, </a:t>
+            </a:r>
+            <a:r>
+              <a:rPr>
+                <a:solidFill>
+                  <a:srgbClr val="4758AB"/>
+                </a:solidFill>
+                <a:latin typeface="Courier"/>
+              </a:rPr>
+              <a:t>aes</a:t>
+            </a:r>
+            <a:r>
+              <a:rPr>
+                <a:solidFill>
+                  <a:srgbClr val="003B4F"/>
+                </a:solidFill>
+                <a:latin typeface="Courier"/>
+              </a:rPr>
+              <a:t>(</a:t>
+            </a:r>
+            <a:r>
+              <a:rPr>
+                <a:solidFill>
+                  <a:srgbClr val="657422"/>
+                </a:solidFill>
+                <a:latin typeface="Courier"/>
+              </a:rPr>
+              <a:t>x =</a:t>
+            </a:r>
+            <a:r>
+              <a:rPr>
+                <a:solidFill>
+                  <a:srgbClr val="003B4F"/>
+                </a:solidFill>
+                <a:latin typeface="Courier"/>
+              </a:rPr>
+              <a:t> n_s, </a:t>
+            </a:r>
+            <a:r>
+              <a:rPr>
+                <a:solidFill>
+                  <a:srgbClr val="657422"/>
+                </a:solidFill>
+                <a:latin typeface="Courier"/>
+              </a:rPr>
+              <a:t>y =</a:t>
+            </a:r>
+            <a:r>
+              <a:rPr>
+                <a:solidFill>
+                  <a:srgbClr val="003B4F"/>
+                </a:solidFill>
+                <a:latin typeface="Courier"/>
+              </a:rPr>
+              <a:t> length_mm, </a:t>
+            </a:r>
+            <a:r>
+              <a:rPr>
+                <a:solidFill>
+                  <a:srgbClr val="657422"/>
+                </a:solidFill>
+                <a:latin typeface="Courier"/>
+              </a:rPr>
+              <a:t>color =</a:t>
+            </a:r>
+            <a:r>
+              <a:rPr>
+                <a:solidFill>
+                  <a:srgbClr val="003B4F"/>
+                </a:solidFill>
+                <a:latin typeface="Courier"/>
+              </a:rPr>
+              <a:t> group)) </a:t>
             </a:r>
             <a:r>
               <a:rPr>
@@ -3434,6 +3531,53 @@
               </a:rPr>
               <a:t>+</a:t>
             </a:r>
+            <a:br/>
+            <a:r>
+              <a:rPr>
+                <a:solidFill>
+                  <a:srgbClr val="003B4F"/>
+                </a:solidFill>
+                <a:latin typeface="Courier"/>
+              </a:rPr>
+              <a:t>  </a:t>
+            </a:r>
+            <a:r>
+              <a:rPr>
+                <a:solidFill>
+                  <a:srgbClr val="4758AB"/>
+                </a:solidFill>
+                <a:latin typeface="Courier"/>
+              </a:rPr>
+              <a:t>geom_point</a:t>
+            </a:r>
+            <a:r>
+              <a:rPr>
+                <a:solidFill>
+                  <a:srgbClr val="003B4F"/>
+                </a:solidFill>
+                <a:latin typeface="Courier"/>
+              </a:rPr>
+              <a:t>(</a:t>
+            </a:r>
+            <a:br/>
+            <a:r>
+              <a:rPr>
+                <a:solidFill>
+                  <a:srgbClr val="003B4F"/>
+                </a:solidFill>
+                <a:latin typeface="Courier"/>
+              </a:rPr>
+              <a:t>    </a:t>
+            </a:r>
+            <a:r>
+              <a:rPr>
+                <a:solidFill>
+                  <a:srgbClr val="657422"/>
+                </a:solidFill>
+                <a:latin typeface="Courier"/>
+              </a:rPr>
+              <a:t>position =</a:t>
+            </a:r>
             <a:r>
               <a:rPr>
                 <a:solidFill>
@@ -3450,7 +3594,431 @@
                 </a:solidFill>
                 <a:latin typeface="Courier"/>
               </a:rPr>
-              <a:t>theme_bw</a:t>
+              <a:t>position_jitter</a:t>
+            </a:r>
+            <a:r>
+              <a:rPr>
+                <a:solidFill>
+                  <a:srgbClr val="003B4F"/>
+                </a:solidFill>
+                <a:latin typeface="Courier"/>
+              </a:rPr>
+              <a:t>(</a:t>
+            </a:r>
+            <a:r>
+              <a:rPr>
+                <a:solidFill>
+                  <a:srgbClr val="657422"/>
+                </a:solidFill>
+                <a:latin typeface="Courier"/>
+              </a:rPr>
+              <a:t>width =</a:t>
+            </a:r>
+            <a:r>
+              <a:rPr>
+                <a:solidFill>
+                  <a:srgbClr val="003B4F"/>
+                </a:solidFill>
+                <a:latin typeface="Courier"/>
+              </a:rPr>
+              <a:t> </a:t>
+            </a:r>
+            <a:r>
+              <a:rPr>
+                <a:solidFill>
+                  <a:srgbClr val="AD0000"/>
+                </a:solidFill>
+                <a:latin typeface="Courier"/>
+              </a:rPr>
+              <a:t>0.15</a:t>
+            </a:r>
+            <a:r>
+              <a:rPr>
+                <a:solidFill>
+                  <a:srgbClr val="003B4F"/>
+                </a:solidFill>
+                <a:latin typeface="Courier"/>
+              </a:rPr>
+              <a:t>, </a:t>
+            </a:r>
+            <a:r>
+              <a:rPr>
+                <a:solidFill>
+                  <a:srgbClr val="657422"/>
+                </a:solidFill>
+                <a:latin typeface="Courier"/>
+              </a:rPr>
+              <a:t>seed =</a:t>
+            </a:r>
+            <a:r>
+              <a:rPr>
+                <a:solidFill>
+                  <a:srgbClr val="003B4F"/>
+                </a:solidFill>
+                <a:latin typeface="Courier"/>
+              </a:rPr>
+              <a:t> </a:t>
+            </a:r>
+            <a:r>
+              <a:rPr>
+                <a:solidFill>
+                  <a:srgbClr val="AD0000"/>
+                </a:solidFill>
+                <a:latin typeface="Courier"/>
+              </a:rPr>
+              <a:t>42</a:t>
+            </a:r>
+            <a:r>
+              <a:rPr>
+                <a:solidFill>
+                  <a:srgbClr val="003B4F"/>
+                </a:solidFill>
+                <a:latin typeface="Courier"/>
+              </a:rPr>
+              <a:t>),</a:t>
+            </a:r>
+            <a:br/>
+            <a:r>
+              <a:rPr>
+                <a:solidFill>
+                  <a:srgbClr val="003B4F"/>
+                </a:solidFill>
+                <a:latin typeface="Courier"/>
+              </a:rPr>
+              <a:t>    </a:t>
+            </a:r>
+            <a:r>
+              <a:rPr>
+                <a:solidFill>
+                  <a:srgbClr val="657422"/>
+                </a:solidFill>
+                <a:latin typeface="Courier"/>
+              </a:rPr>
+              <a:t>size =</a:t>
+            </a:r>
+            <a:r>
+              <a:rPr>
+                <a:solidFill>
+                  <a:srgbClr val="003B4F"/>
+                </a:solidFill>
+                <a:latin typeface="Courier"/>
+              </a:rPr>
+              <a:t> </a:t>
+            </a:r>
+            <a:r>
+              <a:rPr>
+                <a:solidFill>
+                  <a:srgbClr val="AD0000"/>
+                </a:solidFill>
+                <a:latin typeface="Courier"/>
+              </a:rPr>
+              <a:t>2.5</a:t>
+            </a:r>
+            <a:r>
+              <a:rPr>
+                <a:solidFill>
+                  <a:srgbClr val="003B4F"/>
+                </a:solidFill>
+                <a:latin typeface="Courier"/>
+              </a:rPr>
+              <a:t>,</a:t>
+            </a:r>
+            <a:br/>
+            <a:r>
+              <a:rPr>
+                <a:solidFill>
+                  <a:srgbClr val="003B4F"/>
+                </a:solidFill>
+                <a:latin typeface="Courier"/>
+              </a:rPr>
+              <a:t>    </a:t>
+            </a:r>
+            <a:r>
+              <a:rPr>
+                <a:solidFill>
+                  <a:srgbClr val="657422"/>
+                </a:solidFill>
+                <a:latin typeface="Courier"/>
+              </a:rPr>
+              <a:t>alpha =</a:t>
+            </a:r>
+            <a:r>
+              <a:rPr>
+                <a:solidFill>
+                  <a:srgbClr val="003B4F"/>
+                </a:solidFill>
+                <a:latin typeface="Courier"/>
+              </a:rPr>
+              <a:t> </a:t>
+            </a:r>
+            <a:r>
+              <a:rPr>
+                <a:solidFill>
+                  <a:srgbClr val="AD0000"/>
+                </a:solidFill>
+                <a:latin typeface="Courier"/>
+              </a:rPr>
+              <a:t>0.8</a:t>
+            </a:r>
+            <a:br/>
+            <a:r>
+              <a:rPr>
+                <a:solidFill>
+                  <a:srgbClr val="003B4F"/>
+                </a:solidFill>
+                <a:latin typeface="Courier"/>
+              </a:rPr>
+              <a:t>  ) </a:t>
+            </a:r>
+            <a:r>
+              <a:rPr>
+                <a:solidFill>
+                  <a:srgbClr val="5E5E5E"/>
+                </a:solidFill>
+                <a:latin typeface="Courier"/>
+              </a:rPr>
+              <a:t>+</a:t>
+            </a:r>
+            <a:br/>
+            <a:r>
+              <a:rPr>
+                <a:solidFill>
+                  <a:srgbClr val="003B4F"/>
+                </a:solidFill>
+                <a:latin typeface="Courier"/>
+              </a:rPr>
+              <a:t>  </a:t>
+            </a:r>
+            <a:r>
+              <a:rPr>
+                <a:solidFill>
+                  <a:srgbClr val="4758AB"/>
+                </a:solidFill>
+                <a:latin typeface="Courier"/>
+              </a:rPr>
+              <a:t>labs</a:t>
+            </a:r>
+            <a:r>
+              <a:rPr>
+                <a:solidFill>
+                  <a:srgbClr val="003B4F"/>
+                </a:solidFill>
+                <a:latin typeface="Courier"/>
+              </a:rPr>
+              <a:t>(</a:t>
+            </a:r>
+            <a:br/>
+            <a:r>
+              <a:rPr>
+                <a:solidFill>
+                  <a:srgbClr val="003B4F"/>
+                </a:solidFill>
+                <a:latin typeface="Courier"/>
+              </a:rPr>
+              <a:t>    </a:t>
+            </a:r>
+            <a:r>
+              <a:rPr>
+                <a:solidFill>
+                  <a:srgbClr val="657422"/>
+                </a:solidFill>
+                <a:latin typeface="Courier"/>
+              </a:rPr>
+              <a:t>title =</a:t>
+            </a:r>
+            <a:r>
+              <a:rPr>
+                <a:solidFill>
+                  <a:srgbClr val="003B4F"/>
+                </a:solidFill>
+                <a:latin typeface="Courier"/>
+              </a:rPr>
+              <a:t> </a:t>
+            </a:r>
+            <a:r>
+              <a:rPr>
+                <a:solidFill>
+                  <a:srgbClr val="20794D"/>
+                </a:solidFill>
+                <a:latin typeface="Courier"/>
+              </a:rPr>
+              <a:t>"Needle Length by Side, Colored by Team"</a:t>
+            </a:r>
+            <a:r>
+              <a:rPr>
+                <a:solidFill>
+                  <a:srgbClr val="003B4F"/>
+                </a:solidFill>
+                <a:latin typeface="Courier"/>
+              </a:rPr>
+              <a:t>,</a:t>
+            </a:r>
+            <a:br/>
+            <a:r>
+              <a:rPr>
+                <a:solidFill>
+                  <a:srgbClr val="003B4F"/>
+                </a:solidFill>
+                <a:latin typeface="Courier"/>
+              </a:rPr>
+              <a:t>    </a:t>
+            </a:r>
+            <a:r>
+              <a:rPr>
+                <a:solidFill>
+                  <a:srgbClr val="657422"/>
+                </a:solidFill>
+                <a:latin typeface="Courier"/>
+              </a:rPr>
+              <a:t>x =</a:t>
+            </a:r>
+            <a:r>
+              <a:rPr>
+                <a:solidFill>
+                  <a:srgbClr val="003B4F"/>
+                </a:solidFill>
+                <a:latin typeface="Courier"/>
+              </a:rPr>
+              <a:t> </a:t>
+            </a:r>
+            <a:r>
+              <a:rPr>
+                <a:solidFill>
+                  <a:srgbClr val="20794D"/>
+                </a:solidFill>
+                <a:latin typeface="Courier"/>
+              </a:rPr>
+              <a:t>"Side of tree"</a:t>
+            </a:r>
+            <a:r>
+              <a:rPr>
+                <a:solidFill>
+                  <a:srgbClr val="003B4F"/>
+                </a:solidFill>
+                <a:latin typeface="Courier"/>
+              </a:rPr>
+              <a:t>,</a:t>
+            </a:r>
+            <a:br/>
+            <a:r>
+              <a:rPr>
+                <a:solidFill>
+                  <a:srgbClr val="003B4F"/>
+                </a:solidFill>
+                <a:latin typeface="Courier"/>
+              </a:rPr>
+              <a:t>    </a:t>
+            </a:r>
+            <a:r>
+              <a:rPr>
+                <a:solidFill>
+                  <a:srgbClr val="657422"/>
+                </a:solidFill>
+                <a:latin typeface="Courier"/>
+              </a:rPr>
+              <a:t>y =</a:t>
+            </a:r>
+            <a:r>
+              <a:rPr>
+                <a:solidFill>
+                  <a:srgbClr val="003B4F"/>
+                </a:solidFill>
+                <a:latin typeface="Courier"/>
+              </a:rPr>
+              <a:t> </a:t>
+            </a:r>
+            <a:r>
+              <a:rPr>
+                <a:solidFill>
+                  <a:srgbClr val="20794D"/>
+                </a:solidFill>
+                <a:latin typeface="Courier"/>
+              </a:rPr>
+              <a:t>"Needle length (mm)"</a:t>
+            </a:r>
+            <a:r>
+              <a:rPr>
+                <a:solidFill>
+                  <a:srgbClr val="003B4F"/>
+                </a:solidFill>
+                <a:latin typeface="Courier"/>
+              </a:rPr>
+              <a:t>,</a:t>
+            </a:r>
+            <a:br/>
+            <a:r>
+              <a:rPr>
+                <a:solidFill>
+                  <a:srgbClr val="003B4F"/>
+                </a:solidFill>
+                <a:latin typeface="Courier"/>
+              </a:rPr>
+              <a:t>    </a:t>
+            </a:r>
+            <a:r>
+              <a:rPr>
+                <a:solidFill>
+                  <a:srgbClr val="657422"/>
+                </a:solidFill>
+                <a:latin typeface="Courier"/>
+              </a:rPr>
+              <a:t>color =</a:t>
+            </a:r>
+            <a:r>
+              <a:rPr>
+                <a:solidFill>
+                  <a:srgbClr val="003B4F"/>
+                </a:solidFill>
+                <a:latin typeface="Courier"/>
+              </a:rPr>
+              <a:t> </a:t>
+            </a:r>
+            <a:r>
+              <a:rPr>
+                <a:solidFill>
+                  <a:srgbClr val="20794D"/>
+                </a:solidFill>
+                <a:latin typeface="Courier"/>
+              </a:rPr>
+              <a:t>"Field team"</a:t>
+            </a:r>
+            <a:br/>
+            <a:r>
+              <a:rPr>
+                <a:solidFill>
+                  <a:srgbClr val="003B4F"/>
+                </a:solidFill>
+                <a:latin typeface="Courier"/>
+              </a:rPr>
+              <a:t>  ) </a:t>
+            </a:r>
+            <a:r>
+              <a:rPr>
+                <a:solidFill>
+                  <a:srgbClr val="5E5E5E"/>
+                </a:solidFill>
+                <a:latin typeface="Courier"/>
+              </a:rPr>
+              <a:t>+</a:t>
+            </a:r>
+            <a:br/>
+            <a:r>
+              <a:rPr>
+                <a:solidFill>
+                  <a:srgbClr val="003B4F"/>
+                </a:solidFill>
+                <a:latin typeface="Courier"/>
+              </a:rPr>
+              <a:t>  </a:t>
+            </a:r>
+            <a:r>
+              <a:rPr>
+                <a:solidFill>
+                  <a:srgbClr val="4758AB"/>
+                </a:solidFill>
+                <a:latin typeface="Courier"/>
+              </a:rPr>
+              <a:t>theme_minimal</a:t>
             </a:r>
             <a:r>
               <a:rPr>
@@ -3460,13 +4028,24 @@
                 <a:latin typeface="Courier"/>
               </a:rPr>
               <a:t>()</a:t>
+            </a:r>
+            <a:br/>
+            <a:br/>
+            <a:r>
+              <a:rPr>
+                <a:solidFill>
+                  <a:srgbClr val="003B4F"/>
+                </a:solidFill>
+                <a:latin typeface="Courier"/>
+              </a:rPr>
+              <a:t>pine_team_plot</a:t>
             </a:r>
           </a:p>
         </p:txBody>
       </p:sp>
       <p:pic>
         <p:nvPicPr>
-          <p:cNvPr descr="graphing_effectively_lecture_files/figure-pptx/unnamed-chunk-8-1.png" id="0" name="Picture 1"/>
+          <p:cNvPr descr="graphing_effectively_lecture_files/figure-pptx/unnamed-chunk-5-1.png" id="0" name="Picture 1"/>
           <p:cNvPicPr>
             <a:picLocks noGrp="1" noChangeAspect="1"/>
           </p:cNvPicPr>
@@ -3474,102 +4053,6 @@
         </p:nvPicPr>
         <p:blipFill>
           <a:blip r:embed="rId2"/>
-          <a:stretch>
-            <a:fillRect/>
-          </a:stretch>
-        </p:blipFill>
-        <p:spPr bwMode="auto">
-          <a:xfrm>
-            <a:off x="431800" y="1270000"/>
-            <a:ext cx="3810000" cy="3302000"/>
-          </a:xfrm>
-          <a:prstGeom prst="rect">
-            <a:avLst/>
-          </a:prstGeom>
-          <a:noFill/>
-          <a:ln w="9525">
-            <a:noFill/>
-            <a:headEnd/>
-            <a:tailEnd/>
-          </a:ln>
-        </p:spPr>
-      </p:pic>
-      <p:sp>
-        <p:nvSpPr>
-          <p:cNvPr id="4" name="Content Placeholder 3"/>
-          <p:cNvSpPr>
-            <a:spLocks noGrp="1"/>
-          </p:cNvSpPr>
-          <p:nvPr>
-            <p:ph idx="2" sz="half"/>
-          </p:nvPr>
-        </p:nvSpPr>
-        <p:spPr/>
-        <p:txBody>
-          <a:bodyPr/>
-          <a:lstStyle/>
-          <a:p>
-            <a:pPr lvl="0" indent="0">
-              <a:buNone/>
-            </a:pPr>
-            <a:r>
-              <a:rPr>
-                <a:solidFill>
-                  <a:srgbClr val="003B4F"/>
-                </a:solidFill>
-                <a:latin typeface="Courier"/>
-              </a:rPr>
-              <a:t>pine_jitter_plot </a:t>
-            </a:r>
-            <a:r>
-              <a:rPr>
-                <a:solidFill>
-                  <a:srgbClr val="5E5E5E"/>
-                </a:solidFill>
-                <a:latin typeface="Courier"/>
-              </a:rPr>
-              <a:t>+</a:t>
-            </a:r>
-            <a:r>
-              <a:rPr>
-                <a:solidFill>
-                  <a:srgbClr val="003B4F"/>
-                </a:solidFill>
-                <a:latin typeface="Courier"/>
-              </a:rPr>
-              <a:t> </a:t>
-            </a:r>
-            <a:r>
-              <a:rPr>
-                <a:solidFill>
-                  <a:srgbClr val="4758AB"/>
-                </a:solidFill>
-                <a:latin typeface="Courier"/>
-              </a:rPr>
-              <a:t>theme_classic</a:t>
-            </a:r>
-            <a:r>
-              <a:rPr>
-                <a:solidFill>
-                  <a:srgbClr val="003B4F"/>
-                </a:solidFill>
-                <a:latin typeface="Courier"/>
-              </a:rPr>
-              <a:t>()</a:t>
-            </a:r>
-          </a:p>
-        </p:txBody>
-      </p:sp>
-      <p:pic>
-        <p:nvPicPr>
-          <p:cNvPr descr="graphing_effectively_lecture_files/figure-pptx/unnamed-chunk-9-1.png" id="0" name="Picture 1"/>
-          <p:cNvPicPr>
-            <a:picLocks noGrp="1" noChangeAspect="1"/>
-          </p:cNvPicPr>
-          <p:nvPr/>
-        </p:nvPicPr>
-        <p:blipFill>
-          <a:blip r:embed="rId3"/>
           <a:stretch>
             <a:fillRect/>
           </a:stretch>
@@ -3610,11 +4093,19 @@
               <a:rPr>
                 <a:latin typeface="Courier"/>
               </a:rPr>
-              <a:t>theme_minimal()</a:t>
+              <a:t>color = group</a:t>
             </a:r>
             <a:r>
               <a:rPr/>
-              <a:t> — light, few gridlines (what we’ve used so far)</a:t>
+              <a:t> maps a </a:t>
+            </a:r>
+            <a:r>
+              <a:rPr b="1"/>
+              <a:t>third variable</a:t>
+            </a:r>
+            <a:r>
+              <a:rPr/>
+              <a:t> onto the plot — no new geom needed</a:t>
             </a:r>
           </a:p>
           <a:p>
@@ -3623,24 +4114,28 @@
               <a:rPr>
                 <a:latin typeface="Courier"/>
               </a:rPr>
-              <a:t>theme_bw()</a:t>
+              <a:t>ggplot</a:t>
             </a:r>
             <a:r>
               <a:rPr/>
-              <a:t> — white background, black-and-white frame</a:t>
+              <a:t> auto-builds the legend and picks colors for you</a:t>
             </a:r>
           </a:p>
           <a:p>
             <a:pPr lvl="0"/>
             <a:r>
-              <a:rPr>
-                <a:latin typeface="Courier"/>
-              </a:rPr>
-              <a:t>theme_classic()</a:t>
-            </a:r>
-            <a:r>
               <a:rPr/>
-              <a:t> — just x/y axis lines, no gridlines at all</a:t>
+              <a:t>Mapping inside </a:t>
+            </a:r>
+            <a:r>
+              <a:rPr>
+                <a:latin typeface="Courier"/>
+              </a:rPr>
+              <a:t>aes()</a:t>
+            </a:r>
+            <a:r>
+              <a:rPr/>
+              <a:t> always means “vary this by data” — not “make everything this color”</a:t>
             </a:r>
           </a:p>
           <a:p>
@@ -3649,7 +4144,7 @@
             </a:pPr>
             <a:r>
               <a:rPr sz="2000" b="1"/>
-              <a:t>Note</a:t>
+              <a:t>Warning</a:t>
             </a:r>
           </a:p>
           <a:p>
@@ -3658,7 +4153,7 @@
             </a:pPr>
             <a:r>
               <a:rPr sz="2000" b="1"/>
-              <a:t>✅ Key idea</a:t>
+              <a:t>⚠️ Watch out!</a:t>
             </a:r>
           </a:p>
           <a:p>
@@ -3666,16 +4161,70 @@
               <a:buNone/>
             </a:pPr>
             <a:r>
+              <a:rPr sz="2000">
+                <a:latin typeface="Courier"/>
+              </a:rPr>
+              <a:t>color = "steelblue"</a:t>
+            </a:r>
+            <a:r>
               <a:rPr sz="2000"/>
-              <a:t>A theme changes </a:t>
-            </a:r>
-            <a:r>
-              <a:rPr sz="2000" i="1"/>
-              <a:t>appearance</a:t>
+              <a:t> </a:t>
+            </a:r>
+            <a:r>
+              <a:rPr sz="2000" b="1"/>
+              <a:t>outside</a:t>
             </a:r>
             <a:r>
               <a:rPr sz="2000"/>
-              <a:t> only — never the data or the statistics underneath. Pick one and use it consistently across a report.</a:t>
+              <a:t> </a:t>
+            </a:r>
+            <a:r>
+              <a:rPr sz="2000">
+                <a:latin typeface="Courier"/>
+              </a:rPr>
+              <a:t>aes()</a:t>
+            </a:r>
+            <a:r>
+              <a:rPr sz="2000"/>
+              <a:t> sets one fixed color. </a:t>
+            </a:r>
+            <a:r>
+              <a:rPr sz="2000">
+                <a:latin typeface="Courier"/>
+              </a:rPr>
+              <a:t>color = group</a:t>
+            </a:r>
+            <a:r>
+              <a:rPr sz="2000"/>
+              <a:t> </a:t>
+            </a:r>
+            <a:r>
+              <a:rPr sz="2000" b="1"/>
+              <a:t>inside</a:t>
+            </a:r>
+            <a:r>
+              <a:rPr sz="2000"/>
+              <a:t> </a:t>
+            </a:r>
+            <a:r>
+              <a:rPr sz="2000">
+                <a:latin typeface="Courier"/>
+              </a:rPr>
+              <a:t>aes()</a:t>
+            </a:r>
+            <a:r>
+              <a:rPr sz="2000"/>
+              <a:t> maps colors to a variable. Mixing these up is one of the most common </a:t>
+            </a:r>
+            <a:r>
+              <a:rPr sz="2000">
+                <a:latin typeface="Courier"/>
+              </a:rPr>
+              <a:t>ggplot</a:t>
+            </a:r>
+            <a:r>
+              <a:rPr sz="2000"/>
+              <a:t> mistakes.</a:t>
             </a:r>
           </a:p>
         </p:txBody>
@@ -3715,11 +4264,8 @@
         <p:spPr>
           <a:xfrm>
             <a:off x="0" y="0"/>
-            <a:ext cx="9144000" cy="602780"/>
+            <a:ext cx="9144000" cy="582780"/>
           </a:xfrm>
-          <a:solidFill>
-            <a:srgbClr val="70121D"/>
-          </a:solidFill>
         </p:spPr>
         <p:txBody>
           <a:bodyPr/>
@@ -3730,449 +4276,7 @@
             </a:pPr>
             <a:r>
               <a:rPr/>
-              <a:t>Part 7 · Saving a Real Figure</a:t>
-            </a:r>
-          </a:p>
-        </p:txBody>
-      </p:sp>
-      <p:sp>
-        <p:nvSpPr>
-          <p:cNvPr id="3" name="Content Placeholder 2"/>
-          <p:cNvSpPr>
-            <a:spLocks noGrp="1"/>
-          </p:cNvSpPr>
-          <p:nvPr>
-            <p:ph idx="1" sz="half"/>
-          </p:nvPr>
-        </p:nvSpPr>
-        <p:spPr/>
-        <p:txBody>
-          <a:bodyPr/>
-          <a:lstStyle/>
-          <a:p>
-            <a:pPr lvl="0" indent="0">
-              <a:buNone/>
-            </a:pPr>
-            <a:r>
-              <a:rPr>
-                <a:solidFill>
-                  <a:srgbClr val="4758AB"/>
-                </a:solidFill>
-                <a:latin typeface="Courier"/>
-              </a:rPr>
-              <a:t>ggsave</a:t>
-            </a:r>
-            <a:r>
-              <a:rPr>
-                <a:solidFill>
-                  <a:srgbClr val="003B4F"/>
-                </a:solidFill>
-                <a:latin typeface="Courier"/>
-              </a:rPr>
-              <a:t>(</a:t>
-            </a:r>
-            <a:br/>
-            <a:r>
-              <a:rPr>
-                <a:solidFill>
-                  <a:srgbClr val="003B4F"/>
-                </a:solidFill>
-                <a:latin typeface="Courier"/>
-              </a:rPr>
-              <a:t>  </a:t>
-            </a:r>
-            <a:r>
-              <a:rPr>
-                <a:solidFill>
-                  <a:srgbClr val="20794D"/>
-                </a:solidFill>
-                <a:latin typeface="Courier"/>
-              </a:rPr>
-              <a:t>"figures/pine_needle_boxplot.png"</a:t>
-            </a:r>
-            <a:r>
-              <a:rPr>
-                <a:solidFill>
-                  <a:srgbClr val="003B4F"/>
-                </a:solidFill>
-                <a:latin typeface="Courier"/>
-              </a:rPr>
-              <a:t>,</a:t>
-            </a:r>
-            <a:br/>
-            <a:r>
-              <a:rPr>
-                <a:solidFill>
-                  <a:srgbClr val="003B4F"/>
-                </a:solidFill>
-                <a:latin typeface="Courier"/>
-              </a:rPr>
-              <a:t>  </a:t>
-            </a:r>
-            <a:r>
-              <a:rPr>
-                <a:solidFill>
-                  <a:srgbClr val="657422"/>
-                </a:solidFill>
-                <a:latin typeface="Courier"/>
-              </a:rPr>
-              <a:t>plot =</a:t>
-            </a:r>
-            <a:r>
-              <a:rPr>
-                <a:solidFill>
-                  <a:srgbClr val="003B4F"/>
-                </a:solidFill>
-                <a:latin typeface="Courier"/>
-              </a:rPr>
-              <a:t> pine_jitter_plot,</a:t>
-            </a:r>
-            <a:br/>
-            <a:r>
-              <a:rPr>
-                <a:solidFill>
-                  <a:srgbClr val="003B4F"/>
-                </a:solidFill>
-                <a:latin typeface="Courier"/>
-              </a:rPr>
-              <a:t>  </a:t>
-            </a:r>
-            <a:r>
-              <a:rPr>
-                <a:solidFill>
-                  <a:srgbClr val="657422"/>
-                </a:solidFill>
-                <a:latin typeface="Courier"/>
-              </a:rPr>
-              <a:t>width =</a:t>
-            </a:r>
-            <a:r>
-              <a:rPr>
-                <a:solidFill>
-                  <a:srgbClr val="003B4F"/>
-                </a:solidFill>
-                <a:latin typeface="Courier"/>
-              </a:rPr>
-              <a:t> </a:t>
-            </a:r>
-            <a:r>
-              <a:rPr>
-                <a:solidFill>
-                  <a:srgbClr val="AD0000"/>
-                </a:solidFill>
-                <a:latin typeface="Courier"/>
-              </a:rPr>
-              <a:t>3</a:t>
-            </a:r>
-            <a:r>
-              <a:rPr>
-                <a:solidFill>
-                  <a:srgbClr val="003B4F"/>
-                </a:solidFill>
-                <a:latin typeface="Courier"/>
-              </a:rPr>
-              <a:t>,</a:t>
-            </a:r>
-            <a:br/>
-            <a:r>
-              <a:rPr>
-                <a:solidFill>
-                  <a:srgbClr val="003B4F"/>
-                </a:solidFill>
-                <a:latin typeface="Courier"/>
-              </a:rPr>
-              <a:t>  </a:t>
-            </a:r>
-            <a:r>
-              <a:rPr>
-                <a:solidFill>
-                  <a:srgbClr val="657422"/>
-                </a:solidFill>
-                <a:latin typeface="Courier"/>
-              </a:rPr>
-              <a:t>height =</a:t>
-            </a:r>
-            <a:r>
-              <a:rPr>
-                <a:solidFill>
-                  <a:srgbClr val="003B4F"/>
-                </a:solidFill>
-                <a:latin typeface="Courier"/>
-              </a:rPr>
-              <a:t> </a:t>
-            </a:r>
-            <a:r>
-              <a:rPr>
-                <a:solidFill>
-                  <a:srgbClr val="AD0000"/>
-                </a:solidFill>
-                <a:latin typeface="Courier"/>
-              </a:rPr>
-              <a:t>3</a:t>
-            </a:r>
-            <a:r>
-              <a:rPr>
-                <a:solidFill>
-                  <a:srgbClr val="003B4F"/>
-                </a:solidFill>
-                <a:latin typeface="Courier"/>
-              </a:rPr>
-              <a:t>,</a:t>
-            </a:r>
-            <a:br/>
-            <a:r>
-              <a:rPr>
-                <a:solidFill>
-                  <a:srgbClr val="003B4F"/>
-                </a:solidFill>
-                <a:latin typeface="Courier"/>
-              </a:rPr>
-              <a:t>  </a:t>
-            </a:r>
-            <a:r>
-              <a:rPr>
-                <a:solidFill>
-                  <a:srgbClr val="657422"/>
-                </a:solidFill>
-                <a:latin typeface="Courier"/>
-              </a:rPr>
-              <a:t>units =</a:t>
-            </a:r>
-            <a:r>
-              <a:rPr>
-                <a:solidFill>
-                  <a:srgbClr val="003B4F"/>
-                </a:solidFill>
-                <a:latin typeface="Courier"/>
-              </a:rPr>
-              <a:t> </a:t>
-            </a:r>
-            <a:r>
-              <a:rPr>
-                <a:solidFill>
-                  <a:srgbClr val="20794D"/>
-                </a:solidFill>
-                <a:latin typeface="Courier"/>
-              </a:rPr>
-              <a:t>"in"</a:t>
-            </a:r>
-            <a:r>
-              <a:rPr>
-                <a:solidFill>
-                  <a:srgbClr val="003B4F"/>
-                </a:solidFill>
-                <a:latin typeface="Courier"/>
-              </a:rPr>
-              <a:t>,</a:t>
-            </a:r>
-            <a:br/>
-            <a:r>
-              <a:rPr>
-                <a:solidFill>
-                  <a:srgbClr val="003B4F"/>
-                </a:solidFill>
-                <a:latin typeface="Courier"/>
-              </a:rPr>
-              <a:t>  </a:t>
-            </a:r>
-            <a:r>
-              <a:rPr>
-                <a:solidFill>
-                  <a:srgbClr val="657422"/>
-                </a:solidFill>
-                <a:latin typeface="Courier"/>
-              </a:rPr>
-              <a:t>dpi =</a:t>
-            </a:r>
-            <a:r>
-              <a:rPr>
-                <a:solidFill>
-                  <a:srgbClr val="003B4F"/>
-                </a:solidFill>
-                <a:latin typeface="Courier"/>
-              </a:rPr>
-              <a:t> </a:t>
-            </a:r>
-            <a:r>
-              <a:rPr>
-                <a:solidFill>
-                  <a:srgbClr val="AD0000"/>
-                </a:solidFill>
-                <a:latin typeface="Courier"/>
-              </a:rPr>
-              <a:t>300</a:t>
-            </a:r>
-            <a:br/>
-            <a:r>
-              <a:rPr>
-                <a:solidFill>
-                  <a:srgbClr val="003B4F"/>
-                </a:solidFill>
-                <a:latin typeface="Courier"/>
-              </a:rPr>
-              <a:t>)</a:t>
-            </a:r>
-          </a:p>
-          <a:p>
-            <a:pPr lvl="0" indent="0" marL="1270000">
-              <a:buNone/>
-            </a:pPr>
-            <a:r>
-              <a:rPr sz="2000" b="1"/>
-              <a:t>Warning</a:t>
-            </a:r>
-          </a:p>
-          <a:p>
-            <a:pPr lvl="0" indent="0" marL="1270000">
-              <a:buNone/>
-            </a:pPr>
-            <a:r>
-              <a:rPr sz="2000" b="1"/>
-              <a:t>⚠️ Watch out!</a:t>
-            </a:r>
-          </a:p>
-          <a:p>
-            <a:pPr lvl="0" indent="0" marL="1270000">
-              <a:buNone/>
-            </a:pPr>
-            <a:r>
-              <a:rPr sz="2000">
-                <a:latin typeface="Courier"/>
-              </a:rPr>
-              <a:t>ggsave()</a:t>
-            </a:r>
-            <a:r>
-              <a:rPr sz="2000"/>
-              <a:t> wants the </a:t>
-            </a:r>
-            <a:r>
-              <a:rPr sz="2000" b="1"/>
-              <a:t>filename first</a:t>
-            </a:r>
-            <a:r>
-              <a:rPr sz="2000"/>
-              <a:t>, then </a:t>
-            </a:r>
-            <a:r>
-              <a:rPr sz="2000">
-                <a:latin typeface="Courier"/>
-              </a:rPr>
-              <a:t>plot =</a:t>
-            </a:r>
-            <a:r>
-              <a:rPr sz="2000"/>
-              <a:t>. If you skip </a:t>
-            </a:r>
-            <a:r>
-              <a:rPr sz="2000">
-                <a:latin typeface="Courier"/>
-              </a:rPr>
-              <a:t>plot =</a:t>
-            </a:r>
-            <a:r>
-              <a:rPr sz="2000"/>
-              <a:t>, it saves whatever plot was drawn </a:t>
-            </a:r>
-            <a:r>
-              <a:rPr sz="2000" i="1"/>
-              <a:t>last</a:t>
-            </a:r>
-            <a:r>
-              <a:rPr sz="2000"/>
-              <a:t> — not necessarily the one you meant.</a:t>
-            </a:r>
-          </a:p>
-        </p:txBody>
-      </p:sp>
-      <p:sp>
-        <p:nvSpPr>
-          <p:cNvPr id="4" name="Content Placeholder 3"/>
-          <p:cNvSpPr>
-            <a:spLocks noGrp="1"/>
-          </p:cNvSpPr>
-          <p:nvPr>
-            <p:ph idx="2" sz="half"/>
-          </p:nvPr>
-        </p:nvSpPr>
-        <p:spPr/>
-        <p:txBody>
-          <a:bodyPr/>
-          <a:lstStyle/>
-          <a:p>
-            <a:pPr lvl="0" indent="0" marL="1270000">
-              <a:buNone/>
-            </a:pPr>
-            <a:r>
-              <a:rPr sz="2000" b="1"/>
-              <a:t>Note</a:t>
-            </a:r>
-          </a:p>
-          <a:p>
-            <a:pPr lvl="0" indent="0" marL="1270000">
-              <a:buNone/>
-            </a:pPr>
-            <a:r>
-              <a:rPr sz="2000" b="1"/>
-              <a:t>✅ Key idea</a:t>
-            </a:r>
-          </a:p>
-          <a:p>
-            <a:pPr lvl="0" indent="0" marL="1270000">
-              <a:buNone/>
-            </a:pPr>
-            <a:r>
-              <a:rPr sz="2000"/>
-              <a:t>Always set </a:t>
-            </a:r>
-            <a:r>
-              <a:rPr sz="2000">
-                <a:latin typeface="Courier"/>
-              </a:rPr>
-              <a:t>width</a:t>
-            </a:r>
-            <a:r>
-              <a:rPr sz="2000"/>
-              <a:t>, </a:t>
-            </a:r>
-            <a:r>
-              <a:rPr sz="2000">
-                <a:latin typeface="Courier"/>
-              </a:rPr>
-              <a:t>height</a:t>
-            </a:r>
-            <a:r>
-              <a:rPr sz="2000"/>
-              <a:t>, </a:t>
-            </a:r>
-            <a:r>
-              <a:rPr sz="2000">
-                <a:latin typeface="Courier"/>
-              </a:rPr>
-              <a:t>units</a:t>
-            </a:r>
-            <a:r>
-              <a:rPr sz="2000"/>
-              <a:t>, and </a:t>
-            </a:r>
-            <a:r>
-              <a:rPr sz="2000">
-                <a:latin typeface="Courier"/>
-              </a:rPr>
-              <a:t>dpi</a:t>
-            </a:r>
-            <a:r>
-              <a:rPr sz="2000"/>
-              <a:t> explicitly. Letting </a:t>
-            </a:r>
-            <a:r>
-              <a:rPr sz="2000">
-                <a:latin typeface="Courier"/>
-              </a:rPr>
-              <a:t>ggsave()</a:t>
-            </a:r>
-            <a:r>
-              <a:rPr sz="2000"/>
-              <a:t> guess gives you a plot sized for your screen, not for a report or a poster.</a:t>
+              <a:t>Part 4 · Mean ± SE — Plotted Directly</a:t>
             </a:r>
           </a:p>
         </p:txBody>
@@ -4211,1160 +4315,6 @@
         </p:nvSpPr>
         <p:spPr>
           <a:xfrm>
-            <a:off x="0" y="0"/>
-            <a:ext cx="9144000" cy="602780"/>
-          </a:xfrm>
-          <a:solidFill>
-            <a:srgbClr val="70121D"/>
-          </a:solidFill>
-        </p:spPr>
-        <p:txBody>
-          <a:bodyPr/>
-          <a:lstStyle/>
-          <a:p>
-            <a:pPr lvl="0" indent="0" marL="0">
-              <a:buNone/>
-            </a:pPr>
-            <a:r>
-              <a:rPr/>
-              <a:t>Wrap-up</a:t>
-            </a:r>
-          </a:p>
-        </p:txBody>
-      </p:sp>
-      <p:sp>
-        <p:nvSpPr>
-          <p:cNvPr id="3" name="Content Placeholder 2"/>
-          <p:cNvSpPr>
-            <a:spLocks noGrp="1"/>
-          </p:cNvSpPr>
-          <p:nvPr>
-            <p:ph idx="1" sz="half"/>
-          </p:nvPr>
-        </p:nvSpPr>
-        <p:spPr/>
-        <p:txBody>
-          <a:bodyPr/>
-          <a:lstStyle/>
-          <a:p>
-            <a:pPr lvl="0" indent="0" marL="0">
-              <a:buNone/>
-            </a:pPr>
-            <a:r>
-              <a:rPr/>
-              <a:t>Today you:</a:t>
-            </a:r>
-          </a:p>
-          <a:p>
-            <a:pPr lvl="0"/>
-            <a:r>
-              <a:rPr/>
-              <a:t>Built boxplots with raw points overlaid, not hidden</a:t>
-            </a:r>
-          </a:p>
-          <a:p>
-            <a:pPr lvl="0"/>
-            <a:r>
-              <a:rPr/>
-              <a:t>Mapped a third variable with </a:t>
-            </a:r>
-            <a:r>
-              <a:rPr>
-                <a:latin typeface="Courier"/>
-              </a:rPr>
-              <a:t>color =</a:t>
-            </a:r>
-            <a:r>
-              <a:rPr/>
-              <a:t> / </a:t>
-            </a:r>
-            <a:r>
-              <a:rPr>
-                <a:latin typeface="Courier"/>
-              </a:rPr>
-              <a:t>fill =</a:t>
-            </a:r>
-            <a:r>
-              <a:rPr/>
-              <a:t> inside </a:t>
-            </a:r>
-            <a:r>
-              <a:rPr>
-                <a:latin typeface="Courier"/>
-              </a:rPr>
-              <a:t>aes()</a:t>
-            </a:r>
-          </a:p>
-          <a:p>
-            <a:pPr lvl="0"/>
-            <a:r>
-              <a:rPr/>
-              <a:t>Plotted mean ± SE directly with </a:t>
-            </a:r>
-            <a:r>
-              <a:rPr>
-                <a:latin typeface="Courier"/>
-              </a:rPr>
-              <a:t>stat_summary()</a:t>
-            </a:r>
-            <a:r>
-              <a:rPr/>
-              <a:t> — no separate summary table needed</a:t>
-            </a:r>
-          </a:p>
-          <a:p>
-            <a:pPr lvl="0"/>
-            <a:r>
-              <a:rPr/>
-              <a:t>Faceted a plot with </a:t>
-            </a:r>
-            <a:r>
-              <a:rPr>
-                <a:latin typeface="Courier"/>
-              </a:rPr>
-              <a:t>facet_wrap()</a:t>
-            </a:r>
-            <a:r>
-              <a:rPr/>
-              <a:t> to check every group at once</a:t>
-            </a:r>
-          </a:p>
-          <a:p>
-            <a:pPr lvl="0"/>
-            <a:r>
-              <a:rPr/>
-              <a:t>Compared themes, and saved a real, correctly-sized figure with </a:t>
-            </a:r>
-            <a:r>
-              <a:rPr>
-                <a:latin typeface="Courier"/>
-              </a:rPr>
-              <a:t>ggsave()</a:t>
-            </a:r>
-          </a:p>
-          <a:p>
-            <a:pPr lvl="0" indent="0" marL="1270000">
-              <a:buNone/>
-            </a:pPr>
-            <a:r>
-              <a:rPr sz="2000" b="1"/>
-              <a:t>Tip</a:t>
-            </a:r>
-          </a:p>
-          <a:p>
-            <a:pPr lvl="0" indent="0" marL="1270000">
-              <a:buNone/>
-            </a:pPr>
-            <a:r>
-              <a:rPr sz="2000" b="1"/>
-              <a:t>🖐 Before next class</a:t>
-            </a:r>
-          </a:p>
-          <a:p>
-            <a:pPr lvl="0" indent="0" marL="1270000">
-              <a:buNone/>
-            </a:pPr>
-            <a:r>
-              <a:rPr sz="2000"/>
-              <a:t>Finish the worksheet: build a mean ± SE plot faceted by </a:t>
-            </a:r>
-            <a:r>
-              <a:rPr sz="2000">
-                <a:latin typeface="Courier"/>
-              </a:rPr>
-              <a:t>group</a:t>
-            </a:r>
-            <a:r>
-              <a:rPr sz="2000"/>
-              <a:t>, pick a theme, and save it to </a:t>
-            </a:r>
-            <a:r>
-              <a:rPr sz="2000">
-                <a:latin typeface="Courier"/>
-              </a:rPr>
-              <a:t>figures/</a:t>
-            </a:r>
-            <a:r>
-              <a:rPr sz="2000"/>
-              <a:t> at 3×3in, 300 dpi.</a:t>
-            </a:r>
-          </a:p>
-        </p:txBody>
-      </p:sp>
-      <p:sp>
-        <p:nvSpPr>
-          <p:cNvPr id="4" name="Content Placeholder 3"/>
-          <p:cNvSpPr>
-            <a:spLocks noGrp="1"/>
-          </p:cNvSpPr>
-          <p:nvPr>
-            <p:ph idx="2" sz="half"/>
-          </p:nvPr>
-        </p:nvSpPr>
-        <p:spPr/>
-        <p:txBody>
-          <a:bodyPr/>
-          <a:lstStyle/>
-          <a:p>
-            <a:pPr lvl="0" indent="0" marL="1270000">
-              <a:buNone/>
-            </a:pPr>
-            <a:r>
-              <a:rPr sz="2000" b="1"/>
-              <a:t>Note</a:t>
-            </a:r>
-          </a:p>
-          <a:p>
-            <a:pPr lvl="0" indent="0" marL="1270000">
-              <a:buNone/>
-            </a:pPr>
-            <a:r>
-              <a:rPr sz="2000" b="1"/>
-              <a:t>Where this leads</a:t>
-            </a:r>
-          </a:p>
-          <a:p>
-            <a:pPr lvl="0" indent="0" marL="1270000">
-              <a:buNone/>
-            </a:pPr>
-            <a:r>
-              <a:rPr sz="2000"/>
-              <a:t>You can now import, wrangle, describe, and visualize a dataset end to end. That full pipeline — raw data → clean → summarize → visualize — is the foundation every later statistical test builds on.</a:t>
-            </a:r>
-          </a:p>
-        </p:txBody>
-      </p:sp>
-    </p:spTree>
-  </p:cSld>
-</p:sld>
-</file>
-
-<file path=ppt/slides/slide13.xml><?xml version="1.0" encoding="utf-8"?>
-<p:sld xmlns:a="http://schemas.openxmlformats.org/drawingml/2006/main" xmlns:r="http://schemas.openxmlformats.org/officeDocument/2006/relationships" xmlns:p="http://schemas.openxmlformats.org/presentationml/2006/main">
-  <p:cSld>
-    <p:spTree>
-      <p:nvGrpSpPr>
-        <p:cNvPr id="1" name=""/>
-        <p:cNvGrpSpPr/>
-        <p:nvPr/>
-      </p:nvGrpSpPr>
-      <p:grpSpPr>
-        <a:xfrm>
-          <a:off x="0" y="0"/>
-          <a:ext cx="0" cy="0"/>
-          <a:chOff x="0" y="0"/>
-          <a:chExt cx="0" cy="0"/>
-        </a:xfrm>
-      </p:grpSpPr>
-      <p:sp>
-        <p:nvSpPr>
-          <p:cNvPr id="2" name="Title 1"/>
-          <p:cNvSpPr>
-            <a:spLocks noGrp="1"/>
-          </p:cNvSpPr>
-          <p:nvPr>
-            <p:ph type="title"/>
-          </p:nvPr>
-        </p:nvSpPr>
-        <p:spPr>
-          <a:xfrm>
-            <a:off x="0" y="0"/>
-            <a:ext cx="9144000" cy="582780"/>
-          </a:xfrm>
-        </p:spPr>
-        <p:txBody>
-          <a:bodyPr/>
-          <a:lstStyle/>
-          <a:p>
-            <a:pPr lvl="0" indent="0" marL="0">
-              <a:buNone/>
-            </a:pPr>
-            <a:r>
-              <a:rPr/>
-              <a:t>Getting unstuck</a:t>
-            </a:r>
-          </a:p>
-        </p:txBody>
-      </p:sp>
-      <p:sp>
-        <p:nvSpPr>
-          <p:cNvPr id="3" name="Content Placeholder 2"/>
-          <p:cNvSpPr>
-            <a:spLocks noGrp="1"/>
-          </p:cNvSpPr>
-          <p:nvPr>
-            <p:ph idx="1"/>
-          </p:nvPr>
-        </p:nvSpPr>
-        <p:spPr/>
-        <p:txBody>
-          <a:bodyPr/>
-          <a:lstStyle/>
-          <a:p>
-            <a:pPr lvl="0" indent="0" marL="0">
-              <a:buNone/>
-            </a:pPr>
-            <a:r>
-              <a:rPr/>
-              <a:t>When code breaks — and it will, that is normal:</a:t>
-            </a:r>
-          </a:p>
-          <a:p>
-            <a:pPr lvl="0" indent="-342900" marL="342900">
-              <a:buAutoNum type="arabicPeriod"/>
-            </a:pPr>
-            <a:r>
-              <a:rPr/>
-              <a:t>Read the </a:t>
-            </a:r>
-            <a:r>
-              <a:rPr b="1"/>
-              <a:t>error message</a:t>
-            </a:r>
-            <a:r>
-              <a:rPr/>
-              <a:t> out loud; it usually names the line</a:t>
-            </a:r>
-          </a:p>
-          <a:p>
-            <a:pPr lvl="0" indent="-342900" marL="342900">
-              <a:buAutoNum type="arabicPeriod"/>
-            </a:pPr>
-            <a:r>
-              <a:rPr/>
-              <a:t>Check the usual suspects: </a:t>
-            </a:r>
-            <a:r>
-              <a:rPr>
-                <a:latin typeface="Courier"/>
-              </a:rPr>
-              <a:t>library(tidyverse)</a:t>
-            </a:r>
-            <a:r>
-              <a:rPr/>
-              <a:t> loaded? Is </a:t>
-            </a:r>
-            <a:r>
-              <a:rPr>
-                <a:latin typeface="Courier"/>
-              </a:rPr>
-              <a:t>color</a:t>
-            </a:r>
-            <a:r>
-              <a:rPr/>
-              <a:t>/</a:t>
-            </a:r>
-            <a:r>
-              <a:rPr>
-                <a:latin typeface="Courier"/>
-              </a:rPr>
-              <a:t>fill</a:t>
-            </a:r>
-            <a:r>
-              <a:rPr/>
-              <a:t> inside </a:t>
-            </a:r>
-            <a:r>
-              <a:rPr>
-                <a:latin typeface="Courier"/>
-              </a:rPr>
-              <a:t>aes()</a:t>
-            </a:r>
-            <a:r>
-              <a:rPr/>
-              <a:t> when it should be?</a:t>
-            </a:r>
-          </a:p>
-          <a:p>
-            <a:pPr lvl="0" indent="-342900" marL="342900">
-              <a:buAutoNum type="arabicPeriod"/>
-            </a:pPr>
-            <a:r>
-              <a:rPr>
-                <a:latin typeface="Courier"/>
-              </a:rPr>
-              <a:t>?function_name</a:t>
-            </a:r>
-            <a:r>
-              <a:rPr/>
-              <a:t> opens the help page</a:t>
-            </a:r>
-          </a:p>
-          <a:p>
-            <a:pPr lvl="0" indent="-342900" marL="342900">
-              <a:buAutoNum type="arabicPeriod"/>
-            </a:pPr>
-            <a:r>
-              <a:rPr/>
-              <a:t>Bring the </a:t>
-            </a:r>
-            <a:r>
-              <a:rPr b="1"/>
-              <a:t>exact error</a:t>
-            </a:r>
-            <a:r>
-              <a:rPr/>
-              <a:t> (copy-paste it) to class or office hours</a:t>
-            </a:r>
-          </a:p>
-          <a:p>
-            <a:pPr lvl="0" indent="0" marL="1270000">
-              <a:buNone/>
-            </a:pPr>
-            <a:r>
-              <a:rPr sz="2000" b="1"/>
-              <a:t>Note</a:t>
-            </a:r>
-          </a:p>
-          <a:p>
-            <a:pPr lvl="0" indent="0" marL="1270000">
-              <a:buNone/>
-            </a:pPr>
-            <a:r>
-              <a:rPr sz="2000" b="1"/>
-              <a:t>✅ Key idea</a:t>
-            </a:r>
-          </a:p>
-          <a:p>
-            <a:pPr lvl="0" indent="0" marL="1270000">
-              <a:buNone/>
-            </a:pPr>
-            <a:r>
-              <a:rPr sz="2000"/>
-              <a:t>Every working scientist googles error messages daily. Getting stuck is not failing — it is the job.</a:t>
-            </a:r>
-          </a:p>
-        </p:txBody>
-      </p:sp>
-    </p:spTree>
-  </p:cSld>
-</p:sld>
-</file>
-
-<file path=ppt/slides/slide2.xml><?xml version="1.0" encoding="utf-8"?>
-<p:sld xmlns:a="http://schemas.openxmlformats.org/drawingml/2006/main" xmlns:r="http://schemas.openxmlformats.org/officeDocument/2006/relationships" xmlns:p="http://schemas.openxmlformats.org/presentationml/2006/main">
-  <p:cSld>
-    <p:spTree>
-      <p:nvGrpSpPr>
-        <p:cNvPr id="1" name=""/>
-        <p:cNvGrpSpPr/>
-        <p:nvPr/>
-      </p:nvGrpSpPr>
-      <p:grpSpPr>
-        <a:xfrm>
-          <a:off x="0" y="0"/>
-          <a:ext cx="0" cy="0"/>
-          <a:chOff x="0" y="0"/>
-          <a:chExt cx="0" cy="0"/>
-        </a:xfrm>
-      </p:grpSpPr>
-      <p:sp>
-        <p:nvSpPr>
-          <p:cNvPr id="2" name="Title 1"/>
-          <p:cNvSpPr>
-            <a:spLocks noGrp="1"/>
-          </p:cNvSpPr>
-          <p:nvPr>
-            <p:ph type="title"/>
-          </p:nvPr>
-        </p:nvSpPr>
-        <p:spPr>
-          <a:xfrm>
-            <a:off x="0" y="0"/>
-            <a:ext cx="9144000" cy="602780"/>
-          </a:xfrm>
-          <a:solidFill>
-            <a:srgbClr val="70121D"/>
-          </a:solidFill>
-        </p:spPr>
-        <p:txBody>
-          <a:bodyPr/>
-          <a:lstStyle/>
-          <a:p>
-            <a:pPr lvl="0" indent="0" marL="0">
-              <a:buNone/>
-            </a:pPr>
-            <a:r>
-              <a:rPr/>
-              <a:t>Where We Left Off</a:t>
-            </a:r>
-          </a:p>
-        </p:txBody>
-      </p:sp>
-      <p:sp>
-        <p:nvSpPr>
-          <p:cNvPr id="3" name="Content Placeholder 2"/>
-          <p:cNvSpPr>
-            <a:spLocks noGrp="1"/>
-          </p:cNvSpPr>
-          <p:nvPr>
-            <p:ph idx="1" sz="half"/>
-          </p:nvPr>
-        </p:nvSpPr>
-        <p:spPr/>
-        <p:txBody>
-          <a:bodyPr/>
-          <a:lstStyle/>
-          <a:p>
-            <a:pPr lvl="0" indent="0" marL="0">
-              <a:buNone/>
-            </a:pPr>
-            <a:r>
-              <a:rPr/>
-              <a:t>Last time you:</a:t>
-            </a:r>
-          </a:p>
-          <a:p>
-            <a:pPr lvl="0"/>
-            <a:r>
-              <a:rPr/>
-              <a:t>Computed mean, median, SD, and SE — by hand and with </a:t>
-            </a:r>
-            <a:r>
-              <a:rPr>
-                <a:latin typeface="Courier"/>
-              </a:rPr>
-              <a:t>summarize()</a:t>
-            </a:r>
-          </a:p>
-          <a:p>
-            <a:pPr lvl="0"/>
-            <a:r>
-              <a:rPr/>
-              <a:t>Fixed the </a:t>
-            </a:r>
-            <a:r>
-              <a:rPr>
-                <a:latin typeface="Courier"/>
-              </a:rPr>
-              <a:t>length()</a:t>
-            </a:r>
-            <a:r>
-              <a:rPr/>
-              <a:t> trap with </a:t>
-            </a:r>
-            <a:r>
-              <a:rPr>
-                <a:latin typeface="Courier"/>
-              </a:rPr>
-              <a:t>sum(!is.na())</a:t>
-            </a:r>
-          </a:p>
-          <a:p>
-            <a:pPr lvl="0"/>
-            <a:r>
-              <a:rPr/>
-              <a:t>Got tidy per-group tables with </a:t>
-            </a:r>
-            <a:r>
-              <a:rPr>
-                <a:latin typeface="Courier"/>
-              </a:rPr>
-              <a:t>group_by()</a:t>
-            </a:r>
-            <a:r>
-              <a:rPr/>
-              <a:t> + </a:t>
-            </a:r>
-            <a:r>
-              <a:rPr>
-                <a:latin typeface="Courier"/>
-              </a:rPr>
-              <a:t>summarize()</a:t>
-            </a:r>
-          </a:p>
-          <a:p>
-            <a:pPr lvl="0" indent="0" marL="1270000">
-              <a:buNone/>
-            </a:pPr>
-            <a:r>
-              <a:rPr sz="2000" b="1"/>
-              <a:t>Note</a:t>
-            </a:r>
-          </a:p>
-          <a:p>
-            <a:pPr lvl="0" indent="0" marL="1270000">
-              <a:buNone/>
-            </a:pPr>
-            <a:r>
-              <a:rPr sz="2000" b="1"/>
-              <a:t>✅ Key idea from Module 3</a:t>
-            </a:r>
-          </a:p>
-          <a:p>
-            <a:pPr lvl="0" indent="0" marL="1270000">
-              <a:buNone/>
-            </a:pPr>
-            <a:r>
-              <a:rPr sz="2000"/>
-              <a:t>You now have real numbers describing lee vs. windward needles. Today we make those numbers </a:t>
-            </a:r>
-            <a:r>
-              <a:rPr sz="2000" b="1"/>
-              <a:t>visible</a:t>
-            </a:r>
-            <a:r>
-              <a:rPr sz="2000"/>
-              <a:t> — and save the result properly.</a:t>
-            </a:r>
-          </a:p>
-        </p:txBody>
-      </p:sp>
-      <p:sp>
-        <p:nvSpPr>
-          <p:cNvPr id="4" name="Content Placeholder 3"/>
-          <p:cNvSpPr>
-            <a:spLocks noGrp="1"/>
-          </p:cNvSpPr>
-          <p:nvPr>
-            <p:ph idx="2" sz="half"/>
-          </p:nvPr>
-        </p:nvSpPr>
-        <p:spPr/>
-        <p:txBody>
-          <a:bodyPr/>
-          <a:lstStyle/>
-          <a:p>
-            <a:pPr lvl="0" indent="0" marL="1270000">
-              <a:buNone/>
-            </a:pPr>
-            <a:r>
-              <a:rPr sz="2000" b="1"/>
-              <a:t>Note</a:t>
-            </a:r>
-          </a:p>
-          <a:p>
-            <a:pPr lvl="0" indent="0" marL="1270000">
-              <a:buNone/>
-            </a:pPr>
-            <a:r>
-              <a:rPr sz="2000" b="1"/>
-              <a:t>Today’s roadmap</a:t>
-            </a:r>
-          </a:p>
-          <a:p>
-            <a:pPr lvl="0" indent="-342900" marL="342900">
-              <a:buAutoNum type="arabicPeriod"/>
-            </a:pPr>
-            <a:r>
-              <a:rPr sz="2000"/>
-              <a:t>The </a:t>
-            </a:r>
-            <a:r>
-              <a:rPr sz="2000">
-                <a:latin typeface="Courier"/>
-              </a:rPr>
-              <a:t>ggplot</a:t>
-            </a:r>
-            <a:r>
-              <a:rPr sz="2000"/>
-              <a:t> grammar, recapped</a:t>
-            </a:r>
-          </a:p>
-          <a:p>
-            <a:pPr lvl="0" indent="-342900" marL="342900">
-              <a:buAutoNum type="arabicPeriod"/>
-            </a:pPr>
-            <a:r>
-              <a:rPr sz="2000"/>
-              <a:t>Boxplots done right — with raw points</a:t>
-            </a:r>
-          </a:p>
-          <a:p>
-            <a:pPr lvl="0" indent="-342900" marL="342900">
-              <a:buAutoNum type="arabicPeriod"/>
-            </a:pPr>
-            <a:r>
-              <a:rPr sz="2000"/>
-              <a:t>Plotting mean ± SE directly</a:t>
-            </a:r>
-          </a:p>
-          <a:p>
-            <a:pPr lvl="0" indent="-342900" marL="342900">
-              <a:buAutoNum type="arabicPeriod"/>
-            </a:pPr>
-            <a:r>
-              <a:rPr sz="2000"/>
-              <a:t>Faceting and a quick theme tour</a:t>
-            </a:r>
-          </a:p>
-          <a:p>
-            <a:pPr lvl="0" indent="-342900" marL="342900">
-              <a:buAutoNum type="arabicPeriod"/>
-            </a:pPr>
-            <a:r>
-              <a:rPr sz="2000">
-                <a:latin typeface="Courier"/>
-              </a:rPr>
-              <a:t>ggsave()</a:t>
-            </a:r>
-            <a:r>
-              <a:rPr sz="2000"/>
-              <a:t>, for real this time</a:t>
-            </a:r>
-          </a:p>
-        </p:txBody>
-      </p:sp>
-    </p:spTree>
-  </p:cSld>
-</p:sld>
-</file>
-
-<file path=ppt/slides/slide3.xml><?xml version="1.0" encoding="utf-8"?>
-<p:sld xmlns:a="http://schemas.openxmlformats.org/drawingml/2006/main" xmlns:r="http://schemas.openxmlformats.org/officeDocument/2006/relationships" xmlns:p="http://schemas.openxmlformats.org/presentationml/2006/main">
-  <p:cSld>
-    <p:spTree>
-      <p:nvGrpSpPr>
-        <p:cNvPr id="1" name=""/>
-        <p:cNvGrpSpPr/>
-        <p:nvPr/>
-      </p:nvGrpSpPr>
-      <p:grpSpPr>
-        <a:xfrm>
-          <a:off x="0" y="0"/>
-          <a:ext cx="0" cy="0"/>
-          <a:chOff x="0" y="0"/>
-          <a:chExt cx="0" cy="0"/>
-        </a:xfrm>
-      </p:grpSpPr>
-      <p:sp>
-        <p:nvSpPr>
-          <p:cNvPr id="2" name="Title 1"/>
-          <p:cNvSpPr>
-            <a:spLocks noGrp="1"/>
-          </p:cNvSpPr>
-          <p:nvPr>
-            <p:ph type="title"/>
-          </p:nvPr>
-        </p:nvSpPr>
-        <p:spPr>
-          <a:xfrm>
-            <a:off x="0" y="0"/>
-            <a:ext cx="9144000" cy="602780"/>
-          </a:xfrm>
-          <a:solidFill>
-            <a:srgbClr val="70121D"/>
-          </a:solidFill>
-        </p:spPr>
-        <p:txBody>
-          <a:bodyPr/>
-          <a:lstStyle/>
-          <a:p>
-            <a:pPr lvl="0" indent="0" marL="0">
-              <a:buNone/>
-            </a:pPr>
-            <a:r>
-              <a:rPr/>
-              <a:t>Part 1 · The </a:t>
-            </a:r>
-            <a:r>
-              <a:rPr>
-                <a:latin typeface="Courier"/>
-              </a:rPr>
-              <a:t>ggplot</a:t>
-            </a:r>
-            <a:r>
-              <a:rPr/>
-              <a:t> Grammar, Recapped</a:t>
-            </a:r>
-          </a:p>
-        </p:txBody>
-      </p:sp>
-      <p:sp>
-        <p:nvSpPr>
-          <p:cNvPr id="3" name="Content Placeholder 2"/>
-          <p:cNvSpPr>
-            <a:spLocks noGrp="1"/>
-          </p:cNvSpPr>
-          <p:nvPr>
-            <p:ph idx="1" sz="half"/>
-          </p:nvPr>
-        </p:nvSpPr>
-        <p:spPr/>
-        <p:txBody>
-          <a:bodyPr/>
-          <a:lstStyle/>
-          <a:p>
-            <a:pPr lvl="0" indent="0" marL="0">
-              <a:buNone/>
-            </a:pPr>
-            <a:r>
-              <a:rPr/>
-              <a:t>Every </a:t>
-            </a:r>
-            <a:r>
-              <a:rPr>
-                <a:latin typeface="Courier"/>
-              </a:rPr>
-              <a:t>ggplot</a:t>
-            </a:r>
-            <a:r>
-              <a:rPr/>
-              <a:t> is three pieces joined with </a:t>
-            </a:r>
-            <a:r>
-              <a:rPr>
-                <a:latin typeface="Courier"/>
-              </a:rPr>
-              <a:t>+</a:t>
-            </a:r>
-            <a:r>
-              <a:rPr/>
-              <a:t>:</a:t>
-            </a:r>
-          </a:p>
-          <a:p>
-            <a:pPr lvl="0" indent="-342900" marL="342900">
-              <a:buAutoNum type="arabicPeriod"/>
-            </a:pPr>
-            <a:r>
-              <a:rPr b="1"/>
-              <a:t>data</a:t>
-            </a:r>
-            <a:r>
-              <a:rPr/>
-              <a:t> — which data frame</a:t>
-            </a:r>
-          </a:p>
-          <a:p>
-            <a:pPr lvl="0" indent="-342900" marL="342900">
-              <a:buAutoNum type="arabicPeriod"/>
-            </a:pPr>
-            <a:r>
-              <a:rPr b="1"/>
-              <a:t>aes()</a:t>
-            </a:r>
-            <a:r>
-              <a:rPr/>
-              <a:t> — which columns map to x, y, color, fill…</a:t>
-            </a:r>
-          </a:p>
-          <a:p>
-            <a:pPr lvl="0" indent="-342900" marL="342900">
-              <a:buAutoNum type="arabicPeriod"/>
-            </a:pPr>
-            <a:r>
-              <a:rPr b="1"/>
-              <a:t>geom</a:t>
-            </a:r>
-            <a:r>
-              <a:rPr/>
-              <a:t> — how to draw it</a:t>
-            </a:r>
-          </a:p>
-          <a:p>
-            <a:pPr lvl="0" indent="0">
-              <a:buNone/>
-            </a:pPr>
-            <a:r>
-              <a:rPr>
-                <a:solidFill>
-                  <a:srgbClr val="4758AB"/>
-                </a:solidFill>
-                <a:latin typeface="Courier"/>
-              </a:rPr>
-              <a:t>library</a:t>
-            </a:r>
-            <a:r>
-              <a:rPr>
-                <a:solidFill>
-                  <a:srgbClr val="003B4F"/>
-                </a:solidFill>
-                <a:latin typeface="Courier"/>
-              </a:rPr>
-              <a:t>(tidyverse)</a:t>
-            </a:r>
-            <a:br/>
-            <a:r>
-              <a:rPr>
-                <a:solidFill>
-                  <a:srgbClr val="4758AB"/>
-                </a:solidFill>
-                <a:latin typeface="Courier"/>
-              </a:rPr>
-              <a:t>library</a:t>
-            </a:r>
-            <a:r>
-              <a:rPr>
-                <a:solidFill>
-                  <a:srgbClr val="003B4F"/>
-                </a:solidFill>
-                <a:latin typeface="Courier"/>
-              </a:rPr>
-              <a:t>(readxl)</a:t>
-            </a:r>
-            <a:br/>
-            <a:br/>
-            <a:r>
-              <a:rPr>
-                <a:solidFill>
-                  <a:srgbClr val="003B4F"/>
-                </a:solidFill>
-                <a:latin typeface="Courier"/>
-              </a:rPr>
-              <a:t>pine_df &lt;- </a:t>
-            </a:r>
-            <a:r>
-              <a:rPr>
-                <a:solidFill>
-                  <a:srgbClr val="4758AB"/>
-                </a:solidFill>
-                <a:latin typeface="Courier"/>
-              </a:rPr>
-              <a:t>read_csv</a:t>
-            </a:r>
-            <a:r>
-              <a:rPr>
-                <a:solidFill>
-                  <a:srgbClr val="003B4F"/>
-                </a:solidFill>
-                <a:latin typeface="Courier"/>
-              </a:rPr>
-              <a:t>(</a:t>
-            </a:r>
-            <a:r>
-              <a:rPr>
-                <a:solidFill>
-                  <a:srgbClr val="20794D"/>
-                </a:solidFill>
-                <a:latin typeface="Courier"/>
-              </a:rPr>
-              <a:t>"data/pine_needles.csv"</a:t>
-            </a:r>
-            <a:r>
-              <a:rPr>
-                <a:solidFill>
-                  <a:srgbClr val="003B4F"/>
-                </a:solidFill>
-                <a:latin typeface="Courier"/>
-              </a:rPr>
-              <a:t>)</a:t>
-            </a:r>
-          </a:p>
-          <a:p>
-            <a:pPr lvl="0" indent="0" marL="1270000">
-              <a:buNone/>
-            </a:pPr>
-            <a:r>
-              <a:rPr sz="2000" b="1"/>
-              <a:t>Note</a:t>
-            </a:r>
-          </a:p>
-          <a:p>
-            <a:pPr lvl="0" indent="0" marL="1270000">
-              <a:buNone/>
-            </a:pPr>
-            <a:r>
-              <a:rPr sz="2000" b="1"/>
-              <a:t>✅ Key idea</a:t>
-            </a:r>
-          </a:p>
-          <a:p>
-            <a:pPr lvl="0" indent="0" marL="1270000">
-              <a:buNone/>
-            </a:pPr>
-            <a:r>
-              <a:rPr sz="2000"/>
-              <a:t>Everything today is the </a:t>
-            </a:r>
-            <a:r>
-              <a:rPr sz="2000" i="1"/>
-              <a:t>same three pieces</a:t>
-            </a:r>
-            <a:r>
-              <a:rPr sz="2000"/>
-              <a:t> — we’re just adding more layers and more polish on top of them.</a:t>
-            </a:r>
-          </a:p>
-        </p:txBody>
-      </p:sp>
-      <p:sp>
-        <p:nvSpPr>
-          <p:cNvPr id="4" name="Content Placeholder 3"/>
-          <p:cNvSpPr>
-            <a:spLocks noGrp="1"/>
-          </p:cNvSpPr>
-          <p:nvPr>
-            <p:ph idx="2" sz="half"/>
-          </p:nvPr>
-        </p:nvSpPr>
-        <p:spPr/>
-        <p:txBody>
-          <a:bodyPr/>
-          <a:lstStyle/>
-          <a:p>
-            <a:pPr lvl="0" indent="0" marL="1270000">
-              <a:buNone/>
-            </a:pPr>
-            <a:r>
-              <a:rPr sz="2000" b="1"/>
-              <a:t>Tip</a:t>
-            </a:r>
-          </a:p>
-          <a:p>
-            <a:pPr lvl="0" indent="0" marL="1270000">
-              <a:buNone/>
-            </a:pPr>
-            <a:r>
-              <a:rPr sz="2000" b="1"/>
-              <a:t>🖐 Recap from Module 1</a:t>
-            </a:r>
-          </a:p>
-          <a:p>
-            <a:pPr lvl="0" indent="0">
-              <a:buNone/>
-            </a:pPr>
-            <a:r>
-              <a:rPr>
-                <a:solidFill>
-                  <a:srgbClr val="4758AB"/>
-                </a:solidFill>
-                <a:latin typeface="Courier"/>
-              </a:rPr>
-              <a:t>ggplot</a:t>
-            </a:r>
-            <a:r>
-              <a:rPr>
-                <a:solidFill>
-                  <a:srgbClr val="003B4F"/>
-                </a:solidFill>
-                <a:latin typeface="Courier"/>
-              </a:rPr>
-              <a:t>(pine_df, </a:t>
-            </a:r>
-            <a:r>
-              <a:rPr>
-                <a:solidFill>
-                  <a:srgbClr val="4758AB"/>
-                </a:solidFill>
-                <a:latin typeface="Courier"/>
-              </a:rPr>
-              <a:t>aes</a:t>
-            </a:r>
-            <a:r>
-              <a:rPr>
-                <a:solidFill>
-                  <a:srgbClr val="003B4F"/>
-                </a:solidFill>
-                <a:latin typeface="Courier"/>
-              </a:rPr>
-              <a:t>(</a:t>
-            </a:r>
-            <a:r>
-              <a:rPr>
-                <a:solidFill>
-                  <a:srgbClr val="657422"/>
-                </a:solidFill>
-                <a:latin typeface="Courier"/>
-              </a:rPr>
-              <a:t>x =</a:t>
-            </a:r>
-            <a:r>
-              <a:rPr>
-                <a:solidFill>
-                  <a:srgbClr val="003B4F"/>
-                </a:solidFill>
-                <a:latin typeface="Courier"/>
-              </a:rPr>
-              <a:t> n_s, </a:t>
-            </a:r>
-            <a:r>
-              <a:rPr>
-                <a:solidFill>
-                  <a:srgbClr val="657422"/>
-                </a:solidFill>
-                <a:latin typeface="Courier"/>
-              </a:rPr>
-              <a:t>y =</a:t>
-            </a:r>
-            <a:r>
-              <a:rPr>
-                <a:solidFill>
-                  <a:srgbClr val="003B4F"/>
-                </a:solidFill>
-                <a:latin typeface="Courier"/>
-              </a:rPr>
-              <a:t> length_mm)) </a:t>
-            </a:r>
-            <a:r>
-              <a:rPr>
-                <a:solidFill>
-                  <a:srgbClr val="5E5E5E"/>
-                </a:solidFill>
-                <a:latin typeface="Courier"/>
-              </a:rPr>
-              <a:t>+</a:t>
-            </a:r>
-            <a:br/>
-            <a:r>
-              <a:rPr>
-                <a:solidFill>
-                  <a:srgbClr val="003B4F"/>
-                </a:solidFill>
-                <a:latin typeface="Courier"/>
-              </a:rPr>
-              <a:t>  </a:t>
-            </a:r>
-            <a:r>
-              <a:rPr>
-                <a:solidFill>
-                  <a:srgbClr val="4758AB"/>
-                </a:solidFill>
-                <a:latin typeface="Courier"/>
-              </a:rPr>
-              <a:t>geom_point</a:t>
-            </a:r>
-            <a:r>
-              <a:rPr>
-                <a:solidFill>
-                  <a:srgbClr val="003B4F"/>
-                </a:solidFill>
-                <a:latin typeface="Courier"/>
-              </a:rPr>
-              <a:t>()</a:t>
-            </a:r>
-          </a:p>
-          <a:p>
-            <a:pPr lvl="0" indent="0" marL="1270000">
-              <a:buNone/>
-            </a:pPr>
-          </a:p>
-        </p:txBody>
-      </p:sp>
-    </p:spTree>
-  </p:cSld>
-</p:sld>
-</file>
-
-<file path=ppt/slides/slide4.xml><?xml version="1.0" encoding="utf-8"?>
-<p:sld xmlns:a="http://schemas.openxmlformats.org/drawingml/2006/main" xmlns:r="http://schemas.openxmlformats.org/officeDocument/2006/relationships" xmlns:p="http://schemas.openxmlformats.org/presentationml/2006/main">
-  <p:cSld>
-    <p:spTree>
-      <p:nvGrpSpPr>
-        <p:cNvPr id="1" name=""/>
-        <p:cNvGrpSpPr/>
-        <p:nvPr/>
-      </p:nvGrpSpPr>
-      <p:grpSpPr>
-        <a:xfrm>
-          <a:off x="0" y="0"/>
-          <a:ext cx="0" cy="0"/>
-          <a:chOff x="0" y="0"/>
-          <a:chExt cx="0" cy="0"/>
-        </a:xfrm>
-      </p:grpSpPr>
-      <p:sp>
-        <p:nvSpPr>
-          <p:cNvPr id="2" name="Title 1"/>
-          <p:cNvSpPr>
-            <a:spLocks noGrp="1"/>
-          </p:cNvSpPr>
-          <p:nvPr>
-            <p:ph type="title"/>
-          </p:nvPr>
-        </p:nvSpPr>
-        <p:spPr>
-          <a:xfrm>
             <a:off x="139485" y="78119"/>
             <a:ext cx="8229600" cy="607682"/>
           </a:xfrm>
@@ -5378,2658 +4328,7 @@
             </a:pPr>
             <a:r>
               <a:rPr/>
-              <a:t>Part 2 · Boxplot Anatomy</a:t>
-            </a:r>
-          </a:p>
-        </p:txBody>
-      </p:sp>
-      <p:sp>
-        <p:nvSpPr>
-          <p:cNvPr id="3" name="Text Placeholder 2"/>
-          <p:cNvSpPr>
-            <a:spLocks noGrp="1"/>
-          </p:cNvSpPr>
-          <p:nvPr>
-            <p:ph idx="1" type="body"/>
-          </p:nvPr>
-        </p:nvSpPr>
-        <p:spPr/>
-        <p:txBody>
-          <a:bodyPr/>
-          <a:lstStyle/>
-          <a:p>
-            <a:pPr lvl="0" indent="0">
-              <a:buNone/>
-            </a:pPr>
-            <a:r>
-              <a:rPr>
-                <a:solidFill>
-                  <a:srgbClr val="003B4F"/>
-                </a:solidFill>
-                <a:latin typeface="Courier"/>
-              </a:rPr>
-              <a:t>pine_box_plot &lt;- </a:t>
-            </a:r>
-            <a:r>
-              <a:rPr>
-                <a:solidFill>
-                  <a:srgbClr val="4758AB"/>
-                </a:solidFill>
-                <a:latin typeface="Courier"/>
-              </a:rPr>
-              <a:t>ggplot</a:t>
-            </a:r>
-            <a:r>
-              <a:rPr>
-                <a:solidFill>
-                  <a:srgbClr val="003B4F"/>
-                </a:solidFill>
-                <a:latin typeface="Courier"/>
-              </a:rPr>
-              <a:t>(pine_df, </a:t>
-            </a:r>
-            <a:r>
-              <a:rPr>
-                <a:solidFill>
-                  <a:srgbClr val="4758AB"/>
-                </a:solidFill>
-                <a:latin typeface="Courier"/>
-              </a:rPr>
-              <a:t>aes</a:t>
-            </a:r>
-            <a:r>
-              <a:rPr>
-                <a:solidFill>
-                  <a:srgbClr val="003B4F"/>
-                </a:solidFill>
-                <a:latin typeface="Courier"/>
-              </a:rPr>
-              <a:t>(</a:t>
-            </a:r>
-            <a:r>
-              <a:rPr>
-                <a:solidFill>
-                  <a:srgbClr val="657422"/>
-                </a:solidFill>
-                <a:latin typeface="Courier"/>
-              </a:rPr>
-              <a:t>x =</a:t>
-            </a:r>
-            <a:r>
-              <a:rPr>
-                <a:solidFill>
-                  <a:srgbClr val="003B4F"/>
-                </a:solidFill>
-                <a:latin typeface="Courier"/>
-              </a:rPr>
-              <a:t> n_s, </a:t>
-            </a:r>
-            <a:r>
-              <a:rPr>
-                <a:solidFill>
-                  <a:srgbClr val="657422"/>
-                </a:solidFill>
-                <a:latin typeface="Courier"/>
-              </a:rPr>
-              <a:t>y =</a:t>
-            </a:r>
-            <a:r>
-              <a:rPr>
-                <a:solidFill>
-                  <a:srgbClr val="003B4F"/>
-                </a:solidFill>
-                <a:latin typeface="Courier"/>
-              </a:rPr>
-              <a:t> length_mm, </a:t>
-            </a:r>
-            <a:r>
-              <a:rPr>
-                <a:solidFill>
-                  <a:srgbClr val="657422"/>
-                </a:solidFill>
-                <a:latin typeface="Courier"/>
-              </a:rPr>
-              <a:t>fill =</a:t>
-            </a:r>
-            <a:r>
-              <a:rPr>
-                <a:solidFill>
-                  <a:srgbClr val="003B4F"/>
-                </a:solidFill>
-                <a:latin typeface="Courier"/>
-              </a:rPr>
-              <a:t> n_s)) </a:t>
-            </a:r>
-            <a:r>
-              <a:rPr>
-                <a:solidFill>
-                  <a:srgbClr val="5E5E5E"/>
-                </a:solidFill>
-                <a:latin typeface="Courier"/>
-              </a:rPr>
-              <a:t>+</a:t>
-            </a:r>
-            <a:br/>
-            <a:r>
-              <a:rPr>
-                <a:solidFill>
-                  <a:srgbClr val="003B4F"/>
-                </a:solidFill>
-                <a:latin typeface="Courier"/>
-              </a:rPr>
-              <a:t>  </a:t>
-            </a:r>
-            <a:r>
-              <a:rPr>
-                <a:solidFill>
-                  <a:srgbClr val="4758AB"/>
-                </a:solidFill>
-                <a:latin typeface="Courier"/>
-              </a:rPr>
-              <a:t>geom_boxplot</a:t>
-            </a:r>
-            <a:r>
-              <a:rPr>
-                <a:solidFill>
-                  <a:srgbClr val="003B4F"/>
-                </a:solidFill>
-                <a:latin typeface="Courier"/>
-              </a:rPr>
-              <a:t>(</a:t>
-            </a:r>
-            <a:r>
-              <a:rPr>
-                <a:solidFill>
-                  <a:srgbClr val="657422"/>
-                </a:solidFill>
-                <a:latin typeface="Courier"/>
-              </a:rPr>
-              <a:t>alpha =</a:t>
-            </a:r>
-            <a:r>
-              <a:rPr>
-                <a:solidFill>
-                  <a:srgbClr val="003B4F"/>
-                </a:solidFill>
-                <a:latin typeface="Courier"/>
-              </a:rPr>
-              <a:t> </a:t>
-            </a:r>
-            <a:r>
-              <a:rPr>
-                <a:solidFill>
-                  <a:srgbClr val="AD0000"/>
-                </a:solidFill>
-                <a:latin typeface="Courier"/>
-              </a:rPr>
-              <a:t>0.6</a:t>
-            </a:r>
-            <a:r>
-              <a:rPr>
-                <a:solidFill>
-                  <a:srgbClr val="003B4F"/>
-                </a:solidFill>
-                <a:latin typeface="Courier"/>
-              </a:rPr>
-              <a:t>, </a:t>
-            </a:r>
-            <a:r>
-              <a:rPr>
-                <a:solidFill>
-                  <a:srgbClr val="657422"/>
-                </a:solidFill>
-                <a:latin typeface="Courier"/>
-              </a:rPr>
-              <a:t>outlier.shape =</a:t>
-            </a:r>
-            <a:r>
-              <a:rPr>
-                <a:solidFill>
-                  <a:srgbClr val="003B4F"/>
-                </a:solidFill>
-                <a:latin typeface="Courier"/>
-              </a:rPr>
-              <a:t> </a:t>
-            </a:r>
-            <a:r>
-              <a:rPr>
-                <a:solidFill>
-                  <a:srgbClr val="8F5902"/>
-                </a:solidFill>
-                <a:latin typeface="Courier"/>
-              </a:rPr>
-              <a:t>NA</a:t>
-            </a:r>
-            <a:r>
-              <a:rPr>
-                <a:solidFill>
-                  <a:srgbClr val="003B4F"/>
-                </a:solidFill>
-                <a:latin typeface="Courier"/>
-              </a:rPr>
-              <a:t>) </a:t>
-            </a:r>
-            <a:r>
-              <a:rPr>
-                <a:solidFill>
-                  <a:srgbClr val="5E5E5E"/>
-                </a:solidFill>
-                <a:latin typeface="Courier"/>
-              </a:rPr>
-              <a:t>+</a:t>
-            </a:r>
-            <a:br/>
-            <a:r>
-              <a:rPr>
-                <a:solidFill>
-                  <a:srgbClr val="003B4F"/>
-                </a:solidFill>
-                <a:latin typeface="Courier"/>
-              </a:rPr>
-              <a:t>  </a:t>
-            </a:r>
-            <a:r>
-              <a:rPr>
-                <a:solidFill>
-                  <a:srgbClr val="4758AB"/>
-                </a:solidFill>
-                <a:latin typeface="Courier"/>
-              </a:rPr>
-              <a:t>labs</a:t>
-            </a:r>
-            <a:r>
-              <a:rPr>
-                <a:solidFill>
-                  <a:srgbClr val="003B4F"/>
-                </a:solidFill>
-                <a:latin typeface="Courier"/>
-              </a:rPr>
-              <a:t>(</a:t>
-            </a:r>
-            <a:br/>
-            <a:r>
-              <a:rPr>
-                <a:solidFill>
-                  <a:srgbClr val="003B4F"/>
-                </a:solidFill>
-                <a:latin typeface="Courier"/>
-              </a:rPr>
-              <a:t>    </a:t>
-            </a:r>
-            <a:r>
-              <a:rPr>
-                <a:solidFill>
-                  <a:srgbClr val="657422"/>
-                </a:solidFill>
-                <a:latin typeface="Courier"/>
-              </a:rPr>
-              <a:t>title =</a:t>
-            </a:r>
-            <a:r>
-              <a:rPr>
-                <a:solidFill>
-                  <a:srgbClr val="003B4F"/>
-                </a:solidFill>
-                <a:latin typeface="Courier"/>
-              </a:rPr>
-              <a:t> </a:t>
-            </a:r>
-            <a:r>
-              <a:rPr>
-                <a:solidFill>
-                  <a:srgbClr val="20794D"/>
-                </a:solidFill>
-                <a:latin typeface="Courier"/>
-              </a:rPr>
-              <a:t>"Needle Length by Side of Tree"</a:t>
-            </a:r>
-            <a:r>
-              <a:rPr>
-                <a:solidFill>
-                  <a:srgbClr val="003B4F"/>
-                </a:solidFill>
-                <a:latin typeface="Courier"/>
-              </a:rPr>
-              <a:t>,</a:t>
-            </a:r>
-            <a:br/>
-            <a:r>
-              <a:rPr>
-                <a:solidFill>
-                  <a:srgbClr val="003B4F"/>
-                </a:solidFill>
-                <a:latin typeface="Courier"/>
-              </a:rPr>
-              <a:t>    </a:t>
-            </a:r>
-            <a:r>
-              <a:rPr>
-                <a:solidFill>
-                  <a:srgbClr val="657422"/>
-                </a:solidFill>
-                <a:latin typeface="Courier"/>
-              </a:rPr>
-              <a:t>x =</a:t>
-            </a:r>
-            <a:r>
-              <a:rPr>
-                <a:solidFill>
-                  <a:srgbClr val="003B4F"/>
-                </a:solidFill>
-                <a:latin typeface="Courier"/>
-              </a:rPr>
-              <a:t> </a:t>
-            </a:r>
-            <a:r>
-              <a:rPr>
-                <a:solidFill>
-                  <a:srgbClr val="20794D"/>
-                </a:solidFill>
-                <a:latin typeface="Courier"/>
-              </a:rPr>
-              <a:t>"Side (n = lee, s = windward)"</a:t>
-            </a:r>
-            <a:r>
-              <a:rPr>
-                <a:solidFill>
-                  <a:srgbClr val="003B4F"/>
-                </a:solidFill>
-                <a:latin typeface="Courier"/>
-              </a:rPr>
-              <a:t>,</a:t>
-            </a:r>
-            <a:br/>
-            <a:r>
-              <a:rPr>
-                <a:solidFill>
-                  <a:srgbClr val="003B4F"/>
-                </a:solidFill>
-                <a:latin typeface="Courier"/>
-              </a:rPr>
-              <a:t>    </a:t>
-            </a:r>
-            <a:r>
-              <a:rPr>
-                <a:solidFill>
-                  <a:srgbClr val="657422"/>
-                </a:solidFill>
-                <a:latin typeface="Courier"/>
-              </a:rPr>
-              <a:t>y =</a:t>
-            </a:r>
-            <a:r>
-              <a:rPr>
-                <a:solidFill>
-                  <a:srgbClr val="003B4F"/>
-                </a:solidFill>
-                <a:latin typeface="Courier"/>
-              </a:rPr>
-              <a:t> </a:t>
-            </a:r>
-            <a:r>
-              <a:rPr>
-                <a:solidFill>
-                  <a:srgbClr val="20794D"/>
-                </a:solidFill>
-                <a:latin typeface="Courier"/>
-              </a:rPr>
-              <a:t>"Needle length (mm)"</a:t>
-            </a:r>
-            <a:r>
-              <a:rPr>
-                <a:solidFill>
-                  <a:srgbClr val="003B4F"/>
-                </a:solidFill>
-                <a:latin typeface="Courier"/>
-              </a:rPr>
-              <a:t>,</a:t>
-            </a:r>
-            <a:br/>
-            <a:r>
-              <a:rPr>
-                <a:solidFill>
-                  <a:srgbClr val="003B4F"/>
-                </a:solidFill>
-                <a:latin typeface="Courier"/>
-              </a:rPr>
-              <a:t>    </a:t>
-            </a:r>
-            <a:r>
-              <a:rPr>
-                <a:solidFill>
-                  <a:srgbClr val="657422"/>
-                </a:solidFill>
-                <a:latin typeface="Courier"/>
-              </a:rPr>
-              <a:t>fill =</a:t>
-            </a:r>
-            <a:r>
-              <a:rPr>
-                <a:solidFill>
-                  <a:srgbClr val="003B4F"/>
-                </a:solidFill>
-                <a:latin typeface="Courier"/>
-              </a:rPr>
-              <a:t> </a:t>
-            </a:r>
-            <a:r>
-              <a:rPr>
-                <a:solidFill>
-                  <a:srgbClr val="20794D"/>
-                </a:solidFill>
-                <a:latin typeface="Courier"/>
-              </a:rPr>
-              <a:t>"Side"</a:t>
-            </a:r>
-            <a:br/>
-            <a:r>
-              <a:rPr>
-                <a:solidFill>
-                  <a:srgbClr val="003B4F"/>
-                </a:solidFill>
-                <a:latin typeface="Courier"/>
-              </a:rPr>
-              <a:t>  ) </a:t>
-            </a:r>
-            <a:r>
-              <a:rPr>
-                <a:solidFill>
-                  <a:srgbClr val="5E5E5E"/>
-                </a:solidFill>
-                <a:latin typeface="Courier"/>
-              </a:rPr>
-              <a:t>+</a:t>
-            </a:r>
-            <a:br/>
-            <a:r>
-              <a:rPr>
-                <a:solidFill>
-                  <a:srgbClr val="003B4F"/>
-                </a:solidFill>
-                <a:latin typeface="Courier"/>
-              </a:rPr>
-              <a:t>  </a:t>
-            </a:r>
-            <a:r>
-              <a:rPr>
-                <a:solidFill>
-                  <a:srgbClr val="4758AB"/>
-                </a:solidFill>
-                <a:latin typeface="Courier"/>
-              </a:rPr>
-              <a:t>theme_minimal</a:t>
-            </a:r>
-            <a:r>
-              <a:rPr>
-                <a:solidFill>
-                  <a:srgbClr val="003B4F"/>
-                </a:solidFill>
-                <a:latin typeface="Courier"/>
-              </a:rPr>
-              <a:t>() </a:t>
-            </a:r>
-            <a:r>
-              <a:rPr>
-                <a:solidFill>
-                  <a:srgbClr val="5E5E5E"/>
-                </a:solidFill>
-                <a:latin typeface="Courier"/>
-              </a:rPr>
-              <a:t>+</a:t>
-            </a:r>
-            <a:br/>
-            <a:r>
-              <a:rPr>
-                <a:solidFill>
-                  <a:srgbClr val="003B4F"/>
-                </a:solidFill>
-                <a:latin typeface="Courier"/>
-              </a:rPr>
-              <a:t>  </a:t>
-            </a:r>
-            <a:r>
-              <a:rPr>
-                <a:solidFill>
-                  <a:srgbClr val="4758AB"/>
-                </a:solidFill>
-                <a:latin typeface="Courier"/>
-              </a:rPr>
-              <a:t>theme</a:t>
-            </a:r>
-            <a:r>
-              <a:rPr>
-                <a:solidFill>
-                  <a:srgbClr val="003B4F"/>
-                </a:solidFill>
-                <a:latin typeface="Courier"/>
-              </a:rPr>
-              <a:t>(</a:t>
-            </a:r>
-            <a:r>
-              <a:rPr>
-                <a:solidFill>
-                  <a:srgbClr val="657422"/>
-                </a:solidFill>
-                <a:latin typeface="Courier"/>
-              </a:rPr>
-              <a:t>legend.position =</a:t>
-            </a:r>
-            <a:r>
-              <a:rPr>
-                <a:solidFill>
-                  <a:srgbClr val="003B4F"/>
-                </a:solidFill>
-                <a:latin typeface="Courier"/>
-              </a:rPr>
-              <a:t> </a:t>
-            </a:r>
-            <a:r>
-              <a:rPr>
-                <a:solidFill>
-                  <a:srgbClr val="20794D"/>
-                </a:solidFill>
-                <a:latin typeface="Courier"/>
-              </a:rPr>
-              <a:t>"none"</a:t>
-            </a:r>
-            <a:r>
-              <a:rPr>
-                <a:solidFill>
-                  <a:srgbClr val="003B4F"/>
-                </a:solidFill>
-                <a:latin typeface="Courier"/>
-              </a:rPr>
-              <a:t>)</a:t>
-            </a:r>
-            <a:br/>
-            <a:br/>
-            <a:r>
-              <a:rPr>
-                <a:solidFill>
-                  <a:srgbClr val="003B4F"/>
-                </a:solidFill>
-                <a:latin typeface="Courier"/>
-              </a:rPr>
-              <a:t>pine_box_plot</a:t>
-            </a:r>
-          </a:p>
-        </p:txBody>
-      </p:sp>
-      <p:pic>
-        <p:nvPicPr>
-          <p:cNvPr descr="graphing_effectively_lecture_files/figure-pptx/unnamed-chunk-3-1.png" id="0" name="Picture 1"/>
-          <p:cNvPicPr>
-            <a:picLocks noGrp="1" noChangeAspect="1"/>
-          </p:cNvPicPr>
-          <p:nvPr/>
-        </p:nvPicPr>
-        <p:blipFill>
-          <a:blip r:embed="rId2"/>
-          <a:stretch>
-            <a:fillRect/>
-          </a:stretch>
-        </p:blipFill>
-        <p:spPr bwMode="auto">
-          <a:xfrm>
-            <a:off x="127000" y="1562100"/>
-            <a:ext cx="4432300" cy="2730500"/>
-          </a:xfrm>
-          <a:prstGeom prst="rect">
-            <a:avLst/>
-          </a:prstGeom>
-          <a:noFill/>
-          <a:ln w="9525">
-            <a:noFill/>
-            <a:headEnd/>
-            <a:tailEnd/>
-          </a:ln>
-        </p:spPr>
-      </p:pic>
-      <p:sp>
-        <p:nvSpPr>
-          <p:cNvPr id="5" name="Text Placeholder 4"/>
-          <p:cNvSpPr>
-            <a:spLocks noGrp="1"/>
-          </p:cNvSpPr>
-          <p:nvPr>
-            <p:ph idx="3" sz="quarter" type="body"/>
-          </p:nvPr>
-        </p:nvSpPr>
-        <p:spPr/>
-        <p:txBody>
-          <a:bodyPr/>
-          <a:lstStyle/>
-          <a:p>
-            <a:pPr lvl="0" indent="0" marL="0">
-              <a:buNone/>
-            </a:pPr>
-            <a:r>
-              <a:rPr b="1"/>
-              <a:t>Boxplot anatomy:</a:t>
-            </a:r>
-          </a:p>
-          <a:p>
-            <a:pPr lvl="0"/>
-            <a:r>
-              <a:rPr/>
-              <a:t>Middle line = </a:t>
-            </a:r>
-            <a:r>
-              <a:rPr b="1"/>
-              <a:t>median</a:t>
-            </a:r>
-          </a:p>
-          <a:p>
-            <a:pPr lvl="0"/>
-            <a:r>
-              <a:rPr/>
-              <a:t>Box edges = 25th and 75th percentile (</a:t>
-            </a:r>
-            <a:r>
-              <a:rPr b="1"/>
-              <a:t>IQR</a:t>
-            </a:r>
-            <a:r>
-              <a:rPr/>
-              <a:t>)</a:t>
-            </a:r>
-          </a:p>
-          <a:p>
-            <a:pPr lvl="0"/>
-            <a:r>
-              <a:rPr/>
-              <a:t>Whiskers = 1.5 × IQR</a:t>
-            </a:r>
-          </a:p>
-          <a:p>
-            <a:pPr lvl="0"/>
-            <a:r>
-              <a:rPr/>
-              <a:t>Dots beyond whiskers = </a:t>
-            </a:r>
-            <a:r>
-              <a:rPr b="1"/>
-              <a:t>outliers</a:t>
-            </a:r>
-          </a:p>
-          <a:p>
-            <a:pPr lvl="0" indent="0" marL="0">
-              <a:buNone/>
-            </a:pPr>
-            <a:r>
-              <a:rPr/>
-              <a:t>📖 R4DS §9 — Layers</a:t>
-            </a:r>
-          </a:p>
-        </p:txBody>
-      </p:sp>
-    </p:spTree>
-  </p:cSld>
-</p:sld>
-</file>
-
-<file path=ppt/slides/slide5.xml><?xml version="1.0" encoding="utf-8"?>
-<p:sld xmlns:a="http://schemas.openxmlformats.org/drawingml/2006/main" xmlns:r="http://schemas.openxmlformats.org/officeDocument/2006/relationships" xmlns:p="http://schemas.openxmlformats.org/presentationml/2006/main">
-  <p:cSld>
-    <p:spTree>
-      <p:nvGrpSpPr>
-        <p:cNvPr id="1" name=""/>
-        <p:cNvGrpSpPr/>
-        <p:nvPr/>
-      </p:nvGrpSpPr>
-      <p:grpSpPr>
-        <a:xfrm>
-          <a:off x="0" y="0"/>
-          <a:ext cx="0" cy="0"/>
-          <a:chOff x="0" y="0"/>
-          <a:chExt cx="0" cy="0"/>
-        </a:xfrm>
-      </p:grpSpPr>
-      <p:sp>
-        <p:nvSpPr>
-          <p:cNvPr id="2" name="Title 1"/>
-          <p:cNvSpPr>
-            <a:spLocks noGrp="1"/>
-          </p:cNvSpPr>
-          <p:nvPr>
-            <p:ph type="title"/>
-          </p:nvPr>
-        </p:nvSpPr>
-        <p:spPr>
-          <a:xfrm>
-            <a:off x="0" y="0"/>
-            <a:ext cx="9144000" cy="582780"/>
-          </a:xfrm>
-        </p:spPr>
-        <p:txBody>
-          <a:bodyPr/>
-          <a:lstStyle/>
-          <a:p>
-            <a:pPr lvl="0" indent="0" marL="0">
-              <a:buNone/>
-            </a:pPr>
-            <a:r>
-              <a:rPr/>
-              <a:t>Boxplot + Raw Points</a:t>
-            </a:r>
-          </a:p>
-        </p:txBody>
-      </p:sp>
-      <p:sp>
-        <p:nvSpPr>
-          <p:cNvPr id="3" name="Content Placeholder 2"/>
-          <p:cNvSpPr>
-            <a:spLocks noGrp="1"/>
-          </p:cNvSpPr>
-          <p:nvPr>
-            <p:ph idx="1"/>
-          </p:nvPr>
-        </p:nvSpPr>
-        <p:spPr/>
-        <p:txBody>
-          <a:bodyPr/>
-          <a:lstStyle/>
-          <a:p>
-            <a:pPr lvl="0" indent="0" marL="1270000">
-              <a:buNone/>
-            </a:pPr>
-            <a:r>
-              <a:rPr sz="2000" b="1"/>
-              <a:t>Note</a:t>
-            </a:r>
-          </a:p>
-          <a:p>
-            <a:pPr lvl="0" indent="0" marL="1270000">
-              <a:buNone/>
-            </a:pPr>
-            <a:r>
-              <a:rPr sz="2000" b="1"/>
-              <a:t>🔮 Predict first:</a:t>
-            </a:r>
-            <a:r>
-              <a:rPr sz="2000"/>
-              <a:t> With only 6 needles per side per tree, does a boxplot alone show you everything? What might it hide?</a:t>
-            </a:r>
-          </a:p>
-        </p:txBody>
-      </p:sp>
-    </p:spTree>
-  </p:cSld>
-</p:sld>
-</file>
-
-<file path=ppt/slides/slide6.xml><?xml version="1.0" encoding="utf-8"?>
-<p:sld xmlns:a="http://schemas.openxmlformats.org/drawingml/2006/main" xmlns:r="http://schemas.openxmlformats.org/officeDocument/2006/relationships" xmlns:p="http://schemas.openxmlformats.org/presentationml/2006/main">
-  <p:cSld>
-    <p:spTree>
-      <p:nvGrpSpPr>
-        <p:cNvPr id="1" name=""/>
-        <p:cNvGrpSpPr/>
-        <p:nvPr/>
-      </p:nvGrpSpPr>
-      <p:grpSpPr>
-        <a:xfrm>
-          <a:off x="0" y="0"/>
-          <a:ext cx="0" cy="0"/>
-          <a:chOff x="0" y="0"/>
-          <a:chExt cx="0" cy="0"/>
-        </a:xfrm>
-      </p:grpSpPr>
-      <p:sp>
-        <p:nvSpPr>
-          <p:cNvPr id="3" name="Text Placeholder 2"/>
-          <p:cNvSpPr>
-            <a:spLocks noGrp="1"/>
-          </p:cNvSpPr>
-          <p:nvPr>
-            <p:ph idx="1" type="body"/>
-          </p:nvPr>
-        </p:nvSpPr>
-        <p:spPr/>
-        <p:txBody>
-          <a:bodyPr/>
-          <a:lstStyle/>
-          <a:p>
-            <a:pPr lvl="0" indent="0">
-              <a:buNone/>
-            </a:pPr>
-            <a:r>
-              <a:rPr>
-                <a:solidFill>
-                  <a:srgbClr val="003B4F"/>
-                </a:solidFill>
-                <a:latin typeface="Courier"/>
-              </a:rPr>
-              <a:t>pine_jitter_plot &lt;- </a:t>
-            </a:r>
-            <a:r>
-              <a:rPr>
-                <a:solidFill>
-                  <a:srgbClr val="4758AB"/>
-                </a:solidFill>
-                <a:latin typeface="Courier"/>
-              </a:rPr>
-              <a:t>ggplot</a:t>
-            </a:r>
-            <a:r>
-              <a:rPr>
-                <a:solidFill>
-                  <a:srgbClr val="003B4F"/>
-                </a:solidFill>
-                <a:latin typeface="Courier"/>
-              </a:rPr>
-              <a:t>(pine_df, </a:t>
-            </a:r>
-            <a:r>
-              <a:rPr>
-                <a:solidFill>
-                  <a:srgbClr val="4758AB"/>
-                </a:solidFill>
-                <a:latin typeface="Courier"/>
-              </a:rPr>
-              <a:t>aes</a:t>
-            </a:r>
-            <a:r>
-              <a:rPr>
-                <a:solidFill>
-                  <a:srgbClr val="003B4F"/>
-                </a:solidFill>
-                <a:latin typeface="Courier"/>
-              </a:rPr>
-              <a:t>(</a:t>
-            </a:r>
-            <a:r>
-              <a:rPr>
-                <a:solidFill>
-                  <a:srgbClr val="657422"/>
-                </a:solidFill>
-                <a:latin typeface="Courier"/>
-              </a:rPr>
-              <a:t>x =</a:t>
-            </a:r>
-            <a:r>
-              <a:rPr>
-                <a:solidFill>
-                  <a:srgbClr val="003B4F"/>
-                </a:solidFill>
-                <a:latin typeface="Courier"/>
-              </a:rPr>
-              <a:t> n_s, </a:t>
-            </a:r>
-            <a:r>
-              <a:rPr>
-                <a:solidFill>
-                  <a:srgbClr val="657422"/>
-                </a:solidFill>
-                <a:latin typeface="Courier"/>
-              </a:rPr>
-              <a:t>y =</a:t>
-            </a:r>
-            <a:r>
-              <a:rPr>
-                <a:solidFill>
-                  <a:srgbClr val="003B4F"/>
-                </a:solidFill>
-                <a:latin typeface="Courier"/>
-              </a:rPr>
-              <a:t> length_mm, </a:t>
-            </a:r>
-            <a:r>
-              <a:rPr>
-                <a:solidFill>
-                  <a:srgbClr val="657422"/>
-                </a:solidFill>
-                <a:latin typeface="Courier"/>
-              </a:rPr>
-              <a:t>fill =</a:t>
-            </a:r>
-            <a:r>
-              <a:rPr>
-                <a:solidFill>
-                  <a:srgbClr val="003B4F"/>
-                </a:solidFill>
-                <a:latin typeface="Courier"/>
-              </a:rPr>
-              <a:t> n_s)) </a:t>
-            </a:r>
-            <a:r>
-              <a:rPr>
-                <a:solidFill>
-                  <a:srgbClr val="5E5E5E"/>
-                </a:solidFill>
-                <a:latin typeface="Courier"/>
-              </a:rPr>
-              <a:t>+</a:t>
-            </a:r>
-            <a:br/>
-            <a:r>
-              <a:rPr>
-                <a:solidFill>
-                  <a:srgbClr val="003B4F"/>
-                </a:solidFill>
-                <a:latin typeface="Courier"/>
-              </a:rPr>
-              <a:t>  </a:t>
-            </a:r>
-            <a:r>
-              <a:rPr>
-                <a:solidFill>
-                  <a:srgbClr val="4758AB"/>
-                </a:solidFill>
-                <a:latin typeface="Courier"/>
-              </a:rPr>
-              <a:t>geom_boxplot</a:t>
-            </a:r>
-            <a:r>
-              <a:rPr>
-                <a:solidFill>
-                  <a:srgbClr val="003B4F"/>
-                </a:solidFill>
-                <a:latin typeface="Courier"/>
-              </a:rPr>
-              <a:t>(</a:t>
-            </a:r>
-            <a:r>
-              <a:rPr>
-                <a:solidFill>
-                  <a:srgbClr val="657422"/>
-                </a:solidFill>
-                <a:latin typeface="Courier"/>
-              </a:rPr>
-              <a:t>alpha =</a:t>
-            </a:r>
-            <a:r>
-              <a:rPr>
-                <a:solidFill>
-                  <a:srgbClr val="003B4F"/>
-                </a:solidFill>
-                <a:latin typeface="Courier"/>
-              </a:rPr>
-              <a:t> </a:t>
-            </a:r>
-            <a:r>
-              <a:rPr>
-                <a:solidFill>
-                  <a:srgbClr val="AD0000"/>
-                </a:solidFill>
-                <a:latin typeface="Courier"/>
-              </a:rPr>
-              <a:t>0.5</a:t>
-            </a:r>
-            <a:r>
-              <a:rPr>
-                <a:solidFill>
-                  <a:srgbClr val="003B4F"/>
-                </a:solidFill>
-                <a:latin typeface="Courier"/>
-              </a:rPr>
-              <a:t>, </a:t>
-            </a:r>
-            <a:r>
-              <a:rPr>
-                <a:solidFill>
-                  <a:srgbClr val="657422"/>
-                </a:solidFill>
-                <a:latin typeface="Courier"/>
-              </a:rPr>
-              <a:t>outlier.shape =</a:t>
-            </a:r>
-            <a:r>
-              <a:rPr>
-                <a:solidFill>
-                  <a:srgbClr val="003B4F"/>
-                </a:solidFill>
-                <a:latin typeface="Courier"/>
-              </a:rPr>
-              <a:t> </a:t>
-            </a:r>
-            <a:r>
-              <a:rPr>
-                <a:solidFill>
-                  <a:srgbClr val="8F5902"/>
-                </a:solidFill>
-                <a:latin typeface="Courier"/>
-              </a:rPr>
-              <a:t>NA</a:t>
-            </a:r>
-            <a:r>
-              <a:rPr>
-                <a:solidFill>
-                  <a:srgbClr val="003B4F"/>
-                </a:solidFill>
-                <a:latin typeface="Courier"/>
-              </a:rPr>
-              <a:t>) </a:t>
-            </a:r>
-            <a:r>
-              <a:rPr>
-                <a:solidFill>
-                  <a:srgbClr val="5E5E5E"/>
-                </a:solidFill>
-                <a:latin typeface="Courier"/>
-              </a:rPr>
-              <a:t>+</a:t>
-            </a:r>
-            <a:br/>
-            <a:r>
-              <a:rPr>
-                <a:solidFill>
-                  <a:srgbClr val="003B4F"/>
-                </a:solidFill>
-                <a:latin typeface="Courier"/>
-              </a:rPr>
-              <a:t>  </a:t>
-            </a:r>
-            <a:r>
-              <a:rPr>
-                <a:solidFill>
-                  <a:srgbClr val="4758AB"/>
-                </a:solidFill>
-                <a:latin typeface="Courier"/>
-              </a:rPr>
-              <a:t>geom_point</a:t>
-            </a:r>
-            <a:r>
-              <a:rPr>
-                <a:solidFill>
-                  <a:srgbClr val="003B4F"/>
-                </a:solidFill>
-                <a:latin typeface="Courier"/>
-              </a:rPr>
-              <a:t>(</a:t>
-            </a:r>
-            <a:br/>
-            <a:r>
-              <a:rPr>
-                <a:solidFill>
-                  <a:srgbClr val="003B4F"/>
-                </a:solidFill>
-                <a:latin typeface="Courier"/>
-              </a:rPr>
-              <a:t>    </a:t>
-            </a:r>
-            <a:r>
-              <a:rPr>
-                <a:solidFill>
-                  <a:srgbClr val="657422"/>
-                </a:solidFill>
-                <a:latin typeface="Courier"/>
-              </a:rPr>
-              <a:t>position =</a:t>
-            </a:r>
-            <a:r>
-              <a:rPr>
-                <a:solidFill>
-                  <a:srgbClr val="003B4F"/>
-                </a:solidFill>
-                <a:latin typeface="Courier"/>
-              </a:rPr>
-              <a:t> </a:t>
-            </a:r>
-            <a:r>
-              <a:rPr>
-                <a:solidFill>
-                  <a:srgbClr val="4758AB"/>
-                </a:solidFill>
-                <a:latin typeface="Courier"/>
-              </a:rPr>
-              <a:t>position_jitter</a:t>
-            </a:r>
-            <a:r>
-              <a:rPr>
-                <a:solidFill>
-                  <a:srgbClr val="003B4F"/>
-                </a:solidFill>
-                <a:latin typeface="Courier"/>
-              </a:rPr>
-              <a:t>(</a:t>
-            </a:r>
-            <a:r>
-              <a:rPr>
-                <a:solidFill>
-                  <a:srgbClr val="657422"/>
-                </a:solidFill>
-                <a:latin typeface="Courier"/>
-              </a:rPr>
-              <a:t>width =</a:t>
-            </a:r>
-            <a:r>
-              <a:rPr>
-                <a:solidFill>
-                  <a:srgbClr val="003B4F"/>
-                </a:solidFill>
-                <a:latin typeface="Courier"/>
-              </a:rPr>
-              <a:t> </a:t>
-            </a:r>
-            <a:r>
-              <a:rPr>
-                <a:solidFill>
-                  <a:srgbClr val="AD0000"/>
-                </a:solidFill>
-                <a:latin typeface="Courier"/>
-              </a:rPr>
-              <a:t>0.15</a:t>
-            </a:r>
-            <a:r>
-              <a:rPr>
-                <a:solidFill>
-                  <a:srgbClr val="003B4F"/>
-                </a:solidFill>
-                <a:latin typeface="Courier"/>
-              </a:rPr>
-              <a:t>, </a:t>
-            </a:r>
-            <a:r>
-              <a:rPr>
-                <a:solidFill>
-                  <a:srgbClr val="657422"/>
-                </a:solidFill>
-                <a:latin typeface="Courier"/>
-              </a:rPr>
-              <a:t>seed =</a:t>
-            </a:r>
-            <a:r>
-              <a:rPr>
-                <a:solidFill>
-                  <a:srgbClr val="003B4F"/>
-                </a:solidFill>
-                <a:latin typeface="Courier"/>
-              </a:rPr>
-              <a:t> </a:t>
-            </a:r>
-            <a:r>
-              <a:rPr>
-                <a:solidFill>
-                  <a:srgbClr val="AD0000"/>
-                </a:solidFill>
-                <a:latin typeface="Courier"/>
-              </a:rPr>
-              <a:t>42</a:t>
-            </a:r>
-            <a:r>
-              <a:rPr>
-                <a:solidFill>
-                  <a:srgbClr val="003B4F"/>
-                </a:solidFill>
-                <a:latin typeface="Courier"/>
-              </a:rPr>
-              <a:t>),</a:t>
-            </a:r>
-            <a:br/>
-            <a:r>
-              <a:rPr>
-                <a:solidFill>
-                  <a:srgbClr val="003B4F"/>
-                </a:solidFill>
-                <a:latin typeface="Courier"/>
-              </a:rPr>
-              <a:t>    </a:t>
-            </a:r>
-            <a:r>
-              <a:rPr>
-                <a:solidFill>
-                  <a:srgbClr val="657422"/>
-                </a:solidFill>
-                <a:latin typeface="Courier"/>
-              </a:rPr>
-              <a:t>alpha =</a:t>
-            </a:r>
-            <a:r>
-              <a:rPr>
-                <a:solidFill>
-                  <a:srgbClr val="003B4F"/>
-                </a:solidFill>
-                <a:latin typeface="Courier"/>
-              </a:rPr>
-              <a:t> </a:t>
-            </a:r>
-            <a:r>
-              <a:rPr>
-                <a:solidFill>
-                  <a:srgbClr val="AD0000"/>
-                </a:solidFill>
-                <a:latin typeface="Courier"/>
-              </a:rPr>
-              <a:t>0.6</a:t>
-            </a:r>
-            <a:r>
-              <a:rPr>
-                <a:solidFill>
-                  <a:srgbClr val="003B4F"/>
-                </a:solidFill>
-                <a:latin typeface="Courier"/>
-              </a:rPr>
-              <a:t>,</a:t>
-            </a:r>
-            <a:br/>
-            <a:r>
-              <a:rPr>
-                <a:solidFill>
-                  <a:srgbClr val="003B4F"/>
-                </a:solidFill>
-                <a:latin typeface="Courier"/>
-              </a:rPr>
-              <a:t>    </a:t>
-            </a:r>
-            <a:r>
-              <a:rPr>
-                <a:solidFill>
-                  <a:srgbClr val="657422"/>
-                </a:solidFill>
-                <a:latin typeface="Courier"/>
-              </a:rPr>
-              <a:t>size =</a:t>
-            </a:r>
-            <a:r>
-              <a:rPr>
-                <a:solidFill>
-                  <a:srgbClr val="003B4F"/>
-                </a:solidFill>
-                <a:latin typeface="Courier"/>
-              </a:rPr>
-              <a:t> </a:t>
-            </a:r>
-            <a:r>
-              <a:rPr>
-                <a:solidFill>
-                  <a:srgbClr val="AD0000"/>
-                </a:solidFill>
-                <a:latin typeface="Courier"/>
-              </a:rPr>
-              <a:t>2</a:t>
-            </a:r>
-            <a:br/>
-            <a:r>
-              <a:rPr>
-                <a:solidFill>
-                  <a:srgbClr val="003B4F"/>
-                </a:solidFill>
-                <a:latin typeface="Courier"/>
-              </a:rPr>
-              <a:t>  ) </a:t>
-            </a:r>
-            <a:r>
-              <a:rPr>
-                <a:solidFill>
-                  <a:srgbClr val="5E5E5E"/>
-                </a:solidFill>
-                <a:latin typeface="Courier"/>
-              </a:rPr>
-              <a:t>+</a:t>
-            </a:r>
-            <a:br/>
-            <a:r>
-              <a:rPr>
-                <a:solidFill>
-                  <a:srgbClr val="003B4F"/>
-                </a:solidFill>
-                <a:latin typeface="Courier"/>
-              </a:rPr>
-              <a:t>  </a:t>
-            </a:r>
-            <a:r>
-              <a:rPr>
-                <a:solidFill>
-                  <a:srgbClr val="4758AB"/>
-                </a:solidFill>
-                <a:latin typeface="Courier"/>
-              </a:rPr>
-              <a:t>labs</a:t>
-            </a:r>
-            <a:r>
-              <a:rPr>
-                <a:solidFill>
-                  <a:srgbClr val="003B4F"/>
-                </a:solidFill>
-                <a:latin typeface="Courier"/>
-              </a:rPr>
-              <a:t>(</a:t>
-            </a:r>
-            <a:br/>
-            <a:r>
-              <a:rPr>
-                <a:solidFill>
-                  <a:srgbClr val="003B4F"/>
-                </a:solidFill>
-                <a:latin typeface="Courier"/>
-              </a:rPr>
-              <a:t>    </a:t>
-            </a:r>
-            <a:r>
-              <a:rPr>
-                <a:solidFill>
-                  <a:srgbClr val="657422"/>
-                </a:solidFill>
-                <a:latin typeface="Courier"/>
-              </a:rPr>
-              <a:t>title =</a:t>
-            </a:r>
-            <a:r>
-              <a:rPr>
-                <a:solidFill>
-                  <a:srgbClr val="003B4F"/>
-                </a:solidFill>
-                <a:latin typeface="Courier"/>
-              </a:rPr>
-              <a:t> </a:t>
-            </a:r>
-            <a:r>
-              <a:rPr>
-                <a:solidFill>
-                  <a:srgbClr val="20794D"/>
-                </a:solidFill>
-                <a:latin typeface="Courier"/>
-              </a:rPr>
-              <a:t>"Needle Length by Side of Tree"</a:t>
-            </a:r>
-            <a:r>
-              <a:rPr>
-                <a:solidFill>
-                  <a:srgbClr val="003B4F"/>
-                </a:solidFill>
-                <a:latin typeface="Courier"/>
-              </a:rPr>
-              <a:t>,</a:t>
-            </a:r>
-            <a:br/>
-            <a:r>
-              <a:rPr>
-                <a:solidFill>
-                  <a:srgbClr val="003B4F"/>
-                </a:solidFill>
-                <a:latin typeface="Courier"/>
-              </a:rPr>
-              <a:t>    </a:t>
-            </a:r>
-            <a:r>
-              <a:rPr>
-                <a:solidFill>
-                  <a:srgbClr val="657422"/>
-                </a:solidFill>
-                <a:latin typeface="Courier"/>
-              </a:rPr>
-              <a:t>x =</a:t>
-            </a:r>
-            <a:r>
-              <a:rPr>
-                <a:solidFill>
-                  <a:srgbClr val="003B4F"/>
-                </a:solidFill>
-                <a:latin typeface="Courier"/>
-              </a:rPr>
-              <a:t> </a:t>
-            </a:r>
-            <a:r>
-              <a:rPr>
-                <a:solidFill>
-                  <a:srgbClr val="20794D"/>
-                </a:solidFill>
-                <a:latin typeface="Courier"/>
-              </a:rPr>
-              <a:t>"Side of tree"</a:t>
-            </a:r>
-            <a:r>
-              <a:rPr>
-                <a:solidFill>
-                  <a:srgbClr val="003B4F"/>
-                </a:solidFill>
-                <a:latin typeface="Courier"/>
-              </a:rPr>
-              <a:t>,</a:t>
-            </a:r>
-            <a:br/>
-            <a:r>
-              <a:rPr>
-                <a:solidFill>
-                  <a:srgbClr val="003B4F"/>
-                </a:solidFill>
-                <a:latin typeface="Courier"/>
-              </a:rPr>
-              <a:t>    </a:t>
-            </a:r>
-            <a:r>
-              <a:rPr>
-                <a:solidFill>
-                  <a:srgbClr val="657422"/>
-                </a:solidFill>
-                <a:latin typeface="Courier"/>
-              </a:rPr>
-              <a:t>y =</a:t>
-            </a:r>
-            <a:r>
-              <a:rPr>
-                <a:solidFill>
-                  <a:srgbClr val="003B4F"/>
-                </a:solidFill>
-                <a:latin typeface="Courier"/>
-              </a:rPr>
-              <a:t> </a:t>
-            </a:r>
-            <a:r>
-              <a:rPr>
-                <a:solidFill>
-                  <a:srgbClr val="20794D"/>
-                </a:solidFill>
-                <a:latin typeface="Courier"/>
-              </a:rPr>
-              <a:t>"Needle length (mm)"</a:t>
-            </a:r>
-            <a:r>
-              <a:rPr>
-                <a:solidFill>
-                  <a:srgbClr val="003B4F"/>
-                </a:solidFill>
-                <a:latin typeface="Courier"/>
-              </a:rPr>
-              <a:t>,</a:t>
-            </a:r>
-            <a:br/>
-            <a:r>
-              <a:rPr>
-                <a:solidFill>
-                  <a:srgbClr val="003B4F"/>
-                </a:solidFill>
-                <a:latin typeface="Courier"/>
-              </a:rPr>
-              <a:t>    </a:t>
-            </a:r>
-            <a:r>
-              <a:rPr>
-                <a:solidFill>
-                  <a:srgbClr val="657422"/>
-                </a:solidFill>
-                <a:latin typeface="Courier"/>
-              </a:rPr>
-              <a:t>fill =</a:t>
-            </a:r>
-            <a:r>
-              <a:rPr>
-                <a:solidFill>
-                  <a:srgbClr val="003B4F"/>
-                </a:solidFill>
-                <a:latin typeface="Courier"/>
-              </a:rPr>
-              <a:t> </a:t>
-            </a:r>
-            <a:r>
-              <a:rPr>
-                <a:solidFill>
-                  <a:srgbClr val="20794D"/>
-                </a:solidFill>
-                <a:latin typeface="Courier"/>
-              </a:rPr>
-              <a:t>"Side"</a:t>
-            </a:r>
-            <a:br/>
-            <a:r>
-              <a:rPr>
-                <a:solidFill>
-                  <a:srgbClr val="003B4F"/>
-                </a:solidFill>
-                <a:latin typeface="Courier"/>
-              </a:rPr>
-              <a:t>  ) </a:t>
-            </a:r>
-            <a:r>
-              <a:rPr>
-                <a:solidFill>
-                  <a:srgbClr val="5E5E5E"/>
-                </a:solidFill>
-                <a:latin typeface="Courier"/>
-              </a:rPr>
-              <a:t>+</a:t>
-            </a:r>
-            <a:br/>
-            <a:r>
-              <a:rPr>
-                <a:solidFill>
-                  <a:srgbClr val="003B4F"/>
-                </a:solidFill>
-                <a:latin typeface="Courier"/>
-              </a:rPr>
-              <a:t>  </a:t>
-            </a:r>
-            <a:r>
-              <a:rPr>
-                <a:solidFill>
-                  <a:srgbClr val="4758AB"/>
-                </a:solidFill>
-                <a:latin typeface="Courier"/>
-              </a:rPr>
-              <a:t>theme_minimal</a:t>
-            </a:r>
-            <a:r>
-              <a:rPr>
-                <a:solidFill>
-                  <a:srgbClr val="003B4F"/>
-                </a:solidFill>
-                <a:latin typeface="Courier"/>
-              </a:rPr>
-              <a:t>() </a:t>
-            </a:r>
-            <a:r>
-              <a:rPr>
-                <a:solidFill>
-                  <a:srgbClr val="5E5E5E"/>
-                </a:solidFill>
-                <a:latin typeface="Courier"/>
-              </a:rPr>
-              <a:t>+</a:t>
-            </a:r>
-            <a:br/>
-            <a:r>
-              <a:rPr>
-                <a:solidFill>
-                  <a:srgbClr val="003B4F"/>
-                </a:solidFill>
-                <a:latin typeface="Courier"/>
-              </a:rPr>
-              <a:t>  </a:t>
-            </a:r>
-            <a:r>
-              <a:rPr>
-                <a:solidFill>
-                  <a:srgbClr val="4758AB"/>
-                </a:solidFill>
-                <a:latin typeface="Courier"/>
-              </a:rPr>
-              <a:t>theme</a:t>
-            </a:r>
-            <a:r>
-              <a:rPr>
-                <a:solidFill>
-                  <a:srgbClr val="003B4F"/>
-                </a:solidFill>
-                <a:latin typeface="Courier"/>
-              </a:rPr>
-              <a:t>(</a:t>
-            </a:r>
-            <a:r>
-              <a:rPr>
-                <a:solidFill>
-                  <a:srgbClr val="657422"/>
-                </a:solidFill>
-                <a:latin typeface="Courier"/>
-              </a:rPr>
-              <a:t>legend.position =</a:t>
-            </a:r>
-            <a:r>
-              <a:rPr>
-                <a:solidFill>
-                  <a:srgbClr val="003B4F"/>
-                </a:solidFill>
-                <a:latin typeface="Courier"/>
-              </a:rPr>
-              <a:t> </a:t>
-            </a:r>
-            <a:r>
-              <a:rPr>
-                <a:solidFill>
-                  <a:srgbClr val="20794D"/>
-                </a:solidFill>
-                <a:latin typeface="Courier"/>
-              </a:rPr>
-              <a:t>"none"</a:t>
-            </a:r>
-            <a:r>
-              <a:rPr>
-                <a:solidFill>
-                  <a:srgbClr val="003B4F"/>
-                </a:solidFill>
-                <a:latin typeface="Courier"/>
-              </a:rPr>
-              <a:t>)</a:t>
-            </a:r>
-            <a:br/>
-            <a:br/>
-            <a:r>
-              <a:rPr>
-                <a:solidFill>
-                  <a:srgbClr val="003B4F"/>
-                </a:solidFill>
-                <a:latin typeface="Courier"/>
-              </a:rPr>
-              <a:t>pine_jitter_plot</a:t>
-            </a:r>
-          </a:p>
-        </p:txBody>
-      </p:sp>
-      <p:pic>
-        <p:nvPicPr>
-          <p:cNvPr descr="graphing_effectively_lecture_files/figure-pptx/unnamed-chunk-4-1.png" id="0" name="Picture 1"/>
-          <p:cNvPicPr>
-            <a:picLocks noGrp="1" noChangeAspect="1"/>
-          </p:cNvPicPr>
-          <p:nvPr/>
-        </p:nvPicPr>
-        <p:blipFill>
-          <a:blip r:embed="rId2"/>
-          <a:stretch>
-            <a:fillRect/>
-          </a:stretch>
-        </p:blipFill>
-        <p:spPr bwMode="auto">
-          <a:xfrm>
-            <a:off x="127000" y="1562100"/>
-            <a:ext cx="4432300" cy="2730500"/>
-          </a:xfrm>
-          <a:prstGeom prst="rect">
-            <a:avLst/>
-          </a:prstGeom>
-          <a:noFill/>
-          <a:ln w="9525">
-            <a:noFill/>
-            <a:headEnd/>
-            <a:tailEnd/>
-          </a:ln>
-        </p:spPr>
-      </p:pic>
-      <p:sp>
-        <p:nvSpPr>
-          <p:cNvPr id="5" name="Text Placeholder 4"/>
-          <p:cNvSpPr>
-            <a:spLocks noGrp="1"/>
-          </p:cNvSpPr>
-          <p:nvPr>
-            <p:ph idx="3" sz="quarter" type="body"/>
-          </p:nvPr>
-        </p:nvSpPr>
-        <p:spPr/>
-        <p:txBody>
-          <a:bodyPr/>
-          <a:lstStyle/>
-          <a:p>
-            <a:pPr lvl="0"/>
-            <a:r>
-              <a:rPr>
-                <a:latin typeface="Courier"/>
-              </a:rPr>
-              <a:t>position_jitter(width = 0.15)</a:t>
-            </a:r>
-            <a:r>
-              <a:rPr/>
-              <a:t> spreads points sideways so they don’t overlap</a:t>
-            </a:r>
-          </a:p>
-          <a:p>
-            <a:pPr lvl="0"/>
-            <a:r>
-              <a:rPr>
-                <a:latin typeface="Courier"/>
-              </a:rPr>
-              <a:t>seed = 42</a:t>
-            </a:r>
-            <a:r>
-              <a:rPr/>
-              <a:t> — same jitter layout every time you render</a:t>
-            </a:r>
-          </a:p>
-          <a:p>
-            <a:pPr lvl="0"/>
-            <a:r>
-              <a:rPr>
-                <a:latin typeface="Courier"/>
-              </a:rPr>
-              <a:t>alpha = 0.6</a:t>
-            </a:r>
-            <a:r>
-              <a:rPr/>
-              <a:t> — semi-transparent, so overlapping points are still visible</a:t>
-            </a:r>
-          </a:p>
-          <a:p>
-            <a:pPr lvl="0" indent="0" marL="1270000">
-              <a:buNone/>
-            </a:pPr>
-            <a:r>
-              <a:rPr sz="2000" b="1"/>
-              <a:t>Tip</a:t>
-            </a:r>
-          </a:p>
-          <a:p>
-            <a:pPr lvl="0" indent="0" marL="1270000">
-              <a:buNone/>
-            </a:pPr>
-            <a:r>
-              <a:rPr sz="2000"/>
-              <a:t>Always show the raw points alongside a boxplot when </a:t>
-            </a:r>
-            <a:r>
-              <a:rPr sz="2000" i="1"/>
-              <a:t>n</a:t>
-            </a:r>
-            <a:r>
-              <a:rPr sz="2000"/>
-              <a:t> is small — every point matters, and a box alone can hide a bimodal or lopsided pattern.</a:t>
-            </a:r>
-          </a:p>
-        </p:txBody>
-      </p:sp>
-    </p:spTree>
-  </p:cSld>
-</p:sld>
-</file>
-
-<file path=ppt/slides/slide7.xml><?xml version="1.0" encoding="utf-8"?>
-<p:sld xmlns:a="http://schemas.openxmlformats.org/drawingml/2006/main" xmlns:r="http://schemas.openxmlformats.org/officeDocument/2006/relationships" xmlns:p="http://schemas.openxmlformats.org/presentationml/2006/main">
-  <p:cSld>
-    <p:spTree>
-      <p:nvGrpSpPr>
-        <p:cNvPr id="1" name=""/>
-        <p:cNvGrpSpPr/>
-        <p:nvPr/>
-      </p:nvGrpSpPr>
-      <p:grpSpPr>
-        <a:xfrm>
-          <a:off x="0" y="0"/>
-          <a:ext cx="0" cy="0"/>
-          <a:chOff x="0" y="0"/>
-          <a:chExt cx="0" cy="0"/>
-        </a:xfrm>
-      </p:grpSpPr>
-      <p:sp>
-        <p:nvSpPr>
-          <p:cNvPr id="2" name="Title 1"/>
-          <p:cNvSpPr>
-            <a:spLocks noGrp="1"/>
-          </p:cNvSpPr>
-          <p:nvPr>
-            <p:ph type="title"/>
-          </p:nvPr>
-        </p:nvSpPr>
-        <p:spPr>
-          <a:xfrm>
-            <a:off x="139485" y="78119"/>
-            <a:ext cx="8229600" cy="607682"/>
-          </a:xfrm>
-        </p:spPr>
-        <p:txBody>
-          <a:bodyPr/>
-          <a:lstStyle/>
-          <a:p>
-            <a:pPr lvl="0" indent="0" marL="0">
-              <a:buNone/>
-            </a:pPr>
-            <a:r>
-              <a:rPr/>
-              <a:t>Part 3 · Mapping Color by Group</a:t>
-            </a:r>
-          </a:p>
-        </p:txBody>
-      </p:sp>
-      <p:sp>
-        <p:nvSpPr>
-          <p:cNvPr id="3" name="Text Placeholder 2"/>
-          <p:cNvSpPr>
-            <a:spLocks noGrp="1"/>
-          </p:cNvSpPr>
-          <p:nvPr>
-            <p:ph idx="1" type="body"/>
-          </p:nvPr>
-        </p:nvSpPr>
-        <p:spPr/>
-        <p:txBody>
-          <a:bodyPr/>
-          <a:lstStyle/>
-          <a:p>
-            <a:pPr lvl="0" indent="0">
-              <a:buNone/>
-            </a:pPr>
-            <a:r>
-              <a:rPr>
-                <a:solidFill>
-                  <a:srgbClr val="003B4F"/>
-                </a:solidFill>
-                <a:latin typeface="Courier"/>
-              </a:rPr>
-              <a:t>pine_team_plot &lt;- </a:t>
-            </a:r>
-            <a:r>
-              <a:rPr>
-                <a:solidFill>
-                  <a:srgbClr val="4758AB"/>
-                </a:solidFill>
-                <a:latin typeface="Courier"/>
-              </a:rPr>
-              <a:t>ggplot</a:t>
-            </a:r>
-            <a:r>
-              <a:rPr>
-                <a:solidFill>
-                  <a:srgbClr val="003B4F"/>
-                </a:solidFill>
-                <a:latin typeface="Courier"/>
-              </a:rPr>
-              <a:t>(pine_df, </a:t>
-            </a:r>
-            <a:r>
-              <a:rPr>
-                <a:solidFill>
-                  <a:srgbClr val="4758AB"/>
-                </a:solidFill>
-                <a:latin typeface="Courier"/>
-              </a:rPr>
-              <a:t>aes</a:t>
-            </a:r>
-            <a:r>
-              <a:rPr>
-                <a:solidFill>
-                  <a:srgbClr val="003B4F"/>
-                </a:solidFill>
-                <a:latin typeface="Courier"/>
-              </a:rPr>
-              <a:t>(</a:t>
-            </a:r>
-            <a:r>
-              <a:rPr>
-                <a:solidFill>
-                  <a:srgbClr val="657422"/>
-                </a:solidFill>
-                <a:latin typeface="Courier"/>
-              </a:rPr>
-              <a:t>x =</a:t>
-            </a:r>
-            <a:r>
-              <a:rPr>
-                <a:solidFill>
-                  <a:srgbClr val="003B4F"/>
-                </a:solidFill>
-                <a:latin typeface="Courier"/>
-              </a:rPr>
-              <a:t> n_s, </a:t>
-            </a:r>
-            <a:r>
-              <a:rPr>
-                <a:solidFill>
-                  <a:srgbClr val="657422"/>
-                </a:solidFill>
-                <a:latin typeface="Courier"/>
-              </a:rPr>
-              <a:t>y =</a:t>
-            </a:r>
-            <a:r>
-              <a:rPr>
-                <a:solidFill>
-                  <a:srgbClr val="003B4F"/>
-                </a:solidFill>
-                <a:latin typeface="Courier"/>
-              </a:rPr>
-              <a:t> length_mm, </a:t>
-            </a:r>
-            <a:r>
-              <a:rPr>
-                <a:solidFill>
-                  <a:srgbClr val="657422"/>
-                </a:solidFill>
-                <a:latin typeface="Courier"/>
-              </a:rPr>
-              <a:t>color =</a:t>
-            </a:r>
-            <a:r>
-              <a:rPr>
-                <a:solidFill>
-                  <a:srgbClr val="003B4F"/>
-                </a:solidFill>
-                <a:latin typeface="Courier"/>
-              </a:rPr>
-              <a:t> group)) </a:t>
-            </a:r>
-            <a:r>
-              <a:rPr>
-                <a:solidFill>
-                  <a:srgbClr val="5E5E5E"/>
-                </a:solidFill>
-                <a:latin typeface="Courier"/>
-              </a:rPr>
-              <a:t>+</a:t>
-            </a:r>
-            <a:br/>
-            <a:r>
-              <a:rPr>
-                <a:solidFill>
-                  <a:srgbClr val="003B4F"/>
-                </a:solidFill>
-                <a:latin typeface="Courier"/>
-              </a:rPr>
-              <a:t>  </a:t>
-            </a:r>
-            <a:r>
-              <a:rPr>
-                <a:solidFill>
-                  <a:srgbClr val="4758AB"/>
-                </a:solidFill>
-                <a:latin typeface="Courier"/>
-              </a:rPr>
-              <a:t>geom_point</a:t>
-            </a:r>
-            <a:r>
-              <a:rPr>
-                <a:solidFill>
-                  <a:srgbClr val="003B4F"/>
-                </a:solidFill>
-                <a:latin typeface="Courier"/>
-              </a:rPr>
-              <a:t>(</a:t>
-            </a:r>
-            <a:br/>
-            <a:r>
-              <a:rPr>
-                <a:solidFill>
-                  <a:srgbClr val="003B4F"/>
-                </a:solidFill>
-                <a:latin typeface="Courier"/>
-              </a:rPr>
-              <a:t>    </a:t>
-            </a:r>
-            <a:r>
-              <a:rPr>
-                <a:solidFill>
-                  <a:srgbClr val="657422"/>
-                </a:solidFill>
-                <a:latin typeface="Courier"/>
-              </a:rPr>
-              <a:t>position =</a:t>
-            </a:r>
-            <a:r>
-              <a:rPr>
-                <a:solidFill>
-                  <a:srgbClr val="003B4F"/>
-                </a:solidFill>
-                <a:latin typeface="Courier"/>
-              </a:rPr>
-              <a:t> </a:t>
-            </a:r>
-            <a:r>
-              <a:rPr>
-                <a:solidFill>
-                  <a:srgbClr val="4758AB"/>
-                </a:solidFill>
-                <a:latin typeface="Courier"/>
-              </a:rPr>
-              <a:t>position_jitter</a:t>
-            </a:r>
-            <a:r>
-              <a:rPr>
-                <a:solidFill>
-                  <a:srgbClr val="003B4F"/>
-                </a:solidFill>
-                <a:latin typeface="Courier"/>
-              </a:rPr>
-              <a:t>(</a:t>
-            </a:r>
-            <a:r>
-              <a:rPr>
-                <a:solidFill>
-                  <a:srgbClr val="657422"/>
-                </a:solidFill>
-                <a:latin typeface="Courier"/>
-              </a:rPr>
-              <a:t>width =</a:t>
-            </a:r>
-            <a:r>
-              <a:rPr>
-                <a:solidFill>
-                  <a:srgbClr val="003B4F"/>
-                </a:solidFill>
-                <a:latin typeface="Courier"/>
-              </a:rPr>
-              <a:t> </a:t>
-            </a:r>
-            <a:r>
-              <a:rPr>
-                <a:solidFill>
-                  <a:srgbClr val="AD0000"/>
-                </a:solidFill>
-                <a:latin typeface="Courier"/>
-              </a:rPr>
-              <a:t>0.15</a:t>
-            </a:r>
-            <a:r>
-              <a:rPr>
-                <a:solidFill>
-                  <a:srgbClr val="003B4F"/>
-                </a:solidFill>
-                <a:latin typeface="Courier"/>
-              </a:rPr>
-              <a:t>, </a:t>
-            </a:r>
-            <a:r>
-              <a:rPr>
-                <a:solidFill>
-                  <a:srgbClr val="657422"/>
-                </a:solidFill>
-                <a:latin typeface="Courier"/>
-              </a:rPr>
-              <a:t>seed =</a:t>
-            </a:r>
-            <a:r>
-              <a:rPr>
-                <a:solidFill>
-                  <a:srgbClr val="003B4F"/>
-                </a:solidFill>
-                <a:latin typeface="Courier"/>
-              </a:rPr>
-              <a:t> </a:t>
-            </a:r>
-            <a:r>
-              <a:rPr>
-                <a:solidFill>
-                  <a:srgbClr val="AD0000"/>
-                </a:solidFill>
-                <a:latin typeface="Courier"/>
-              </a:rPr>
-              <a:t>42</a:t>
-            </a:r>
-            <a:r>
-              <a:rPr>
-                <a:solidFill>
-                  <a:srgbClr val="003B4F"/>
-                </a:solidFill>
-                <a:latin typeface="Courier"/>
-              </a:rPr>
-              <a:t>),</a:t>
-            </a:r>
-            <a:br/>
-            <a:r>
-              <a:rPr>
-                <a:solidFill>
-                  <a:srgbClr val="003B4F"/>
-                </a:solidFill>
-                <a:latin typeface="Courier"/>
-              </a:rPr>
-              <a:t>    </a:t>
-            </a:r>
-            <a:r>
-              <a:rPr>
-                <a:solidFill>
-                  <a:srgbClr val="657422"/>
-                </a:solidFill>
-                <a:latin typeface="Courier"/>
-              </a:rPr>
-              <a:t>size =</a:t>
-            </a:r>
-            <a:r>
-              <a:rPr>
-                <a:solidFill>
-                  <a:srgbClr val="003B4F"/>
-                </a:solidFill>
-                <a:latin typeface="Courier"/>
-              </a:rPr>
-              <a:t> </a:t>
-            </a:r>
-            <a:r>
-              <a:rPr>
-                <a:solidFill>
-                  <a:srgbClr val="AD0000"/>
-                </a:solidFill>
-                <a:latin typeface="Courier"/>
-              </a:rPr>
-              <a:t>2.5</a:t>
-            </a:r>
-            <a:r>
-              <a:rPr>
-                <a:solidFill>
-                  <a:srgbClr val="003B4F"/>
-                </a:solidFill>
-                <a:latin typeface="Courier"/>
-              </a:rPr>
-              <a:t>,</a:t>
-            </a:r>
-            <a:br/>
-            <a:r>
-              <a:rPr>
-                <a:solidFill>
-                  <a:srgbClr val="003B4F"/>
-                </a:solidFill>
-                <a:latin typeface="Courier"/>
-              </a:rPr>
-              <a:t>    </a:t>
-            </a:r>
-            <a:r>
-              <a:rPr>
-                <a:solidFill>
-                  <a:srgbClr val="657422"/>
-                </a:solidFill>
-                <a:latin typeface="Courier"/>
-              </a:rPr>
-              <a:t>alpha =</a:t>
-            </a:r>
-            <a:r>
-              <a:rPr>
-                <a:solidFill>
-                  <a:srgbClr val="003B4F"/>
-                </a:solidFill>
-                <a:latin typeface="Courier"/>
-              </a:rPr>
-              <a:t> </a:t>
-            </a:r>
-            <a:r>
-              <a:rPr>
-                <a:solidFill>
-                  <a:srgbClr val="AD0000"/>
-                </a:solidFill>
-                <a:latin typeface="Courier"/>
-              </a:rPr>
-              <a:t>0.8</a:t>
-            </a:r>
-            <a:br/>
-            <a:r>
-              <a:rPr>
-                <a:solidFill>
-                  <a:srgbClr val="003B4F"/>
-                </a:solidFill>
-                <a:latin typeface="Courier"/>
-              </a:rPr>
-              <a:t>  ) </a:t>
-            </a:r>
-            <a:r>
-              <a:rPr>
-                <a:solidFill>
-                  <a:srgbClr val="5E5E5E"/>
-                </a:solidFill>
-                <a:latin typeface="Courier"/>
-              </a:rPr>
-              <a:t>+</a:t>
-            </a:r>
-            <a:br/>
-            <a:r>
-              <a:rPr>
-                <a:solidFill>
-                  <a:srgbClr val="003B4F"/>
-                </a:solidFill>
-                <a:latin typeface="Courier"/>
-              </a:rPr>
-              <a:t>  </a:t>
-            </a:r>
-            <a:r>
-              <a:rPr>
-                <a:solidFill>
-                  <a:srgbClr val="4758AB"/>
-                </a:solidFill>
-                <a:latin typeface="Courier"/>
-              </a:rPr>
-              <a:t>labs</a:t>
-            </a:r>
-            <a:r>
-              <a:rPr>
-                <a:solidFill>
-                  <a:srgbClr val="003B4F"/>
-                </a:solidFill>
-                <a:latin typeface="Courier"/>
-              </a:rPr>
-              <a:t>(</a:t>
-            </a:r>
-            <a:br/>
-            <a:r>
-              <a:rPr>
-                <a:solidFill>
-                  <a:srgbClr val="003B4F"/>
-                </a:solidFill>
-                <a:latin typeface="Courier"/>
-              </a:rPr>
-              <a:t>    </a:t>
-            </a:r>
-            <a:r>
-              <a:rPr>
-                <a:solidFill>
-                  <a:srgbClr val="657422"/>
-                </a:solidFill>
-                <a:latin typeface="Courier"/>
-              </a:rPr>
-              <a:t>title =</a:t>
-            </a:r>
-            <a:r>
-              <a:rPr>
-                <a:solidFill>
-                  <a:srgbClr val="003B4F"/>
-                </a:solidFill>
-                <a:latin typeface="Courier"/>
-              </a:rPr>
-              <a:t> </a:t>
-            </a:r>
-            <a:r>
-              <a:rPr>
-                <a:solidFill>
-                  <a:srgbClr val="20794D"/>
-                </a:solidFill>
-                <a:latin typeface="Courier"/>
-              </a:rPr>
-              <a:t>"Needle Length by Side, Colored by Team"</a:t>
-            </a:r>
-            <a:r>
-              <a:rPr>
-                <a:solidFill>
-                  <a:srgbClr val="003B4F"/>
-                </a:solidFill>
-                <a:latin typeface="Courier"/>
-              </a:rPr>
-              <a:t>,</a:t>
-            </a:r>
-            <a:br/>
-            <a:r>
-              <a:rPr>
-                <a:solidFill>
-                  <a:srgbClr val="003B4F"/>
-                </a:solidFill>
-                <a:latin typeface="Courier"/>
-              </a:rPr>
-              <a:t>    </a:t>
-            </a:r>
-            <a:r>
-              <a:rPr>
-                <a:solidFill>
-                  <a:srgbClr val="657422"/>
-                </a:solidFill>
-                <a:latin typeface="Courier"/>
-              </a:rPr>
-              <a:t>x =</a:t>
-            </a:r>
-            <a:r>
-              <a:rPr>
-                <a:solidFill>
-                  <a:srgbClr val="003B4F"/>
-                </a:solidFill>
-                <a:latin typeface="Courier"/>
-              </a:rPr>
-              <a:t> </a:t>
-            </a:r>
-            <a:r>
-              <a:rPr>
-                <a:solidFill>
-                  <a:srgbClr val="20794D"/>
-                </a:solidFill>
-                <a:latin typeface="Courier"/>
-              </a:rPr>
-              <a:t>"Side of tree"</a:t>
-            </a:r>
-            <a:r>
-              <a:rPr>
-                <a:solidFill>
-                  <a:srgbClr val="003B4F"/>
-                </a:solidFill>
-                <a:latin typeface="Courier"/>
-              </a:rPr>
-              <a:t>,</a:t>
-            </a:r>
-            <a:br/>
-            <a:r>
-              <a:rPr>
-                <a:solidFill>
-                  <a:srgbClr val="003B4F"/>
-                </a:solidFill>
-                <a:latin typeface="Courier"/>
-              </a:rPr>
-              <a:t>    </a:t>
-            </a:r>
-            <a:r>
-              <a:rPr>
-                <a:solidFill>
-                  <a:srgbClr val="657422"/>
-                </a:solidFill>
-                <a:latin typeface="Courier"/>
-              </a:rPr>
-              <a:t>y =</a:t>
-            </a:r>
-            <a:r>
-              <a:rPr>
-                <a:solidFill>
-                  <a:srgbClr val="003B4F"/>
-                </a:solidFill>
-                <a:latin typeface="Courier"/>
-              </a:rPr>
-              <a:t> </a:t>
-            </a:r>
-            <a:r>
-              <a:rPr>
-                <a:solidFill>
-                  <a:srgbClr val="20794D"/>
-                </a:solidFill>
-                <a:latin typeface="Courier"/>
-              </a:rPr>
-              <a:t>"Needle length (mm)"</a:t>
-            </a:r>
-            <a:r>
-              <a:rPr>
-                <a:solidFill>
-                  <a:srgbClr val="003B4F"/>
-                </a:solidFill>
-                <a:latin typeface="Courier"/>
-              </a:rPr>
-              <a:t>,</a:t>
-            </a:r>
-            <a:br/>
-            <a:r>
-              <a:rPr>
-                <a:solidFill>
-                  <a:srgbClr val="003B4F"/>
-                </a:solidFill>
-                <a:latin typeface="Courier"/>
-              </a:rPr>
-              <a:t>    </a:t>
-            </a:r>
-            <a:r>
-              <a:rPr>
-                <a:solidFill>
-                  <a:srgbClr val="657422"/>
-                </a:solidFill>
-                <a:latin typeface="Courier"/>
-              </a:rPr>
-              <a:t>color =</a:t>
-            </a:r>
-            <a:r>
-              <a:rPr>
-                <a:solidFill>
-                  <a:srgbClr val="003B4F"/>
-                </a:solidFill>
-                <a:latin typeface="Courier"/>
-              </a:rPr>
-              <a:t> </a:t>
-            </a:r>
-            <a:r>
-              <a:rPr>
-                <a:solidFill>
-                  <a:srgbClr val="20794D"/>
-                </a:solidFill>
-                <a:latin typeface="Courier"/>
-              </a:rPr>
-              <a:t>"Field team"</a:t>
-            </a:r>
-            <a:br/>
-            <a:r>
-              <a:rPr>
-                <a:solidFill>
-                  <a:srgbClr val="003B4F"/>
-                </a:solidFill>
-                <a:latin typeface="Courier"/>
-              </a:rPr>
-              <a:t>  ) </a:t>
-            </a:r>
-            <a:r>
-              <a:rPr>
-                <a:solidFill>
-                  <a:srgbClr val="5E5E5E"/>
-                </a:solidFill>
-                <a:latin typeface="Courier"/>
-              </a:rPr>
-              <a:t>+</a:t>
-            </a:r>
-            <a:br/>
-            <a:r>
-              <a:rPr>
-                <a:solidFill>
-                  <a:srgbClr val="003B4F"/>
-                </a:solidFill>
-                <a:latin typeface="Courier"/>
-              </a:rPr>
-              <a:t>  </a:t>
-            </a:r>
-            <a:r>
-              <a:rPr>
-                <a:solidFill>
-                  <a:srgbClr val="4758AB"/>
-                </a:solidFill>
-                <a:latin typeface="Courier"/>
-              </a:rPr>
-              <a:t>theme_minimal</a:t>
-            </a:r>
-            <a:r>
-              <a:rPr>
-                <a:solidFill>
-                  <a:srgbClr val="003B4F"/>
-                </a:solidFill>
-                <a:latin typeface="Courier"/>
-              </a:rPr>
-              <a:t>()</a:t>
-            </a:r>
-            <a:br/>
-            <a:br/>
-            <a:r>
-              <a:rPr>
-                <a:solidFill>
-                  <a:srgbClr val="003B4F"/>
-                </a:solidFill>
-                <a:latin typeface="Courier"/>
-              </a:rPr>
-              <a:t>pine_team_plot</a:t>
-            </a:r>
-          </a:p>
-        </p:txBody>
-      </p:sp>
-      <p:pic>
-        <p:nvPicPr>
-          <p:cNvPr descr="graphing_effectively_lecture_files/figure-pptx/unnamed-chunk-5-1.png" id="0" name="Picture 1"/>
-          <p:cNvPicPr>
-            <a:picLocks noGrp="1" noChangeAspect="1"/>
-          </p:cNvPicPr>
-          <p:nvPr/>
-        </p:nvPicPr>
-        <p:blipFill>
-          <a:blip r:embed="rId2"/>
-          <a:stretch>
-            <a:fillRect/>
-          </a:stretch>
-        </p:blipFill>
-        <p:spPr bwMode="auto">
-          <a:xfrm>
-            <a:off x="127000" y="1562100"/>
-            <a:ext cx="4432300" cy="2730500"/>
-          </a:xfrm>
-          <a:prstGeom prst="rect">
-            <a:avLst/>
-          </a:prstGeom>
-          <a:noFill/>
-          <a:ln w="9525">
-            <a:noFill/>
-            <a:headEnd/>
-            <a:tailEnd/>
-          </a:ln>
-        </p:spPr>
-      </p:pic>
-      <p:sp>
-        <p:nvSpPr>
-          <p:cNvPr id="5" name="Text Placeholder 4"/>
-          <p:cNvSpPr>
-            <a:spLocks noGrp="1"/>
-          </p:cNvSpPr>
-          <p:nvPr>
-            <p:ph idx="3" sz="quarter" type="body"/>
-          </p:nvPr>
-        </p:nvSpPr>
-        <p:spPr/>
-        <p:txBody>
-          <a:bodyPr/>
-          <a:lstStyle/>
-          <a:p>
-            <a:pPr lvl="0"/>
-            <a:r>
-              <a:rPr>
-                <a:latin typeface="Courier"/>
-              </a:rPr>
-              <a:t>color = group</a:t>
-            </a:r>
-            <a:r>
-              <a:rPr/>
-              <a:t> maps a </a:t>
-            </a:r>
-            <a:r>
-              <a:rPr b="1"/>
-              <a:t>third variable</a:t>
-            </a:r>
-            <a:r>
-              <a:rPr/>
-              <a:t> onto the plot — no new geom needed</a:t>
-            </a:r>
-          </a:p>
-          <a:p>
-            <a:pPr lvl="0"/>
-            <a:r>
-              <a:rPr>
-                <a:latin typeface="Courier"/>
-              </a:rPr>
-              <a:t>ggplot</a:t>
-            </a:r>
-            <a:r>
-              <a:rPr/>
-              <a:t> auto-builds the legend and picks colors for you</a:t>
-            </a:r>
-          </a:p>
-          <a:p>
-            <a:pPr lvl="0"/>
-            <a:r>
-              <a:rPr/>
-              <a:t>Mapping inside </a:t>
-            </a:r>
-            <a:r>
-              <a:rPr>
-                <a:latin typeface="Courier"/>
-              </a:rPr>
-              <a:t>aes()</a:t>
-            </a:r>
-            <a:r>
-              <a:rPr/>
-              <a:t> always means “vary this by data” — not “make everything this color”</a:t>
-            </a:r>
-          </a:p>
-          <a:p>
-            <a:pPr lvl="0" indent="0" marL="1270000">
-              <a:buNone/>
-            </a:pPr>
-            <a:r>
-              <a:rPr sz="2000" b="1"/>
-              <a:t>Warning</a:t>
-            </a:r>
-          </a:p>
-          <a:p>
-            <a:pPr lvl="0" indent="0" marL="1270000">
-              <a:buNone/>
-            </a:pPr>
-            <a:r>
-              <a:rPr sz="2000" b="1"/>
-              <a:t>⚠️ Watch out!</a:t>
-            </a:r>
-          </a:p>
-          <a:p>
-            <a:pPr lvl="0" indent="0" marL="1270000">
-              <a:buNone/>
-            </a:pPr>
-            <a:r>
-              <a:rPr sz="2000">
-                <a:latin typeface="Courier"/>
-              </a:rPr>
-              <a:t>color = "steelblue"</a:t>
-            </a:r>
-            <a:r>
-              <a:rPr sz="2000"/>
-              <a:t> </a:t>
-            </a:r>
-            <a:r>
-              <a:rPr sz="2000" b="1"/>
-              <a:t>outside</a:t>
-            </a:r>
-            <a:r>
-              <a:rPr sz="2000"/>
-              <a:t> </a:t>
-            </a:r>
-            <a:r>
-              <a:rPr sz="2000">
-                <a:latin typeface="Courier"/>
-              </a:rPr>
-              <a:t>aes()</a:t>
-            </a:r>
-            <a:r>
-              <a:rPr sz="2000"/>
-              <a:t> sets one fixed color. </a:t>
-            </a:r>
-            <a:r>
-              <a:rPr sz="2000">
-                <a:latin typeface="Courier"/>
-              </a:rPr>
-              <a:t>color = group</a:t>
-            </a:r>
-            <a:r>
-              <a:rPr sz="2000"/>
-              <a:t> </a:t>
-            </a:r>
-            <a:r>
-              <a:rPr sz="2000" b="1"/>
-              <a:t>inside</a:t>
-            </a:r>
-            <a:r>
-              <a:rPr sz="2000"/>
-              <a:t> </a:t>
-            </a:r>
-            <a:r>
-              <a:rPr sz="2000">
-                <a:latin typeface="Courier"/>
-              </a:rPr>
-              <a:t>aes()</a:t>
-            </a:r>
-            <a:r>
-              <a:rPr sz="2000"/>
-              <a:t> maps colors to a variable. Mixing these up is one of the most common </a:t>
-            </a:r>
-            <a:r>
-              <a:rPr sz="2000">
-                <a:latin typeface="Courier"/>
-              </a:rPr>
-              <a:t>ggplot</a:t>
-            </a:r>
-            <a:r>
-              <a:rPr sz="2000"/>
-              <a:t> mistakes.</a:t>
-            </a:r>
-          </a:p>
-        </p:txBody>
-      </p:sp>
-    </p:spTree>
-  </p:cSld>
-</p:sld>
-</file>
-
-<file path=ppt/slides/slide8.xml><?xml version="1.0" encoding="utf-8"?>
-<p:sld xmlns:a="http://schemas.openxmlformats.org/drawingml/2006/main" xmlns:r="http://schemas.openxmlformats.org/officeDocument/2006/relationships" xmlns:p="http://schemas.openxmlformats.org/presentationml/2006/main">
-  <p:cSld>
-    <p:spTree>
-      <p:nvGrpSpPr>
-        <p:cNvPr id="1" name=""/>
-        <p:cNvGrpSpPr/>
-        <p:nvPr/>
-      </p:nvGrpSpPr>
-      <p:grpSpPr>
-        <a:xfrm>
-          <a:off x="0" y="0"/>
-          <a:ext cx="0" cy="0"/>
-          <a:chOff x="0" y="0"/>
-          <a:chExt cx="0" cy="0"/>
-        </a:xfrm>
-      </p:grpSpPr>
-      <p:sp>
-        <p:nvSpPr>
-          <p:cNvPr id="2" name="Title 1"/>
-          <p:cNvSpPr>
-            <a:spLocks noGrp="1"/>
-          </p:cNvSpPr>
-          <p:nvPr>
-            <p:ph type="title"/>
-          </p:nvPr>
-        </p:nvSpPr>
-        <p:spPr>
-          <a:xfrm>
-            <a:off x="139485" y="78119"/>
-            <a:ext cx="8229600" cy="607682"/>
-          </a:xfrm>
-        </p:spPr>
-        <p:txBody>
-          <a:bodyPr/>
-          <a:lstStyle/>
-          <a:p>
-            <a:pPr lvl="0" indent="0" marL="0">
-              <a:buNone/>
-            </a:pPr>
-            <a:r>
-              <a:rPr/>
-              <a:t>Part 4 · Mean ± SE — Plotted Directly</a:t>
+              <a:t>Mean ± SE — Plotted Directly</a:t>
             </a:r>
           </a:p>
         </p:txBody>
@@ -9046,8 +5345,8 @@
         </p:blipFill>
         <p:spPr bwMode="auto">
           <a:xfrm>
-            <a:off x="127000" y="1562100"/>
-            <a:ext cx="4432300" cy="2730500"/>
+            <a:off x="431800" y="1270000"/>
+            <a:ext cx="3810000" cy="3302000"/>
           </a:xfrm>
           <a:prstGeom prst="rect">
             <a:avLst/>
@@ -9306,7 +5605,59 @@
 </p:sld>
 </file>
 
-<file path=ppt/slides/slide9.xml><?xml version="1.0" encoding="utf-8"?>
+<file path=ppt/slides/slide13.xml><?xml version="1.0" encoding="utf-8"?>
+<p:sld xmlns:a="http://schemas.openxmlformats.org/drawingml/2006/main" xmlns:r="http://schemas.openxmlformats.org/officeDocument/2006/relationships" xmlns:p="http://schemas.openxmlformats.org/presentationml/2006/main">
+  <p:cSld>
+    <p:spTree>
+      <p:nvGrpSpPr>
+        <p:cNvPr id="1" name=""/>
+        <p:cNvGrpSpPr/>
+        <p:nvPr/>
+      </p:nvGrpSpPr>
+      <p:grpSpPr>
+        <a:xfrm>
+          <a:off x="0" y="0"/>
+          <a:ext cx="0" cy="0"/>
+          <a:chOff x="0" y="0"/>
+          <a:chExt cx="0" cy="0"/>
+        </a:xfrm>
+      </p:grpSpPr>
+      <p:sp>
+        <p:nvSpPr>
+          <p:cNvPr id="2" name="Title 1"/>
+          <p:cNvSpPr>
+            <a:spLocks noGrp="1"/>
+          </p:cNvSpPr>
+          <p:nvPr>
+            <p:ph type="title"/>
+          </p:nvPr>
+        </p:nvSpPr>
+        <p:spPr>
+          <a:xfrm>
+            <a:off x="0" y="0"/>
+            <a:ext cx="9144000" cy="582780"/>
+          </a:xfrm>
+        </p:spPr>
+        <p:txBody>
+          <a:bodyPr/>
+          <a:lstStyle/>
+          <a:p>
+            <a:pPr lvl="0" indent="0" marL="0">
+              <a:buNone/>
+            </a:pPr>
+            <a:r>
+              <a:rPr/>
+              <a:t>Part 5 · Faceting — One Panel Per Group</a:t>
+            </a:r>
+          </a:p>
+        </p:txBody>
+      </p:sp>
+    </p:spTree>
+  </p:cSld>
+</p:sld>
+</file>
+
+<file path=ppt/slides/slide14.xml><?xml version="1.0" encoding="utf-8"?>
 <p:sld xmlns:a="http://schemas.openxmlformats.org/drawingml/2006/main" xmlns:r="http://schemas.openxmlformats.org/officeDocument/2006/relationships" xmlns:p="http://schemas.openxmlformats.org/presentationml/2006/main">
   <p:cSld>
     <p:spTree>
@@ -9348,7 +5699,7 @@
             </a:pPr>
             <a:r>
               <a:rPr/>
-              <a:t>Part 5 · Faceting — One Panel Per Group</a:t>
+              <a:t>Faceting — One Panel Per Group</a:t>
             </a:r>
           </a:p>
         </p:txBody>
@@ -9950,8 +6301,8 @@
         </p:blipFill>
         <p:spPr bwMode="auto">
           <a:xfrm>
-            <a:off x="127000" y="1562100"/>
-            <a:ext cx="4432300" cy="2730500"/>
+            <a:off x="431800" y="1270000"/>
+            <a:ext cx="3810000" cy="3302000"/>
           </a:xfrm>
           <a:prstGeom prst="rect">
             <a:avLst/>
@@ -10042,6 +6393,4036 @@
             <a:r>
               <a:rPr sz="2000"/>
               <a:t>?”</a:t>
+            </a:r>
+          </a:p>
+        </p:txBody>
+      </p:sp>
+    </p:spTree>
+  </p:cSld>
+</p:sld>
+</file>
+
+<file path=ppt/slides/slide15.xml><?xml version="1.0" encoding="utf-8"?>
+<p:sld xmlns:a="http://schemas.openxmlformats.org/drawingml/2006/main" xmlns:r="http://schemas.openxmlformats.org/officeDocument/2006/relationships" xmlns:p="http://schemas.openxmlformats.org/presentationml/2006/main">
+  <p:cSld>
+    <p:spTree>
+      <p:nvGrpSpPr>
+        <p:cNvPr id="1" name=""/>
+        <p:cNvGrpSpPr/>
+        <p:nvPr/>
+      </p:nvGrpSpPr>
+      <p:grpSpPr>
+        <a:xfrm>
+          <a:off x="0" y="0"/>
+          <a:ext cx="0" cy="0"/>
+          <a:chOff x="0" y="0"/>
+          <a:chExt cx="0" cy="0"/>
+        </a:xfrm>
+      </p:grpSpPr>
+      <p:sp>
+        <p:nvSpPr>
+          <p:cNvPr id="2" name="Title 1"/>
+          <p:cNvSpPr>
+            <a:spLocks noGrp="1"/>
+          </p:cNvSpPr>
+          <p:nvPr>
+            <p:ph type="title"/>
+          </p:nvPr>
+        </p:nvSpPr>
+        <p:spPr>
+          <a:xfrm>
+            <a:off x="0" y="0"/>
+            <a:ext cx="9144000" cy="582780"/>
+          </a:xfrm>
+        </p:spPr>
+        <p:txBody>
+          <a:bodyPr/>
+          <a:lstStyle/>
+          <a:p>
+            <a:pPr lvl="0" indent="0" marL="0">
+              <a:buNone/>
+            </a:pPr>
+            <a:r>
+              <a:rPr/>
+              <a:t>Part 6 · A Quick Theme Tour</a:t>
+            </a:r>
+          </a:p>
+        </p:txBody>
+      </p:sp>
+    </p:spTree>
+  </p:cSld>
+</p:sld>
+</file>
+
+<file path=ppt/slides/slide16.xml><?xml version="1.0" encoding="utf-8"?>
+<p:sld xmlns:a="http://schemas.openxmlformats.org/drawingml/2006/main" xmlns:r="http://schemas.openxmlformats.org/officeDocument/2006/relationships" xmlns:p="http://schemas.openxmlformats.org/presentationml/2006/main">
+  <p:cSld>
+    <p:spTree>
+      <p:nvGrpSpPr>
+        <p:cNvPr id="1" name=""/>
+        <p:cNvGrpSpPr/>
+        <p:nvPr/>
+      </p:nvGrpSpPr>
+      <p:grpSpPr>
+        <a:xfrm>
+          <a:off x="0" y="0"/>
+          <a:ext cx="0" cy="0"/>
+          <a:chOff x="0" y="0"/>
+          <a:chExt cx="0" cy="0"/>
+        </a:xfrm>
+      </p:grpSpPr>
+      <p:sp>
+        <p:nvSpPr>
+          <p:cNvPr id="2" name="Title 1"/>
+          <p:cNvSpPr>
+            <a:spLocks noGrp="1"/>
+          </p:cNvSpPr>
+          <p:nvPr>
+            <p:ph type="title"/>
+          </p:nvPr>
+        </p:nvSpPr>
+        <p:spPr>
+          <a:xfrm>
+            <a:off x="139485" y="78119"/>
+            <a:ext cx="8229600" cy="607682"/>
+          </a:xfrm>
+        </p:spPr>
+        <p:txBody>
+          <a:bodyPr/>
+          <a:lstStyle/>
+          <a:p>
+            <a:pPr lvl="0" indent="0" marL="0">
+              <a:buNone/>
+            </a:pPr>
+            <a:r>
+              <a:rPr/>
+              <a:t>A Quick Theme Tour</a:t>
+            </a:r>
+          </a:p>
+        </p:txBody>
+      </p:sp>
+      <p:sp>
+        <p:nvSpPr>
+          <p:cNvPr id="3" name="Text Placeholder 2"/>
+          <p:cNvSpPr>
+            <a:spLocks noGrp="1"/>
+          </p:cNvSpPr>
+          <p:nvPr>
+            <p:ph idx="1" type="body"/>
+          </p:nvPr>
+        </p:nvSpPr>
+        <p:spPr/>
+        <p:txBody>
+          <a:bodyPr/>
+          <a:lstStyle/>
+          <a:p>
+            <a:pPr lvl="0" indent="0">
+              <a:buNone/>
+            </a:pPr>
+            <a:r>
+              <a:rPr>
+                <a:solidFill>
+                  <a:srgbClr val="003B4F"/>
+                </a:solidFill>
+                <a:latin typeface="Courier"/>
+              </a:rPr>
+              <a:t>pine_jitter_plot </a:t>
+            </a:r>
+            <a:r>
+              <a:rPr>
+                <a:solidFill>
+                  <a:srgbClr val="5E5E5E"/>
+                </a:solidFill>
+                <a:latin typeface="Courier"/>
+              </a:rPr>
+              <a:t>+</a:t>
+            </a:r>
+            <a:r>
+              <a:rPr>
+                <a:solidFill>
+                  <a:srgbClr val="003B4F"/>
+                </a:solidFill>
+                <a:latin typeface="Courier"/>
+              </a:rPr>
+              <a:t> </a:t>
+            </a:r>
+            <a:r>
+              <a:rPr>
+                <a:solidFill>
+                  <a:srgbClr val="4758AB"/>
+                </a:solidFill>
+                <a:latin typeface="Courier"/>
+              </a:rPr>
+              <a:t>theme_bw</a:t>
+            </a:r>
+            <a:r>
+              <a:rPr>
+                <a:solidFill>
+                  <a:srgbClr val="003B4F"/>
+                </a:solidFill>
+                <a:latin typeface="Courier"/>
+              </a:rPr>
+              <a:t>()</a:t>
+            </a:r>
+          </a:p>
+        </p:txBody>
+      </p:sp>
+      <p:pic>
+        <p:nvPicPr>
+          <p:cNvPr descr="graphing_effectively_lecture_files/figure-pptx/unnamed-chunk-8-1.png" id="0" name="Picture 1"/>
+          <p:cNvPicPr>
+            <a:picLocks noGrp="1" noChangeAspect="1"/>
+          </p:cNvPicPr>
+          <p:nvPr/>
+        </p:nvPicPr>
+        <p:blipFill>
+          <a:blip r:embed="rId2"/>
+          <a:stretch>
+            <a:fillRect/>
+          </a:stretch>
+        </p:blipFill>
+        <p:spPr bwMode="auto">
+          <a:xfrm>
+            <a:off x="431800" y="1270000"/>
+            <a:ext cx="3810000" cy="3302000"/>
+          </a:xfrm>
+          <a:prstGeom prst="rect">
+            <a:avLst/>
+          </a:prstGeom>
+          <a:noFill/>
+          <a:ln w="9525">
+            <a:noFill/>
+            <a:headEnd/>
+            <a:tailEnd/>
+          </a:ln>
+        </p:spPr>
+      </p:pic>
+      <p:sp>
+        <p:nvSpPr>
+          <p:cNvPr id="4" name="Content Placeholder 3"/>
+          <p:cNvSpPr>
+            <a:spLocks noGrp="1"/>
+          </p:cNvSpPr>
+          <p:nvPr>
+            <p:ph idx="2" sz="half"/>
+          </p:nvPr>
+        </p:nvSpPr>
+        <p:spPr/>
+        <p:txBody>
+          <a:bodyPr/>
+          <a:lstStyle/>
+          <a:p>
+            <a:pPr lvl="0" indent="0">
+              <a:buNone/>
+            </a:pPr>
+            <a:r>
+              <a:rPr>
+                <a:solidFill>
+                  <a:srgbClr val="003B4F"/>
+                </a:solidFill>
+                <a:latin typeface="Courier"/>
+              </a:rPr>
+              <a:t>pine_jitter_plot </a:t>
+            </a:r>
+            <a:r>
+              <a:rPr>
+                <a:solidFill>
+                  <a:srgbClr val="5E5E5E"/>
+                </a:solidFill>
+                <a:latin typeface="Courier"/>
+              </a:rPr>
+              <a:t>+</a:t>
+            </a:r>
+            <a:r>
+              <a:rPr>
+                <a:solidFill>
+                  <a:srgbClr val="003B4F"/>
+                </a:solidFill>
+                <a:latin typeface="Courier"/>
+              </a:rPr>
+              <a:t> </a:t>
+            </a:r>
+            <a:r>
+              <a:rPr>
+                <a:solidFill>
+                  <a:srgbClr val="4758AB"/>
+                </a:solidFill>
+                <a:latin typeface="Courier"/>
+              </a:rPr>
+              <a:t>theme_classic</a:t>
+            </a:r>
+            <a:r>
+              <a:rPr>
+                <a:solidFill>
+                  <a:srgbClr val="003B4F"/>
+                </a:solidFill>
+                <a:latin typeface="Courier"/>
+              </a:rPr>
+              <a:t>()</a:t>
+            </a:r>
+          </a:p>
+        </p:txBody>
+      </p:sp>
+      <p:pic>
+        <p:nvPicPr>
+          <p:cNvPr descr="graphing_effectively_lecture_files/figure-pptx/unnamed-chunk-9-1.png" id="0" name="Picture 1"/>
+          <p:cNvPicPr>
+            <a:picLocks noGrp="1" noChangeAspect="1"/>
+          </p:cNvPicPr>
+          <p:nvPr/>
+        </p:nvPicPr>
+        <p:blipFill>
+          <a:blip r:embed="rId3"/>
+          <a:stretch>
+            <a:fillRect/>
+          </a:stretch>
+        </p:blipFill>
+        <p:spPr bwMode="auto">
+          <a:xfrm>
+            <a:off x="431800" y="1270000"/>
+            <a:ext cx="3810000" cy="3302000"/>
+          </a:xfrm>
+          <a:prstGeom prst="rect">
+            <a:avLst/>
+          </a:prstGeom>
+          <a:noFill/>
+          <a:ln w="9525">
+            <a:noFill/>
+            <a:headEnd/>
+            <a:tailEnd/>
+          </a:ln>
+        </p:spPr>
+      </p:pic>
+      <p:sp>
+        <p:nvSpPr>
+          <p:cNvPr id="5" name="Text Placeholder 4"/>
+          <p:cNvSpPr>
+            <a:spLocks noGrp="1"/>
+          </p:cNvSpPr>
+          <p:nvPr>
+            <p:ph idx="3" sz="quarter" type="body"/>
+          </p:nvPr>
+        </p:nvSpPr>
+        <p:spPr/>
+        <p:txBody>
+          <a:bodyPr/>
+          <a:lstStyle/>
+          <a:p>
+            <a:pPr lvl="0"/>
+            <a:r>
+              <a:rPr>
+                <a:latin typeface="Courier"/>
+              </a:rPr>
+              <a:t>theme_minimal()</a:t>
+            </a:r>
+            <a:r>
+              <a:rPr/>
+              <a:t> — light, few gridlines (what we’ve used so far)</a:t>
+            </a:r>
+          </a:p>
+          <a:p>
+            <a:pPr lvl="0"/>
+            <a:r>
+              <a:rPr>
+                <a:latin typeface="Courier"/>
+              </a:rPr>
+              <a:t>theme_bw()</a:t>
+            </a:r>
+            <a:r>
+              <a:rPr/>
+              <a:t> — white background, black-and-white frame</a:t>
+            </a:r>
+          </a:p>
+          <a:p>
+            <a:pPr lvl="0"/>
+            <a:r>
+              <a:rPr>
+                <a:latin typeface="Courier"/>
+              </a:rPr>
+              <a:t>theme_classic()</a:t>
+            </a:r>
+            <a:r>
+              <a:rPr/>
+              <a:t> — just x/y axis lines, no gridlines at all</a:t>
+            </a:r>
+          </a:p>
+          <a:p>
+            <a:pPr lvl="0" indent="0" marL="1270000">
+              <a:buNone/>
+            </a:pPr>
+            <a:r>
+              <a:rPr sz="2000" b="1"/>
+              <a:t>Note</a:t>
+            </a:r>
+          </a:p>
+          <a:p>
+            <a:pPr lvl="0" indent="0" marL="1270000">
+              <a:buNone/>
+            </a:pPr>
+            <a:r>
+              <a:rPr sz="2000" b="1"/>
+              <a:t>✅ Key idea</a:t>
+            </a:r>
+          </a:p>
+          <a:p>
+            <a:pPr lvl="0" indent="0" marL="1270000">
+              <a:buNone/>
+            </a:pPr>
+            <a:r>
+              <a:rPr sz="2000"/>
+              <a:t>A theme changes </a:t>
+            </a:r>
+            <a:r>
+              <a:rPr sz="2000" i="1"/>
+              <a:t>appearance</a:t>
+            </a:r>
+            <a:r>
+              <a:rPr sz="2000"/>
+              <a:t> only — never the data or the statistics underneath. Pick one and use it consistently across a report.</a:t>
+            </a:r>
+          </a:p>
+        </p:txBody>
+      </p:sp>
+    </p:spTree>
+  </p:cSld>
+</p:sld>
+</file>
+
+<file path=ppt/slides/slide17.xml><?xml version="1.0" encoding="utf-8"?>
+<p:sld xmlns:a="http://schemas.openxmlformats.org/drawingml/2006/main" xmlns:r="http://schemas.openxmlformats.org/officeDocument/2006/relationships" xmlns:p="http://schemas.openxmlformats.org/presentationml/2006/main">
+  <p:cSld>
+    <p:spTree>
+      <p:nvGrpSpPr>
+        <p:cNvPr id="1" name=""/>
+        <p:cNvGrpSpPr/>
+        <p:nvPr/>
+      </p:nvGrpSpPr>
+      <p:grpSpPr>
+        <a:xfrm>
+          <a:off x="0" y="0"/>
+          <a:ext cx="0" cy="0"/>
+          <a:chOff x="0" y="0"/>
+          <a:chExt cx="0" cy="0"/>
+        </a:xfrm>
+      </p:grpSpPr>
+      <p:sp>
+        <p:nvSpPr>
+          <p:cNvPr id="2" name="Title 1"/>
+          <p:cNvSpPr>
+            <a:spLocks noGrp="1"/>
+          </p:cNvSpPr>
+          <p:nvPr>
+            <p:ph type="title"/>
+          </p:nvPr>
+        </p:nvSpPr>
+        <p:spPr>
+          <a:xfrm>
+            <a:off x="0" y="0"/>
+            <a:ext cx="9144000" cy="582780"/>
+          </a:xfrm>
+        </p:spPr>
+        <p:txBody>
+          <a:bodyPr/>
+          <a:lstStyle/>
+          <a:p>
+            <a:pPr lvl="0" indent="0" marL="0">
+              <a:buNone/>
+            </a:pPr>
+            <a:r>
+              <a:rPr/>
+              <a:t>Part 7 · Saving a Real Figure</a:t>
+            </a:r>
+          </a:p>
+        </p:txBody>
+      </p:sp>
+    </p:spTree>
+  </p:cSld>
+</p:sld>
+</file>
+
+<file path=ppt/slides/slide18.xml><?xml version="1.0" encoding="utf-8"?>
+<p:sld xmlns:a="http://schemas.openxmlformats.org/drawingml/2006/main" xmlns:r="http://schemas.openxmlformats.org/officeDocument/2006/relationships" xmlns:p="http://schemas.openxmlformats.org/presentationml/2006/main">
+  <p:cSld>
+    <p:spTree>
+      <p:nvGrpSpPr>
+        <p:cNvPr id="1" name=""/>
+        <p:cNvGrpSpPr/>
+        <p:nvPr/>
+      </p:nvGrpSpPr>
+      <p:grpSpPr>
+        <a:xfrm>
+          <a:off x="0" y="0"/>
+          <a:ext cx="0" cy="0"/>
+          <a:chOff x="0" y="0"/>
+          <a:chExt cx="0" cy="0"/>
+        </a:xfrm>
+      </p:grpSpPr>
+      <p:sp>
+        <p:nvSpPr>
+          <p:cNvPr id="2" name="Title 1"/>
+          <p:cNvSpPr>
+            <a:spLocks noGrp="1"/>
+          </p:cNvSpPr>
+          <p:nvPr>
+            <p:ph type="title"/>
+          </p:nvPr>
+        </p:nvSpPr>
+        <p:spPr>
+          <a:xfrm>
+            <a:off x="0" y="0"/>
+            <a:ext cx="9144000" cy="602780"/>
+          </a:xfrm>
+          <a:solidFill>
+            <a:srgbClr val="70121D"/>
+          </a:solidFill>
+        </p:spPr>
+        <p:txBody>
+          <a:bodyPr/>
+          <a:lstStyle/>
+          <a:p>
+            <a:pPr lvl="0" indent="0" marL="0">
+              <a:buNone/>
+            </a:pPr>
+            <a:r>
+              <a:rPr/>
+              <a:t>Saving a Real Figure</a:t>
+            </a:r>
+          </a:p>
+        </p:txBody>
+      </p:sp>
+      <p:sp>
+        <p:nvSpPr>
+          <p:cNvPr id="3" name="Content Placeholder 2"/>
+          <p:cNvSpPr>
+            <a:spLocks noGrp="1"/>
+          </p:cNvSpPr>
+          <p:nvPr>
+            <p:ph idx="1" sz="half"/>
+          </p:nvPr>
+        </p:nvSpPr>
+        <p:spPr/>
+        <p:txBody>
+          <a:bodyPr/>
+          <a:lstStyle/>
+          <a:p>
+            <a:pPr lvl="0" indent="0">
+              <a:buNone/>
+            </a:pPr>
+            <a:r>
+              <a:rPr>
+                <a:solidFill>
+                  <a:srgbClr val="4758AB"/>
+                </a:solidFill>
+                <a:latin typeface="Courier"/>
+              </a:rPr>
+              <a:t>ggsave</a:t>
+            </a:r>
+            <a:r>
+              <a:rPr>
+                <a:solidFill>
+                  <a:srgbClr val="003B4F"/>
+                </a:solidFill>
+                <a:latin typeface="Courier"/>
+              </a:rPr>
+              <a:t>(</a:t>
+            </a:r>
+            <a:br/>
+            <a:r>
+              <a:rPr>
+                <a:solidFill>
+                  <a:srgbClr val="003B4F"/>
+                </a:solidFill>
+                <a:latin typeface="Courier"/>
+              </a:rPr>
+              <a:t>  </a:t>
+            </a:r>
+            <a:r>
+              <a:rPr>
+                <a:solidFill>
+                  <a:srgbClr val="20794D"/>
+                </a:solidFill>
+                <a:latin typeface="Courier"/>
+              </a:rPr>
+              <a:t>"figures/pine_needle_boxplot.png"</a:t>
+            </a:r>
+            <a:r>
+              <a:rPr>
+                <a:solidFill>
+                  <a:srgbClr val="003B4F"/>
+                </a:solidFill>
+                <a:latin typeface="Courier"/>
+              </a:rPr>
+              <a:t>,</a:t>
+            </a:r>
+            <a:br/>
+            <a:r>
+              <a:rPr>
+                <a:solidFill>
+                  <a:srgbClr val="003B4F"/>
+                </a:solidFill>
+                <a:latin typeface="Courier"/>
+              </a:rPr>
+              <a:t>  </a:t>
+            </a:r>
+            <a:r>
+              <a:rPr>
+                <a:solidFill>
+                  <a:srgbClr val="657422"/>
+                </a:solidFill>
+                <a:latin typeface="Courier"/>
+              </a:rPr>
+              <a:t>plot =</a:t>
+            </a:r>
+            <a:r>
+              <a:rPr>
+                <a:solidFill>
+                  <a:srgbClr val="003B4F"/>
+                </a:solidFill>
+                <a:latin typeface="Courier"/>
+              </a:rPr>
+              <a:t> pine_jitter_plot,</a:t>
+            </a:r>
+            <a:br/>
+            <a:r>
+              <a:rPr>
+                <a:solidFill>
+                  <a:srgbClr val="003B4F"/>
+                </a:solidFill>
+                <a:latin typeface="Courier"/>
+              </a:rPr>
+              <a:t>  </a:t>
+            </a:r>
+            <a:r>
+              <a:rPr>
+                <a:solidFill>
+                  <a:srgbClr val="657422"/>
+                </a:solidFill>
+                <a:latin typeface="Courier"/>
+              </a:rPr>
+              <a:t>width =</a:t>
+            </a:r>
+            <a:r>
+              <a:rPr>
+                <a:solidFill>
+                  <a:srgbClr val="003B4F"/>
+                </a:solidFill>
+                <a:latin typeface="Courier"/>
+              </a:rPr>
+              <a:t> </a:t>
+            </a:r>
+            <a:r>
+              <a:rPr>
+                <a:solidFill>
+                  <a:srgbClr val="AD0000"/>
+                </a:solidFill>
+                <a:latin typeface="Courier"/>
+              </a:rPr>
+              <a:t>3</a:t>
+            </a:r>
+            <a:r>
+              <a:rPr>
+                <a:solidFill>
+                  <a:srgbClr val="003B4F"/>
+                </a:solidFill>
+                <a:latin typeface="Courier"/>
+              </a:rPr>
+              <a:t>,</a:t>
+            </a:r>
+            <a:br/>
+            <a:r>
+              <a:rPr>
+                <a:solidFill>
+                  <a:srgbClr val="003B4F"/>
+                </a:solidFill>
+                <a:latin typeface="Courier"/>
+              </a:rPr>
+              <a:t>  </a:t>
+            </a:r>
+            <a:r>
+              <a:rPr>
+                <a:solidFill>
+                  <a:srgbClr val="657422"/>
+                </a:solidFill>
+                <a:latin typeface="Courier"/>
+              </a:rPr>
+              <a:t>height =</a:t>
+            </a:r>
+            <a:r>
+              <a:rPr>
+                <a:solidFill>
+                  <a:srgbClr val="003B4F"/>
+                </a:solidFill>
+                <a:latin typeface="Courier"/>
+              </a:rPr>
+              <a:t> </a:t>
+            </a:r>
+            <a:r>
+              <a:rPr>
+                <a:solidFill>
+                  <a:srgbClr val="AD0000"/>
+                </a:solidFill>
+                <a:latin typeface="Courier"/>
+              </a:rPr>
+              <a:t>3</a:t>
+            </a:r>
+            <a:r>
+              <a:rPr>
+                <a:solidFill>
+                  <a:srgbClr val="003B4F"/>
+                </a:solidFill>
+                <a:latin typeface="Courier"/>
+              </a:rPr>
+              <a:t>,</a:t>
+            </a:r>
+            <a:br/>
+            <a:r>
+              <a:rPr>
+                <a:solidFill>
+                  <a:srgbClr val="003B4F"/>
+                </a:solidFill>
+                <a:latin typeface="Courier"/>
+              </a:rPr>
+              <a:t>  </a:t>
+            </a:r>
+            <a:r>
+              <a:rPr>
+                <a:solidFill>
+                  <a:srgbClr val="657422"/>
+                </a:solidFill>
+                <a:latin typeface="Courier"/>
+              </a:rPr>
+              <a:t>units =</a:t>
+            </a:r>
+            <a:r>
+              <a:rPr>
+                <a:solidFill>
+                  <a:srgbClr val="003B4F"/>
+                </a:solidFill>
+                <a:latin typeface="Courier"/>
+              </a:rPr>
+              <a:t> </a:t>
+            </a:r>
+            <a:r>
+              <a:rPr>
+                <a:solidFill>
+                  <a:srgbClr val="20794D"/>
+                </a:solidFill>
+                <a:latin typeface="Courier"/>
+              </a:rPr>
+              <a:t>"in"</a:t>
+            </a:r>
+            <a:r>
+              <a:rPr>
+                <a:solidFill>
+                  <a:srgbClr val="003B4F"/>
+                </a:solidFill>
+                <a:latin typeface="Courier"/>
+              </a:rPr>
+              <a:t>,</a:t>
+            </a:r>
+            <a:br/>
+            <a:r>
+              <a:rPr>
+                <a:solidFill>
+                  <a:srgbClr val="003B4F"/>
+                </a:solidFill>
+                <a:latin typeface="Courier"/>
+              </a:rPr>
+              <a:t>  </a:t>
+            </a:r>
+            <a:r>
+              <a:rPr>
+                <a:solidFill>
+                  <a:srgbClr val="657422"/>
+                </a:solidFill>
+                <a:latin typeface="Courier"/>
+              </a:rPr>
+              <a:t>dpi =</a:t>
+            </a:r>
+            <a:r>
+              <a:rPr>
+                <a:solidFill>
+                  <a:srgbClr val="003B4F"/>
+                </a:solidFill>
+                <a:latin typeface="Courier"/>
+              </a:rPr>
+              <a:t> </a:t>
+            </a:r>
+            <a:r>
+              <a:rPr>
+                <a:solidFill>
+                  <a:srgbClr val="AD0000"/>
+                </a:solidFill>
+                <a:latin typeface="Courier"/>
+              </a:rPr>
+              <a:t>300</a:t>
+            </a:r>
+            <a:br/>
+            <a:r>
+              <a:rPr>
+                <a:solidFill>
+                  <a:srgbClr val="003B4F"/>
+                </a:solidFill>
+                <a:latin typeface="Courier"/>
+              </a:rPr>
+              <a:t>)</a:t>
+            </a:r>
+          </a:p>
+          <a:p>
+            <a:pPr lvl="0" indent="0" marL="1270000">
+              <a:buNone/>
+            </a:pPr>
+            <a:r>
+              <a:rPr sz="2000" b="1"/>
+              <a:t>Warning</a:t>
+            </a:r>
+          </a:p>
+          <a:p>
+            <a:pPr lvl="0" indent="0" marL="1270000">
+              <a:buNone/>
+            </a:pPr>
+            <a:r>
+              <a:rPr sz="2000" b="1"/>
+              <a:t>⚠️ Watch out!</a:t>
+            </a:r>
+          </a:p>
+          <a:p>
+            <a:pPr lvl="0" indent="0" marL="1270000">
+              <a:buNone/>
+            </a:pPr>
+            <a:r>
+              <a:rPr sz="2000">
+                <a:latin typeface="Courier"/>
+              </a:rPr>
+              <a:t>ggsave()</a:t>
+            </a:r>
+            <a:r>
+              <a:rPr sz="2000"/>
+              <a:t> wants the </a:t>
+            </a:r>
+            <a:r>
+              <a:rPr sz="2000" b="1"/>
+              <a:t>filename first</a:t>
+            </a:r>
+            <a:r>
+              <a:rPr sz="2000"/>
+              <a:t>, then </a:t>
+            </a:r>
+            <a:r>
+              <a:rPr sz="2000">
+                <a:latin typeface="Courier"/>
+              </a:rPr>
+              <a:t>plot =</a:t>
+            </a:r>
+            <a:r>
+              <a:rPr sz="2000"/>
+              <a:t>. If you skip </a:t>
+            </a:r>
+            <a:r>
+              <a:rPr sz="2000">
+                <a:latin typeface="Courier"/>
+              </a:rPr>
+              <a:t>plot =</a:t>
+            </a:r>
+            <a:r>
+              <a:rPr sz="2000"/>
+              <a:t>, it saves whatever plot was drawn </a:t>
+            </a:r>
+            <a:r>
+              <a:rPr sz="2000" i="1"/>
+              <a:t>last</a:t>
+            </a:r>
+            <a:r>
+              <a:rPr sz="2000"/>
+              <a:t> — not necessarily the one you meant.</a:t>
+            </a:r>
+          </a:p>
+        </p:txBody>
+      </p:sp>
+      <p:sp>
+        <p:nvSpPr>
+          <p:cNvPr id="4" name="Content Placeholder 3"/>
+          <p:cNvSpPr>
+            <a:spLocks noGrp="1"/>
+          </p:cNvSpPr>
+          <p:nvPr>
+            <p:ph idx="2" sz="half"/>
+          </p:nvPr>
+        </p:nvSpPr>
+        <p:spPr/>
+        <p:txBody>
+          <a:bodyPr/>
+          <a:lstStyle/>
+          <a:p>
+            <a:pPr lvl="0" indent="0" marL="1270000">
+              <a:buNone/>
+            </a:pPr>
+            <a:r>
+              <a:rPr sz="2000" b="1"/>
+              <a:t>Note</a:t>
+            </a:r>
+          </a:p>
+          <a:p>
+            <a:pPr lvl="0" indent="0" marL="1270000">
+              <a:buNone/>
+            </a:pPr>
+            <a:r>
+              <a:rPr sz="2000" b="1"/>
+              <a:t>✅ Key idea</a:t>
+            </a:r>
+          </a:p>
+          <a:p>
+            <a:pPr lvl="0" indent="0" marL="1270000">
+              <a:buNone/>
+            </a:pPr>
+            <a:r>
+              <a:rPr sz="2000"/>
+              <a:t>Always set </a:t>
+            </a:r>
+            <a:r>
+              <a:rPr sz="2000">
+                <a:latin typeface="Courier"/>
+              </a:rPr>
+              <a:t>width</a:t>
+            </a:r>
+            <a:r>
+              <a:rPr sz="2000"/>
+              <a:t>, </a:t>
+            </a:r>
+            <a:r>
+              <a:rPr sz="2000">
+                <a:latin typeface="Courier"/>
+              </a:rPr>
+              <a:t>height</a:t>
+            </a:r>
+            <a:r>
+              <a:rPr sz="2000"/>
+              <a:t>, </a:t>
+            </a:r>
+            <a:r>
+              <a:rPr sz="2000">
+                <a:latin typeface="Courier"/>
+              </a:rPr>
+              <a:t>units</a:t>
+            </a:r>
+            <a:r>
+              <a:rPr sz="2000"/>
+              <a:t>, and </a:t>
+            </a:r>
+            <a:r>
+              <a:rPr sz="2000">
+                <a:latin typeface="Courier"/>
+              </a:rPr>
+              <a:t>dpi</a:t>
+            </a:r>
+            <a:r>
+              <a:rPr sz="2000"/>
+              <a:t> explicitly. Letting </a:t>
+            </a:r>
+            <a:r>
+              <a:rPr sz="2000">
+                <a:latin typeface="Courier"/>
+              </a:rPr>
+              <a:t>ggsave()</a:t>
+            </a:r>
+            <a:r>
+              <a:rPr sz="2000"/>
+              <a:t> guess gives you a plot sized for your screen, not for a report or a poster.</a:t>
+            </a:r>
+          </a:p>
+        </p:txBody>
+      </p:sp>
+    </p:spTree>
+  </p:cSld>
+</p:sld>
+</file>
+
+<file path=ppt/slides/slide19.xml><?xml version="1.0" encoding="utf-8"?>
+<p:sld xmlns:a="http://schemas.openxmlformats.org/drawingml/2006/main" xmlns:r="http://schemas.openxmlformats.org/officeDocument/2006/relationships" xmlns:p="http://schemas.openxmlformats.org/presentationml/2006/main">
+  <p:cSld>
+    <p:spTree>
+      <p:nvGrpSpPr>
+        <p:cNvPr id="1" name=""/>
+        <p:cNvGrpSpPr/>
+        <p:nvPr/>
+      </p:nvGrpSpPr>
+      <p:grpSpPr>
+        <a:xfrm>
+          <a:off x="0" y="0"/>
+          <a:ext cx="0" cy="0"/>
+          <a:chOff x="0" y="0"/>
+          <a:chExt cx="0" cy="0"/>
+        </a:xfrm>
+      </p:grpSpPr>
+      <p:sp>
+        <p:nvSpPr>
+          <p:cNvPr id="2" name="Title 1"/>
+          <p:cNvSpPr>
+            <a:spLocks noGrp="1"/>
+          </p:cNvSpPr>
+          <p:nvPr>
+            <p:ph type="title"/>
+          </p:nvPr>
+        </p:nvSpPr>
+        <p:spPr>
+          <a:xfrm>
+            <a:off x="0" y="0"/>
+            <a:ext cx="9144000" cy="602780"/>
+          </a:xfrm>
+          <a:solidFill>
+            <a:srgbClr val="70121D"/>
+          </a:solidFill>
+        </p:spPr>
+        <p:txBody>
+          <a:bodyPr/>
+          <a:lstStyle/>
+          <a:p>
+            <a:pPr lvl="0" indent="0" marL="0">
+              <a:buNone/>
+            </a:pPr>
+            <a:r>
+              <a:rPr/>
+              <a:t>Wrap-up</a:t>
+            </a:r>
+          </a:p>
+        </p:txBody>
+      </p:sp>
+      <p:sp>
+        <p:nvSpPr>
+          <p:cNvPr id="3" name="Content Placeholder 2"/>
+          <p:cNvSpPr>
+            <a:spLocks noGrp="1"/>
+          </p:cNvSpPr>
+          <p:nvPr>
+            <p:ph idx="1" sz="half"/>
+          </p:nvPr>
+        </p:nvSpPr>
+        <p:spPr/>
+        <p:txBody>
+          <a:bodyPr/>
+          <a:lstStyle/>
+          <a:p>
+            <a:pPr lvl="0" indent="0" marL="0">
+              <a:buNone/>
+            </a:pPr>
+            <a:r>
+              <a:rPr/>
+              <a:t>Today you:</a:t>
+            </a:r>
+          </a:p>
+          <a:p>
+            <a:pPr lvl="0"/>
+            <a:r>
+              <a:rPr/>
+              <a:t>Built boxplots with raw points overlaid, not hidden</a:t>
+            </a:r>
+          </a:p>
+          <a:p>
+            <a:pPr lvl="0"/>
+            <a:r>
+              <a:rPr/>
+              <a:t>Mapped a third variable with </a:t>
+            </a:r>
+            <a:r>
+              <a:rPr>
+                <a:latin typeface="Courier"/>
+              </a:rPr>
+              <a:t>color =</a:t>
+            </a:r>
+            <a:r>
+              <a:rPr/>
+              <a:t> / </a:t>
+            </a:r>
+            <a:r>
+              <a:rPr>
+                <a:latin typeface="Courier"/>
+              </a:rPr>
+              <a:t>fill =</a:t>
+            </a:r>
+            <a:r>
+              <a:rPr/>
+              <a:t> inside </a:t>
+            </a:r>
+            <a:r>
+              <a:rPr>
+                <a:latin typeface="Courier"/>
+              </a:rPr>
+              <a:t>aes()</a:t>
+            </a:r>
+          </a:p>
+          <a:p>
+            <a:pPr lvl="0"/>
+            <a:r>
+              <a:rPr/>
+              <a:t>Plotted mean ± SE directly with </a:t>
+            </a:r>
+            <a:r>
+              <a:rPr>
+                <a:latin typeface="Courier"/>
+              </a:rPr>
+              <a:t>stat_summary()</a:t>
+            </a:r>
+            <a:r>
+              <a:rPr/>
+              <a:t> — no separate summary table needed</a:t>
+            </a:r>
+          </a:p>
+          <a:p>
+            <a:pPr lvl="0"/>
+            <a:r>
+              <a:rPr/>
+              <a:t>Faceted a plot with </a:t>
+            </a:r>
+            <a:r>
+              <a:rPr>
+                <a:latin typeface="Courier"/>
+              </a:rPr>
+              <a:t>facet_wrap()</a:t>
+            </a:r>
+            <a:r>
+              <a:rPr/>
+              <a:t> to check every group at once</a:t>
+            </a:r>
+          </a:p>
+          <a:p>
+            <a:pPr lvl="0"/>
+            <a:r>
+              <a:rPr/>
+              <a:t>Compared themes, and saved a real, correctly-sized figure with </a:t>
+            </a:r>
+            <a:r>
+              <a:rPr>
+                <a:latin typeface="Courier"/>
+              </a:rPr>
+              <a:t>ggsave()</a:t>
+            </a:r>
+          </a:p>
+          <a:p>
+            <a:pPr lvl="0" indent="0" marL="1270000">
+              <a:buNone/>
+            </a:pPr>
+            <a:r>
+              <a:rPr sz="2000" b="1"/>
+              <a:t>Tip</a:t>
+            </a:r>
+          </a:p>
+          <a:p>
+            <a:pPr lvl="0" indent="0" marL="1270000">
+              <a:buNone/>
+            </a:pPr>
+            <a:r>
+              <a:rPr sz="2000" b="1"/>
+              <a:t>🖐 Before next class</a:t>
+            </a:r>
+          </a:p>
+          <a:p>
+            <a:pPr lvl="0" indent="0" marL="1270000">
+              <a:buNone/>
+            </a:pPr>
+            <a:r>
+              <a:rPr sz="2000"/>
+              <a:t>Finish the worksheet: build a mean ± SE plot faceted by </a:t>
+            </a:r>
+            <a:r>
+              <a:rPr sz="2000">
+                <a:latin typeface="Courier"/>
+              </a:rPr>
+              <a:t>group</a:t>
+            </a:r>
+            <a:r>
+              <a:rPr sz="2000"/>
+              <a:t>, pick a theme, and save it to </a:t>
+            </a:r>
+            <a:r>
+              <a:rPr sz="2000">
+                <a:latin typeface="Courier"/>
+              </a:rPr>
+              <a:t>figures/</a:t>
+            </a:r>
+            <a:r>
+              <a:rPr sz="2000"/>
+              <a:t> at 3×3in, 300 dpi.</a:t>
+            </a:r>
+          </a:p>
+        </p:txBody>
+      </p:sp>
+      <p:sp>
+        <p:nvSpPr>
+          <p:cNvPr id="4" name="Content Placeholder 3"/>
+          <p:cNvSpPr>
+            <a:spLocks noGrp="1"/>
+          </p:cNvSpPr>
+          <p:nvPr>
+            <p:ph idx="2" sz="half"/>
+          </p:nvPr>
+        </p:nvSpPr>
+        <p:spPr/>
+        <p:txBody>
+          <a:bodyPr/>
+          <a:lstStyle/>
+          <a:p>
+            <a:pPr lvl="0" indent="0" marL="1270000">
+              <a:buNone/>
+            </a:pPr>
+            <a:r>
+              <a:rPr sz="2000" b="1"/>
+              <a:t>Note</a:t>
+            </a:r>
+          </a:p>
+          <a:p>
+            <a:pPr lvl="0" indent="0" marL="1270000">
+              <a:buNone/>
+            </a:pPr>
+            <a:r>
+              <a:rPr sz="2000" b="1"/>
+              <a:t>Where this leads</a:t>
+            </a:r>
+          </a:p>
+          <a:p>
+            <a:pPr lvl="0" indent="0" marL="1270000">
+              <a:buNone/>
+            </a:pPr>
+            <a:r>
+              <a:rPr sz="2000"/>
+              <a:t>You can now import, wrangle, describe, and visualize a dataset end to end. That full pipeline — raw data → clean → summarize → visualize — is the foundation every later statistical test builds on.</a:t>
+            </a:r>
+          </a:p>
+        </p:txBody>
+      </p:sp>
+    </p:spTree>
+  </p:cSld>
+</p:sld>
+</file>
+
+<file path=ppt/slides/slide2.xml><?xml version="1.0" encoding="utf-8"?>
+<p:sld xmlns:a="http://schemas.openxmlformats.org/drawingml/2006/main" xmlns:r="http://schemas.openxmlformats.org/officeDocument/2006/relationships" xmlns:p="http://schemas.openxmlformats.org/presentationml/2006/main">
+  <p:cSld>
+    <p:spTree>
+      <p:nvGrpSpPr>
+        <p:cNvPr id="1" name=""/>
+        <p:cNvGrpSpPr/>
+        <p:nvPr/>
+      </p:nvGrpSpPr>
+      <p:grpSpPr>
+        <a:xfrm>
+          <a:off x="0" y="0"/>
+          <a:ext cx="0" cy="0"/>
+          <a:chOff x="0" y="0"/>
+          <a:chExt cx="0" cy="0"/>
+        </a:xfrm>
+      </p:grpSpPr>
+      <p:sp>
+        <p:nvSpPr>
+          <p:cNvPr id="2" name="Title 1"/>
+          <p:cNvSpPr>
+            <a:spLocks noGrp="1"/>
+          </p:cNvSpPr>
+          <p:nvPr>
+            <p:ph type="title"/>
+          </p:nvPr>
+        </p:nvSpPr>
+        <p:spPr>
+          <a:xfrm>
+            <a:off x="0" y="0"/>
+            <a:ext cx="9144000" cy="602780"/>
+          </a:xfrm>
+          <a:solidFill>
+            <a:srgbClr val="70121D"/>
+          </a:solidFill>
+        </p:spPr>
+        <p:txBody>
+          <a:bodyPr/>
+          <a:lstStyle/>
+          <a:p>
+            <a:pPr lvl="0" indent="0" marL="0">
+              <a:buNone/>
+            </a:pPr>
+            <a:r>
+              <a:rPr/>
+              <a:t>Where We Left Off</a:t>
+            </a:r>
+          </a:p>
+        </p:txBody>
+      </p:sp>
+      <p:sp>
+        <p:nvSpPr>
+          <p:cNvPr id="3" name="Content Placeholder 2"/>
+          <p:cNvSpPr>
+            <a:spLocks noGrp="1"/>
+          </p:cNvSpPr>
+          <p:nvPr>
+            <p:ph idx="1" sz="half"/>
+          </p:nvPr>
+        </p:nvSpPr>
+        <p:spPr/>
+        <p:txBody>
+          <a:bodyPr/>
+          <a:lstStyle/>
+          <a:p>
+            <a:pPr lvl="0" indent="0" marL="0">
+              <a:buNone/>
+            </a:pPr>
+            <a:r>
+              <a:rPr/>
+              <a:t>Last time you:</a:t>
+            </a:r>
+          </a:p>
+          <a:p>
+            <a:pPr lvl="0"/>
+            <a:r>
+              <a:rPr/>
+              <a:t>Computed mean, median, SD, and SE — by hand and with </a:t>
+            </a:r>
+            <a:r>
+              <a:rPr>
+                <a:latin typeface="Courier"/>
+              </a:rPr>
+              <a:t>summarize()</a:t>
+            </a:r>
+          </a:p>
+          <a:p>
+            <a:pPr lvl="0"/>
+            <a:r>
+              <a:rPr/>
+              <a:t>Fixed the </a:t>
+            </a:r>
+            <a:r>
+              <a:rPr>
+                <a:latin typeface="Courier"/>
+              </a:rPr>
+              <a:t>length()</a:t>
+            </a:r>
+            <a:r>
+              <a:rPr/>
+              <a:t> trap with </a:t>
+            </a:r>
+            <a:r>
+              <a:rPr>
+                <a:latin typeface="Courier"/>
+              </a:rPr>
+              <a:t>sum(!is.na())</a:t>
+            </a:r>
+          </a:p>
+          <a:p>
+            <a:pPr lvl="0"/>
+            <a:r>
+              <a:rPr/>
+              <a:t>Got tidy per-group tables with </a:t>
+            </a:r>
+            <a:r>
+              <a:rPr>
+                <a:latin typeface="Courier"/>
+              </a:rPr>
+              <a:t>group_by()</a:t>
+            </a:r>
+            <a:r>
+              <a:rPr/>
+              <a:t> + </a:t>
+            </a:r>
+            <a:r>
+              <a:rPr>
+                <a:latin typeface="Courier"/>
+              </a:rPr>
+              <a:t>summarize()</a:t>
+            </a:r>
+          </a:p>
+          <a:p>
+            <a:pPr lvl="0" indent="0" marL="1270000">
+              <a:buNone/>
+            </a:pPr>
+            <a:r>
+              <a:rPr sz="2000" b="1"/>
+              <a:t>Note</a:t>
+            </a:r>
+          </a:p>
+          <a:p>
+            <a:pPr lvl="0" indent="0" marL="1270000">
+              <a:buNone/>
+            </a:pPr>
+            <a:r>
+              <a:rPr sz="2000" b="1"/>
+              <a:t>✅ Key idea from Module 3</a:t>
+            </a:r>
+          </a:p>
+          <a:p>
+            <a:pPr lvl="0" indent="0" marL="1270000">
+              <a:buNone/>
+            </a:pPr>
+            <a:r>
+              <a:rPr sz="2000"/>
+              <a:t>You now have real numbers describing lee vs. windward needles. Today we make those numbers </a:t>
+            </a:r>
+            <a:r>
+              <a:rPr sz="2000" b="1"/>
+              <a:t>visible</a:t>
+            </a:r>
+            <a:r>
+              <a:rPr sz="2000"/>
+              <a:t> — and save the result properly.</a:t>
+            </a:r>
+          </a:p>
+        </p:txBody>
+      </p:sp>
+      <p:sp>
+        <p:nvSpPr>
+          <p:cNvPr id="4" name="Content Placeholder 3"/>
+          <p:cNvSpPr>
+            <a:spLocks noGrp="1"/>
+          </p:cNvSpPr>
+          <p:nvPr>
+            <p:ph idx="2" sz="half"/>
+          </p:nvPr>
+        </p:nvSpPr>
+        <p:spPr/>
+        <p:txBody>
+          <a:bodyPr/>
+          <a:lstStyle/>
+          <a:p>
+            <a:pPr lvl="0" indent="0" marL="1270000">
+              <a:buNone/>
+            </a:pPr>
+            <a:r>
+              <a:rPr sz="2000" b="1"/>
+              <a:t>Note</a:t>
+            </a:r>
+          </a:p>
+          <a:p>
+            <a:pPr lvl="0" indent="0" marL="1270000">
+              <a:buNone/>
+            </a:pPr>
+            <a:r>
+              <a:rPr sz="2000" b="1"/>
+              <a:t>Today’s roadmap</a:t>
+            </a:r>
+          </a:p>
+          <a:p>
+            <a:pPr lvl="0" indent="-342900" marL="342900">
+              <a:buAutoNum type="arabicPeriod"/>
+            </a:pPr>
+            <a:r>
+              <a:rPr sz="2000"/>
+              <a:t>The </a:t>
+            </a:r>
+            <a:r>
+              <a:rPr sz="2000">
+                <a:latin typeface="Courier"/>
+              </a:rPr>
+              <a:t>ggplot</a:t>
+            </a:r>
+            <a:r>
+              <a:rPr sz="2000"/>
+              <a:t> grammar, recapped</a:t>
+            </a:r>
+          </a:p>
+          <a:p>
+            <a:pPr lvl="0" indent="-342900" marL="342900">
+              <a:buAutoNum type="arabicPeriod"/>
+            </a:pPr>
+            <a:r>
+              <a:rPr sz="2000"/>
+              <a:t>Boxplots done right — with raw points</a:t>
+            </a:r>
+          </a:p>
+          <a:p>
+            <a:pPr lvl="0" indent="-342900" marL="342900">
+              <a:buAutoNum type="arabicPeriod"/>
+            </a:pPr>
+            <a:r>
+              <a:rPr sz="2000"/>
+              <a:t>Plotting mean ± SE directly</a:t>
+            </a:r>
+          </a:p>
+          <a:p>
+            <a:pPr lvl="0" indent="-342900" marL="342900">
+              <a:buAutoNum type="arabicPeriod"/>
+            </a:pPr>
+            <a:r>
+              <a:rPr sz="2000"/>
+              <a:t>Faceting and a quick theme tour</a:t>
+            </a:r>
+          </a:p>
+          <a:p>
+            <a:pPr lvl="0" indent="-342900" marL="342900">
+              <a:buAutoNum type="arabicPeriod"/>
+            </a:pPr>
+            <a:r>
+              <a:rPr sz="2000">
+                <a:latin typeface="Courier"/>
+              </a:rPr>
+              <a:t>ggsave()</a:t>
+            </a:r>
+            <a:r>
+              <a:rPr sz="2000"/>
+              <a:t>, for real this time</a:t>
+            </a:r>
+          </a:p>
+        </p:txBody>
+      </p:sp>
+    </p:spTree>
+  </p:cSld>
+</p:sld>
+</file>
+
+<file path=ppt/slides/slide20.xml><?xml version="1.0" encoding="utf-8"?>
+<p:sld xmlns:a="http://schemas.openxmlformats.org/drawingml/2006/main" xmlns:r="http://schemas.openxmlformats.org/officeDocument/2006/relationships" xmlns:p="http://schemas.openxmlformats.org/presentationml/2006/main">
+  <p:cSld>
+    <p:spTree>
+      <p:nvGrpSpPr>
+        <p:cNvPr id="1" name=""/>
+        <p:cNvGrpSpPr/>
+        <p:nvPr/>
+      </p:nvGrpSpPr>
+      <p:grpSpPr>
+        <a:xfrm>
+          <a:off x="0" y="0"/>
+          <a:ext cx="0" cy="0"/>
+          <a:chOff x="0" y="0"/>
+          <a:chExt cx="0" cy="0"/>
+        </a:xfrm>
+      </p:grpSpPr>
+      <p:sp>
+        <p:nvSpPr>
+          <p:cNvPr id="2" name="Title 1"/>
+          <p:cNvSpPr>
+            <a:spLocks noGrp="1"/>
+          </p:cNvSpPr>
+          <p:nvPr>
+            <p:ph type="title"/>
+          </p:nvPr>
+        </p:nvSpPr>
+        <p:spPr>
+          <a:xfrm>
+            <a:off x="0" y="0"/>
+            <a:ext cx="9144000" cy="582780"/>
+          </a:xfrm>
+        </p:spPr>
+        <p:txBody>
+          <a:bodyPr/>
+          <a:lstStyle/>
+          <a:p>
+            <a:pPr lvl="0" indent="0" marL="0">
+              <a:buNone/>
+            </a:pPr>
+            <a:r>
+              <a:rPr/>
+              <a:t>Getting unstuck</a:t>
+            </a:r>
+          </a:p>
+        </p:txBody>
+      </p:sp>
+      <p:sp>
+        <p:nvSpPr>
+          <p:cNvPr id="3" name="Content Placeholder 2"/>
+          <p:cNvSpPr>
+            <a:spLocks noGrp="1"/>
+          </p:cNvSpPr>
+          <p:nvPr>
+            <p:ph idx="1"/>
+          </p:nvPr>
+        </p:nvSpPr>
+        <p:spPr/>
+        <p:txBody>
+          <a:bodyPr/>
+          <a:lstStyle/>
+          <a:p>
+            <a:pPr lvl="0" indent="0" marL="0">
+              <a:buNone/>
+            </a:pPr>
+            <a:r>
+              <a:rPr/>
+              <a:t>When code breaks — and it will, that is normal:</a:t>
+            </a:r>
+          </a:p>
+          <a:p>
+            <a:pPr lvl="0" indent="-342900" marL="342900">
+              <a:buAutoNum type="arabicPeriod"/>
+            </a:pPr>
+            <a:r>
+              <a:rPr/>
+              <a:t>Read the </a:t>
+            </a:r>
+            <a:r>
+              <a:rPr b="1"/>
+              <a:t>error message</a:t>
+            </a:r>
+            <a:r>
+              <a:rPr/>
+              <a:t> out loud; it usually names the line</a:t>
+            </a:r>
+          </a:p>
+          <a:p>
+            <a:pPr lvl="0" indent="-342900" marL="342900">
+              <a:buAutoNum type="arabicPeriod"/>
+            </a:pPr>
+            <a:r>
+              <a:rPr/>
+              <a:t>Check the usual suspects: </a:t>
+            </a:r>
+            <a:r>
+              <a:rPr>
+                <a:latin typeface="Courier"/>
+              </a:rPr>
+              <a:t>library(tidyverse)</a:t>
+            </a:r>
+            <a:r>
+              <a:rPr/>
+              <a:t> loaded? Is </a:t>
+            </a:r>
+            <a:r>
+              <a:rPr>
+                <a:latin typeface="Courier"/>
+              </a:rPr>
+              <a:t>color</a:t>
+            </a:r>
+            <a:r>
+              <a:rPr/>
+              <a:t>/</a:t>
+            </a:r>
+            <a:r>
+              <a:rPr>
+                <a:latin typeface="Courier"/>
+              </a:rPr>
+              <a:t>fill</a:t>
+            </a:r>
+            <a:r>
+              <a:rPr/>
+              <a:t> inside </a:t>
+            </a:r>
+            <a:r>
+              <a:rPr>
+                <a:latin typeface="Courier"/>
+              </a:rPr>
+              <a:t>aes()</a:t>
+            </a:r>
+            <a:r>
+              <a:rPr/>
+              <a:t> when it should be?</a:t>
+            </a:r>
+          </a:p>
+          <a:p>
+            <a:pPr lvl="0" indent="-342900" marL="342900">
+              <a:buAutoNum type="arabicPeriod"/>
+            </a:pPr>
+            <a:r>
+              <a:rPr>
+                <a:latin typeface="Courier"/>
+              </a:rPr>
+              <a:t>?function_name</a:t>
+            </a:r>
+            <a:r>
+              <a:rPr/>
+              <a:t> opens the help page</a:t>
+            </a:r>
+          </a:p>
+          <a:p>
+            <a:pPr lvl="0" indent="-342900" marL="342900">
+              <a:buAutoNum type="arabicPeriod"/>
+            </a:pPr>
+            <a:r>
+              <a:rPr/>
+              <a:t>Bring the </a:t>
+            </a:r>
+            <a:r>
+              <a:rPr b="1"/>
+              <a:t>exact error</a:t>
+            </a:r>
+            <a:r>
+              <a:rPr/>
+              <a:t> (copy-paste it) to class or office hours</a:t>
+            </a:r>
+          </a:p>
+          <a:p>
+            <a:pPr lvl="0" indent="0" marL="1270000">
+              <a:buNone/>
+            </a:pPr>
+            <a:r>
+              <a:rPr sz="2000" b="1"/>
+              <a:t>Note</a:t>
+            </a:r>
+          </a:p>
+          <a:p>
+            <a:pPr lvl="0" indent="0" marL="1270000">
+              <a:buNone/>
+            </a:pPr>
+            <a:r>
+              <a:rPr sz="2000" b="1"/>
+              <a:t>✅ Key idea</a:t>
+            </a:r>
+          </a:p>
+          <a:p>
+            <a:pPr lvl="0" indent="0" marL="1270000">
+              <a:buNone/>
+            </a:pPr>
+            <a:r>
+              <a:rPr sz="2000"/>
+              <a:t>Every working scientist googles error messages daily. Getting stuck is not failing — it is the job.</a:t>
+            </a:r>
+          </a:p>
+        </p:txBody>
+      </p:sp>
+    </p:spTree>
+  </p:cSld>
+</p:sld>
+</file>
+
+<file path=ppt/slides/slide3.xml><?xml version="1.0" encoding="utf-8"?>
+<p:sld xmlns:a="http://schemas.openxmlformats.org/drawingml/2006/main" xmlns:r="http://schemas.openxmlformats.org/officeDocument/2006/relationships" xmlns:p="http://schemas.openxmlformats.org/presentationml/2006/main">
+  <p:cSld>
+    <p:spTree>
+      <p:nvGrpSpPr>
+        <p:cNvPr id="1" name=""/>
+        <p:cNvGrpSpPr/>
+        <p:nvPr/>
+      </p:nvGrpSpPr>
+      <p:grpSpPr>
+        <a:xfrm>
+          <a:off x="0" y="0"/>
+          <a:ext cx="0" cy="0"/>
+          <a:chOff x="0" y="0"/>
+          <a:chExt cx="0" cy="0"/>
+        </a:xfrm>
+      </p:grpSpPr>
+      <p:sp>
+        <p:nvSpPr>
+          <p:cNvPr id="2" name="Title 1"/>
+          <p:cNvSpPr>
+            <a:spLocks noGrp="1"/>
+          </p:cNvSpPr>
+          <p:nvPr>
+            <p:ph type="title"/>
+          </p:nvPr>
+        </p:nvSpPr>
+        <p:spPr>
+          <a:xfrm>
+            <a:off x="0" y="0"/>
+            <a:ext cx="9144000" cy="582780"/>
+          </a:xfrm>
+        </p:spPr>
+        <p:txBody>
+          <a:bodyPr/>
+          <a:lstStyle/>
+          <a:p>
+            <a:pPr lvl="0" indent="0" marL="0">
+              <a:buNone/>
+            </a:pPr>
+            <a:r>
+              <a:rPr/>
+              <a:t>Part 1 · The </a:t>
+            </a:r>
+            <a:r>
+              <a:rPr>
+                <a:latin typeface="Courier"/>
+              </a:rPr>
+              <a:t>ggplot</a:t>
+            </a:r>
+            <a:r>
+              <a:rPr/>
+              <a:t> Grammar, Recapped</a:t>
+            </a:r>
+          </a:p>
+        </p:txBody>
+      </p:sp>
+    </p:spTree>
+  </p:cSld>
+</p:sld>
+</file>
+
+<file path=ppt/slides/slide4.xml><?xml version="1.0" encoding="utf-8"?>
+<p:sld xmlns:a="http://schemas.openxmlformats.org/drawingml/2006/main" xmlns:r="http://schemas.openxmlformats.org/officeDocument/2006/relationships" xmlns:p="http://schemas.openxmlformats.org/presentationml/2006/main">
+  <p:cSld>
+    <p:spTree>
+      <p:nvGrpSpPr>
+        <p:cNvPr id="1" name=""/>
+        <p:cNvGrpSpPr/>
+        <p:nvPr/>
+      </p:nvGrpSpPr>
+      <p:grpSpPr>
+        <a:xfrm>
+          <a:off x="0" y="0"/>
+          <a:ext cx="0" cy="0"/>
+          <a:chOff x="0" y="0"/>
+          <a:chExt cx="0" cy="0"/>
+        </a:xfrm>
+      </p:grpSpPr>
+      <p:sp>
+        <p:nvSpPr>
+          <p:cNvPr id="2" name="Title 1"/>
+          <p:cNvSpPr>
+            <a:spLocks noGrp="1"/>
+          </p:cNvSpPr>
+          <p:nvPr>
+            <p:ph type="title"/>
+          </p:nvPr>
+        </p:nvSpPr>
+        <p:spPr>
+          <a:xfrm>
+            <a:off x="0" y="0"/>
+            <a:ext cx="9144000" cy="602780"/>
+          </a:xfrm>
+          <a:solidFill>
+            <a:srgbClr val="70121D"/>
+          </a:solidFill>
+        </p:spPr>
+        <p:txBody>
+          <a:bodyPr/>
+          <a:lstStyle/>
+          <a:p>
+            <a:pPr lvl="0" indent="0" marL="0">
+              <a:buNone/>
+            </a:pPr>
+            <a:r>
+              <a:rPr/>
+              <a:t>The </a:t>
+            </a:r>
+            <a:r>
+              <a:rPr>
+                <a:latin typeface="Courier"/>
+              </a:rPr>
+              <a:t>ggplot</a:t>
+            </a:r>
+            <a:r>
+              <a:rPr/>
+              <a:t> Grammar, Recapped</a:t>
+            </a:r>
+          </a:p>
+        </p:txBody>
+      </p:sp>
+      <p:sp>
+        <p:nvSpPr>
+          <p:cNvPr id="3" name="Content Placeholder 2"/>
+          <p:cNvSpPr>
+            <a:spLocks noGrp="1"/>
+          </p:cNvSpPr>
+          <p:nvPr>
+            <p:ph idx="1" sz="half"/>
+          </p:nvPr>
+        </p:nvSpPr>
+        <p:spPr/>
+        <p:txBody>
+          <a:bodyPr/>
+          <a:lstStyle/>
+          <a:p>
+            <a:pPr lvl="0" indent="0" marL="0">
+              <a:buNone/>
+            </a:pPr>
+            <a:r>
+              <a:rPr/>
+              <a:t>Every </a:t>
+            </a:r>
+            <a:r>
+              <a:rPr>
+                <a:latin typeface="Courier"/>
+              </a:rPr>
+              <a:t>ggplot</a:t>
+            </a:r>
+            <a:r>
+              <a:rPr/>
+              <a:t> is three pieces joined with </a:t>
+            </a:r>
+            <a:r>
+              <a:rPr>
+                <a:latin typeface="Courier"/>
+              </a:rPr>
+              <a:t>+</a:t>
+            </a:r>
+            <a:r>
+              <a:rPr/>
+              <a:t>:</a:t>
+            </a:r>
+          </a:p>
+          <a:p>
+            <a:pPr lvl="0" indent="-342900" marL="342900">
+              <a:buAutoNum type="arabicPeriod"/>
+            </a:pPr>
+            <a:r>
+              <a:rPr b="1"/>
+              <a:t>data</a:t>
+            </a:r>
+            <a:r>
+              <a:rPr/>
+              <a:t> — which data frame</a:t>
+            </a:r>
+          </a:p>
+          <a:p>
+            <a:pPr lvl="0" indent="-342900" marL="342900">
+              <a:buAutoNum type="arabicPeriod"/>
+            </a:pPr>
+            <a:r>
+              <a:rPr b="1"/>
+              <a:t>aes()</a:t>
+            </a:r>
+            <a:r>
+              <a:rPr/>
+              <a:t> — which columns map to x, y, color, fill…</a:t>
+            </a:r>
+          </a:p>
+          <a:p>
+            <a:pPr lvl="0" indent="-342900" marL="342900">
+              <a:buAutoNum type="arabicPeriod"/>
+            </a:pPr>
+            <a:r>
+              <a:rPr b="1"/>
+              <a:t>geom</a:t>
+            </a:r>
+            <a:r>
+              <a:rPr/>
+              <a:t> — how to draw it</a:t>
+            </a:r>
+          </a:p>
+          <a:p>
+            <a:pPr lvl="0" indent="0">
+              <a:buNone/>
+            </a:pPr>
+            <a:r>
+              <a:rPr>
+                <a:solidFill>
+                  <a:srgbClr val="4758AB"/>
+                </a:solidFill>
+                <a:latin typeface="Courier"/>
+              </a:rPr>
+              <a:t>library</a:t>
+            </a:r>
+            <a:r>
+              <a:rPr>
+                <a:solidFill>
+                  <a:srgbClr val="003B4F"/>
+                </a:solidFill>
+                <a:latin typeface="Courier"/>
+              </a:rPr>
+              <a:t>(tidyverse)</a:t>
+            </a:r>
+            <a:br/>
+            <a:r>
+              <a:rPr>
+                <a:solidFill>
+                  <a:srgbClr val="4758AB"/>
+                </a:solidFill>
+                <a:latin typeface="Courier"/>
+              </a:rPr>
+              <a:t>library</a:t>
+            </a:r>
+            <a:r>
+              <a:rPr>
+                <a:solidFill>
+                  <a:srgbClr val="003B4F"/>
+                </a:solidFill>
+                <a:latin typeface="Courier"/>
+              </a:rPr>
+              <a:t>(readxl)</a:t>
+            </a:r>
+            <a:br/>
+            <a:br/>
+            <a:r>
+              <a:rPr>
+                <a:solidFill>
+                  <a:srgbClr val="003B4F"/>
+                </a:solidFill>
+                <a:latin typeface="Courier"/>
+              </a:rPr>
+              <a:t>pine_df &lt;- </a:t>
+            </a:r>
+            <a:r>
+              <a:rPr>
+                <a:solidFill>
+                  <a:srgbClr val="4758AB"/>
+                </a:solidFill>
+                <a:latin typeface="Courier"/>
+              </a:rPr>
+              <a:t>read_csv</a:t>
+            </a:r>
+            <a:r>
+              <a:rPr>
+                <a:solidFill>
+                  <a:srgbClr val="003B4F"/>
+                </a:solidFill>
+                <a:latin typeface="Courier"/>
+              </a:rPr>
+              <a:t>(</a:t>
+            </a:r>
+            <a:r>
+              <a:rPr>
+                <a:solidFill>
+                  <a:srgbClr val="20794D"/>
+                </a:solidFill>
+                <a:latin typeface="Courier"/>
+              </a:rPr>
+              <a:t>"data/pine_needles.csv"</a:t>
+            </a:r>
+            <a:r>
+              <a:rPr>
+                <a:solidFill>
+                  <a:srgbClr val="003B4F"/>
+                </a:solidFill>
+                <a:latin typeface="Courier"/>
+              </a:rPr>
+              <a:t>)</a:t>
+            </a:r>
+          </a:p>
+          <a:p>
+            <a:pPr lvl="0" indent="0" marL="1270000">
+              <a:buNone/>
+            </a:pPr>
+            <a:r>
+              <a:rPr sz="2000" b="1"/>
+              <a:t>Note</a:t>
+            </a:r>
+          </a:p>
+          <a:p>
+            <a:pPr lvl="0" indent="0" marL="1270000">
+              <a:buNone/>
+            </a:pPr>
+            <a:r>
+              <a:rPr sz="2000" b="1"/>
+              <a:t>✅ Key idea</a:t>
+            </a:r>
+          </a:p>
+          <a:p>
+            <a:pPr lvl="0" indent="0" marL="1270000">
+              <a:buNone/>
+            </a:pPr>
+            <a:r>
+              <a:rPr sz="2000"/>
+              <a:t>Everything today is the </a:t>
+            </a:r>
+            <a:r>
+              <a:rPr sz="2000" i="1"/>
+              <a:t>same three pieces</a:t>
+            </a:r>
+            <a:r>
+              <a:rPr sz="2000"/>
+              <a:t> — we’re just adding more layers and more polish on top of them.</a:t>
+            </a:r>
+          </a:p>
+        </p:txBody>
+      </p:sp>
+      <p:sp>
+        <p:nvSpPr>
+          <p:cNvPr id="4" name="Content Placeholder 3"/>
+          <p:cNvSpPr>
+            <a:spLocks noGrp="1"/>
+          </p:cNvSpPr>
+          <p:nvPr>
+            <p:ph idx="2" sz="half"/>
+          </p:nvPr>
+        </p:nvSpPr>
+        <p:spPr/>
+        <p:txBody>
+          <a:bodyPr/>
+          <a:lstStyle/>
+          <a:p>
+            <a:pPr lvl="0" indent="0" marL="1270000">
+              <a:buNone/>
+            </a:pPr>
+            <a:r>
+              <a:rPr sz="2000" b="1"/>
+              <a:t>Tip</a:t>
+            </a:r>
+          </a:p>
+          <a:p>
+            <a:pPr lvl="0" indent="0" marL="1270000">
+              <a:buNone/>
+            </a:pPr>
+            <a:r>
+              <a:rPr sz="2000" b="1"/>
+              <a:t>🖐 Recap from Module 1</a:t>
+            </a:r>
+          </a:p>
+          <a:p>
+            <a:pPr lvl="0" indent="0">
+              <a:buNone/>
+            </a:pPr>
+            <a:r>
+              <a:rPr>
+                <a:solidFill>
+                  <a:srgbClr val="4758AB"/>
+                </a:solidFill>
+                <a:latin typeface="Courier"/>
+              </a:rPr>
+              <a:t>ggplot</a:t>
+            </a:r>
+            <a:r>
+              <a:rPr>
+                <a:solidFill>
+                  <a:srgbClr val="003B4F"/>
+                </a:solidFill>
+                <a:latin typeface="Courier"/>
+              </a:rPr>
+              <a:t>(pine_df, </a:t>
+            </a:r>
+            <a:r>
+              <a:rPr>
+                <a:solidFill>
+                  <a:srgbClr val="4758AB"/>
+                </a:solidFill>
+                <a:latin typeface="Courier"/>
+              </a:rPr>
+              <a:t>aes</a:t>
+            </a:r>
+            <a:r>
+              <a:rPr>
+                <a:solidFill>
+                  <a:srgbClr val="003B4F"/>
+                </a:solidFill>
+                <a:latin typeface="Courier"/>
+              </a:rPr>
+              <a:t>(</a:t>
+            </a:r>
+            <a:r>
+              <a:rPr>
+                <a:solidFill>
+                  <a:srgbClr val="657422"/>
+                </a:solidFill>
+                <a:latin typeface="Courier"/>
+              </a:rPr>
+              <a:t>x =</a:t>
+            </a:r>
+            <a:r>
+              <a:rPr>
+                <a:solidFill>
+                  <a:srgbClr val="003B4F"/>
+                </a:solidFill>
+                <a:latin typeface="Courier"/>
+              </a:rPr>
+              <a:t> n_s, </a:t>
+            </a:r>
+            <a:r>
+              <a:rPr>
+                <a:solidFill>
+                  <a:srgbClr val="657422"/>
+                </a:solidFill>
+                <a:latin typeface="Courier"/>
+              </a:rPr>
+              <a:t>y =</a:t>
+            </a:r>
+            <a:r>
+              <a:rPr>
+                <a:solidFill>
+                  <a:srgbClr val="003B4F"/>
+                </a:solidFill>
+                <a:latin typeface="Courier"/>
+              </a:rPr>
+              <a:t> length_mm)) </a:t>
+            </a:r>
+            <a:r>
+              <a:rPr>
+                <a:solidFill>
+                  <a:srgbClr val="5E5E5E"/>
+                </a:solidFill>
+                <a:latin typeface="Courier"/>
+              </a:rPr>
+              <a:t>+</a:t>
+            </a:r>
+            <a:br/>
+            <a:r>
+              <a:rPr>
+                <a:solidFill>
+                  <a:srgbClr val="003B4F"/>
+                </a:solidFill>
+                <a:latin typeface="Courier"/>
+              </a:rPr>
+              <a:t>  </a:t>
+            </a:r>
+            <a:r>
+              <a:rPr>
+                <a:solidFill>
+                  <a:srgbClr val="4758AB"/>
+                </a:solidFill>
+                <a:latin typeface="Courier"/>
+              </a:rPr>
+              <a:t>geom_point</a:t>
+            </a:r>
+            <a:r>
+              <a:rPr>
+                <a:solidFill>
+                  <a:srgbClr val="003B4F"/>
+                </a:solidFill>
+                <a:latin typeface="Courier"/>
+              </a:rPr>
+              <a:t>()</a:t>
+            </a:r>
+          </a:p>
+          <a:p>
+            <a:pPr lvl="0" indent="0" marL="1270000">
+              <a:buNone/>
+            </a:pPr>
+          </a:p>
+        </p:txBody>
+      </p:sp>
+    </p:spTree>
+  </p:cSld>
+</p:sld>
+</file>
+
+<file path=ppt/slides/slide5.xml><?xml version="1.0" encoding="utf-8"?>
+<p:sld xmlns:a="http://schemas.openxmlformats.org/drawingml/2006/main" xmlns:r="http://schemas.openxmlformats.org/officeDocument/2006/relationships" xmlns:p="http://schemas.openxmlformats.org/presentationml/2006/main">
+  <p:cSld>
+    <p:spTree>
+      <p:nvGrpSpPr>
+        <p:cNvPr id="1" name=""/>
+        <p:cNvGrpSpPr/>
+        <p:nvPr/>
+      </p:nvGrpSpPr>
+      <p:grpSpPr>
+        <a:xfrm>
+          <a:off x="0" y="0"/>
+          <a:ext cx="0" cy="0"/>
+          <a:chOff x="0" y="0"/>
+          <a:chExt cx="0" cy="0"/>
+        </a:xfrm>
+      </p:grpSpPr>
+      <p:sp>
+        <p:nvSpPr>
+          <p:cNvPr id="2" name="Title 1"/>
+          <p:cNvSpPr>
+            <a:spLocks noGrp="1"/>
+          </p:cNvSpPr>
+          <p:nvPr>
+            <p:ph type="title"/>
+          </p:nvPr>
+        </p:nvSpPr>
+        <p:spPr>
+          <a:xfrm>
+            <a:off x="0" y="0"/>
+            <a:ext cx="9144000" cy="582780"/>
+          </a:xfrm>
+        </p:spPr>
+        <p:txBody>
+          <a:bodyPr/>
+          <a:lstStyle/>
+          <a:p>
+            <a:pPr lvl="0" indent="0" marL="0">
+              <a:buNone/>
+            </a:pPr>
+            <a:r>
+              <a:rPr/>
+              <a:t>Part 2 · Boxplot Anatomy</a:t>
+            </a:r>
+          </a:p>
+        </p:txBody>
+      </p:sp>
+    </p:spTree>
+  </p:cSld>
+</p:sld>
+</file>
+
+<file path=ppt/slides/slide6.xml><?xml version="1.0" encoding="utf-8"?>
+<p:sld xmlns:a="http://schemas.openxmlformats.org/drawingml/2006/main" xmlns:r="http://schemas.openxmlformats.org/officeDocument/2006/relationships" xmlns:p="http://schemas.openxmlformats.org/presentationml/2006/main">
+  <p:cSld>
+    <p:spTree>
+      <p:nvGrpSpPr>
+        <p:cNvPr id="1" name=""/>
+        <p:cNvGrpSpPr/>
+        <p:nvPr/>
+      </p:nvGrpSpPr>
+      <p:grpSpPr>
+        <a:xfrm>
+          <a:off x="0" y="0"/>
+          <a:ext cx="0" cy="0"/>
+          <a:chOff x="0" y="0"/>
+          <a:chExt cx="0" cy="0"/>
+        </a:xfrm>
+      </p:grpSpPr>
+      <p:sp>
+        <p:nvSpPr>
+          <p:cNvPr id="2" name="Title 1"/>
+          <p:cNvSpPr>
+            <a:spLocks noGrp="1"/>
+          </p:cNvSpPr>
+          <p:nvPr>
+            <p:ph type="title"/>
+          </p:nvPr>
+        </p:nvSpPr>
+        <p:spPr>
+          <a:xfrm>
+            <a:off x="139485" y="78119"/>
+            <a:ext cx="8229600" cy="607682"/>
+          </a:xfrm>
+        </p:spPr>
+        <p:txBody>
+          <a:bodyPr/>
+          <a:lstStyle/>
+          <a:p>
+            <a:pPr lvl="0" indent="0" marL="0">
+              <a:buNone/>
+            </a:pPr>
+            <a:r>
+              <a:rPr/>
+              <a:t>Boxplot Anatomy</a:t>
+            </a:r>
+          </a:p>
+        </p:txBody>
+      </p:sp>
+      <p:sp>
+        <p:nvSpPr>
+          <p:cNvPr id="3" name="Text Placeholder 2"/>
+          <p:cNvSpPr>
+            <a:spLocks noGrp="1"/>
+          </p:cNvSpPr>
+          <p:nvPr>
+            <p:ph idx="1" type="body"/>
+          </p:nvPr>
+        </p:nvSpPr>
+        <p:spPr/>
+        <p:txBody>
+          <a:bodyPr/>
+          <a:lstStyle/>
+          <a:p>
+            <a:pPr lvl="0" indent="0">
+              <a:buNone/>
+            </a:pPr>
+            <a:r>
+              <a:rPr>
+                <a:solidFill>
+                  <a:srgbClr val="003B4F"/>
+                </a:solidFill>
+                <a:latin typeface="Courier"/>
+              </a:rPr>
+              <a:t>pine_box_plot &lt;- </a:t>
+            </a:r>
+            <a:r>
+              <a:rPr>
+                <a:solidFill>
+                  <a:srgbClr val="4758AB"/>
+                </a:solidFill>
+                <a:latin typeface="Courier"/>
+              </a:rPr>
+              <a:t>ggplot</a:t>
+            </a:r>
+            <a:r>
+              <a:rPr>
+                <a:solidFill>
+                  <a:srgbClr val="003B4F"/>
+                </a:solidFill>
+                <a:latin typeface="Courier"/>
+              </a:rPr>
+              <a:t>(pine_df, </a:t>
+            </a:r>
+            <a:r>
+              <a:rPr>
+                <a:solidFill>
+                  <a:srgbClr val="4758AB"/>
+                </a:solidFill>
+                <a:latin typeface="Courier"/>
+              </a:rPr>
+              <a:t>aes</a:t>
+            </a:r>
+            <a:r>
+              <a:rPr>
+                <a:solidFill>
+                  <a:srgbClr val="003B4F"/>
+                </a:solidFill>
+                <a:latin typeface="Courier"/>
+              </a:rPr>
+              <a:t>(</a:t>
+            </a:r>
+            <a:r>
+              <a:rPr>
+                <a:solidFill>
+                  <a:srgbClr val="657422"/>
+                </a:solidFill>
+                <a:latin typeface="Courier"/>
+              </a:rPr>
+              <a:t>x =</a:t>
+            </a:r>
+            <a:r>
+              <a:rPr>
+                <a:solidFill>
+                  <a:srgbClr val="003B4F"/>
+                </a:solidFill>
+                <a:latin typeface="Courier"/>
+              </a:rPr>
+              <a:t> n_s, </a:t>
+            </a:r>
+            <a:r>
+              <a:rPr>
+                <a:solidFill>
+                  <a:srgbClr val="657422"/>
+                </a:solidFill>
+                <a:latin typeface="Courier"/>
+              </a:rPr>
+              <a:t>y =</a:t>
+            </a:r>
+            <a:r>
+              <a:rPr>
+                <a:solidFill>
+                  <a:srgbClr val="003B4F"/>
+                </a:solidFill>
+                <a:latin typeface="Courier"/>
+              </a:rPr>
+              <a:t> length_mm, </a:t>
+            </a:r>
+            <a:r>
+              <a:rPr>
+                <a:solidFill>
+                  <a:srgbClr val="657422"/>
+                </a:solidFill>
+                <a:latin typeface="Courier"/>
+              </a:rPr>
+              <a:t>fill =</a:t>
+            </a:r>
+            <a:r>
+              <a:rPr>
+                <a:solidFill>
+                  <a:srgbClr val="003B4F"/>
+                </a:solidFill>
+                <a:latin typeface="Courier"/>
+              </a:rPr>
+              <a:t> n_s)) </a:t>
+            </a:r>
+            <a:r>
+              <a:rPr>
+                <a:solidFill>
+                  <a:srgbClr val="5E5E5E"/>
+                </a:solidFill>
+                <a:latin typeface="Courier"/>
+              </a:rPr>
+              <a:t>+</a:t>
+            </a:r>
+            <a:br/>
+            <a:r>
+              <a:rPr>
+                <a:solidFill>
+                  <a:srgbClr val="003B4F"/>
+                </a:solidFill>
+                <a:latin typeface="Courier"/>
+              </a:rPr>
+              <a:t>  </a:t>
+            </a:r>
+            <a:r>
+              <a:rPr>
+                <a:solidFill>
+                  <a:srgbClr val="4758AB"/>
+                </a:solidFill>
+                <a:latin typeface="Courier"/>
+              </a:rPr>
+              <a:t>geom_boxplot</a:t>
+            </a:r>
+            <a:r>
+              <a:rPr>
+                <a:solidFill>
+                  <a:srgbClr val="003B4F"/>
+                </a:solidFill>
+                <a:latin typeface="Courier"/>
+              </a:rPr>
+              <a:t>(</a:t>
+            </a:r>
+            <a:r>
+              <a:rPr>
+                <a:solidFill>
+                  <a:srgbClr val="657422"/>
+                </a:solidFill>
+                <a:latin typeface="Courier"/>
+              </a:rPr>
+              <a:t>alpha =</a:t>
+            </a:r>
+            <a:r>
+              <a:rPr>
+                <a:solidFill>
+                  <a:srgbClr val="003B4F"/>
+                </a:solidFill>
+                <a:latin typeface="Courier"/>
+              </a:rPr>
+              <a:t> </a:t>
+            </a:r>
+            <a:r>
+              <a:rPr>
+                <a:solidFill>
+                  <a:srgbClr val="AD0000"/>
+                </a:solidFill>
+                <a:latin typeface="Courier"/>
+              </a:rPr>
+              <a:t>0.6</a:t>
+            </a:r>
+            <a:r>
+              <a:rPr>
+                <a:solidFill>
+                  <a:srgbClr val="003B4F"/>
+                </a:solidFill>
+                <a:latin typeface="Courier"/>
+              </a:rPr>
+              <a:t>, </a:t>
+            </a:r>
+            <a:r>
+              <a:rPr>
+                <a:solidFill>
+                  <a:srgbClr val="657422"/>
+                </a:solidFill>
+                <a:latin typeface="Courier"/>
+              </a:rPr>
+              <a:t>outlier.shape =</a:t>
+            </a:r>
+            <a:r>
+              <a:rPr>
+                <a:solidFill>
+                  <a:srgbClr val="003B4F"/>
+                </a:solidFill>
+                <a:latin typeface="Courier"/>
+              </a:rPr>
+              <a:t> </a:t>
+            </a:r>
+            <a:r>
+              <a:rPr>
+                <a:solidFill>
+                  <a:srgbClr val="8F5902"/>
+                </a:solidFill>
+                <a:latin typeface="Courier"/>
+              </a:rPr>
+              <a:t>NA</a:t>
+            </a:r>
+            <a:r>
+              <a:rPr>
+                <a:solidFill>
+                  <a:srgbClr val="003B4F"/>
+                </a:solidFill>
+                <a:latin typeface="Courier"/>
+              </a:rPr>
+              <a:t>) </a:t>
+            </a:r>
+            <a:r>
+              <a:rPr>
+                <a:solidFill>
+                  <a:srgbClr val="5E5E5E"/>
+                </a:solidFill>
+                <a:latin typeface="Courier"/>
+              </a:rPr>
+              <a:t>+</a:t>
+            </a:r>
+            <a:br/>
+            <a:r>
+              <a:rPr>
+                <a:solidFill>
+                  <a:srgbClr val="003B4F"/>
+                </a:solidFill>
+                <a:latin typeface="Courier"/>
+              </a:rPr>
+              <a:t>  </a:t>
+            </a:r>
+            <a:r>
+              <a:rPr>
+                <a:solidFill>
+                  <a:srgbClr val="4758AB"/>
+                </a:solidFill>
+                <a:latin typeface="Courier"/>
+              </a:rPr>
+              <a:t>labs</a:t>
+            </a:r>
+            <a:r>
+              <a:rPr>
+                <a:solidFill>
+                  <a:srgbClr val="003B4F"/>
+                </a:solidFill>
+                <a:latin typeface="Courier"/>
+              </a:rPr>
+              <a:t>(</a:t>
+            </a:r>
+            <a:br/>
+            <a:r>
+              <a:rPr>
+                <a:solidFill>
+                  <a:srgbClr val="003B4F"/>
+                </a:solidFill>
+                <a:latin typeface="Courier"/>
+              </a:rPr>
+              <a:t>    </a:t>
+            </a:r>
+            <a:r>
+              <a:rPr>
+                <a:solidFill>
+                  <a:srgbClr val="657422"/>
+                </a:solidFill>
+                <a:latin typeface="Courier"/>
+              </a:rPr>
+              <a:t>title =</a:t>
+            </a:r>
+            <a:r>
+              <a:rPr>
+                <a:solidFill>
+                  <a:srgbClr val="003B4F"/>
+                </a:solidFill>
+                <a:latin typeface="Courier"/>
+              </a:rPr>
+              <a:t> </a:t>
+            </a:r>
+            <a:r>
+              <a:rPr>
+                <a:solidFill>
+                  <a:srgbClr val="20794D"/>
+                </a:solidFill>
+                <a:latin typeface="Courier"/>
+              </a:rPr>
+              <a:t>"Needle Length by Side of Tree"</a:t>
+            </a:r>
+            <a:r>
+              <a:rPr>
+                <a:solidFill>
+                  <a:srgbClr val="003B4F"/>
+                </a:solidFill>
+                <a:latin typeface="Courier"/>
+              </a:rPr>
+              <a:t>,</a:t>
+            </a:r>
+            <a:br/>
+            <a:r>
+              <a:rPr>
+                <a:solidFill>
+                  <a:srgbClr val="003B4F"/>
+                </a:solidFill>
+                <a:latin typeface="Courier"/>
+              </a:rPr>
+              <a:t>    </a:t>
+            </a:r>
+            <a:r>
+              <a:rPr>
+                <a:solidFill>
+                  <a:srgbClr val="657422"/>
+                </a:solidFill>
+                <a:latin typeface="Courier"/>
+              </a:rPr>
+              <a:t>x =</a:t>
+            </a:r>
+            <a:r>
+              <a:rPr>
+                <a:solidFill>
+                  <a:srgbClr val="003B4F"/>
+                </a:solidFill>
+                <a:latin typeface="Courier"/>
+              </a:rPr>
+              <a:t> </a:t>
+            </a:r>
+            <a:r>
+              <a:rPr>
+                <a:solidFill>
+                  <a:srgbClr val="20794D"/>
+                </a:solidFill>
+                <a:latin typeface="Courier"/>
+              </a:rPr>
+              <a:t>"Side (n = lee, s = windward)"</a:t>
+            </a:r>
+            <a:r>
+              <a:rPr>
+                <a:solidFill>
+                  <a:srgbClr val="003B4F"/>
+                </a:solidFill>
+                <a:latin typeface="Courier"/>
+              </a:rPr>
+              <a:t>,</a:t>
+            </a:r>
+            <a:br/>
+            <a:r>
+              <a:rPr>
+                <a:solidFill>
+                  <a:srgbClr val="003B4F"/>
+                </a:solidFill>
+                <a:latin typeface="Courier"/>
+              </a:rPr>
+              <a:t>    </a:t>
+            </a:r>
+            <a:r>
+              <a:rPr>
+                <a:solidFill>
+                  <a:srgbClr val="657422"/>
+                </a:solidFill>
+                <a:latin typeface="Courier"/>
+              </a:rPr>
+              <a:t>y =</a:t>
+            </a:r>
+            <a:r>
+              <a:rPr>
+                <a:solidFill>
+                  <a:srgbClr val="003B4F"/>
+                </a:solidFill>
+                <a:latin typeface="Courier"/>
+              </a:rPr>
+              <a:t> </a:t>
+            </a:r>
+            <a:r>
+              <a:rPr>
+                <a:solidFill>
+                  <a:srgbClr val="20794D"/>
+                </a:solidFill>
+                <a:latin typeface="Courier"/>
+              </a:rPr>
+              <a:t>"Needle length (mm)"</a:t>
+            </a:r>
+            <a:r>
+              <a:rPr>
+                <a:solidFill>
+                  <a:srgbClr val="003B4F"/>
+                </a:solidFill>
+                <a:latin typeface="Courier"/>
+              </a:rPr>
+              <a:t>,</a:t>
+            </a:r>
+            <a:br/>
+            <a:r>
+              <a:rPr>
+                <a:solidFill>
+                  <a:srgbClr val="003B4F"/>
+                </a:solidFill>
+                <a:latin typeface="Courier"/>
+              </a:rPr>
+              <a:t>    </a:t>
+            </a:r>
+            <a:r>
+              <a:rPr>
+                <a:solidFill>
+                  <a:srgbClr val="657422"/>
+                </a:solidFill>
+                <a:latin typeface="Courier"/>
+              </a:rPr>
+              <a:t>fill =</a:t>
+            </a:r>
+            <a:r>
+              <a:rPr>
+                <a:solidFill>
+                  <a:srgbClr val="003B4F"/>
+                </a:solidFill>
+                <a:latin typeface="Courier"/>
+              </a:rPr>
+              <a:t> </a:t>
+            </a:r>
+            <a:r>
+              <a:rPr>
+                <a:solidFill>
+                  <a:srgbClr val="20794D"/>
+                </a:solidFill>
+                <a:latin typeface="Courier"/>
+              </a:rPr>
+              <a:t>"Side"</a:t>
+            </a:r>
+            <a:br/>
+            <a:r>
+              <a:rPr>
+                <a:solidFill>
+                  <a:srgbClr val="003B4F"/>
+                </a:solidFill>
+                <a:latin typeface="Courier"/>
+              </a:rPr>
+              <a:t>  ) </a:t>
+            </a:r>
+            <a:r>
+              <a:rPr>
+                <a:solidFill>
+                  <a:srgbClr val="5E5E5E"/>
+                </a:solidFill>
+                <a:latin typeface="Courier"/>
+              </a:rPr>
+              <a:t>+</a:t>
+            </a:r>
+            <a:br/>
+            <a:r>
+              <a:rPr>
+                <a:solidFill>
+                  <a:srgbClr val="003B4F"/>
+                </a:solidFill>
+                <a:latin typeface="Courier"/>
+              </a:rPr>
+              <a:t>  </a:t>
+            </a:r>
+            <a:r>
+              <a:rPr>
+                <a:solidFill>
+                  <a:srgbClr val="4758AB"/>
+                </a:solidFill>
+                <a:latin typeface="Courier"/>
+              </a:rPr>
+              <a:t>theme_minimal</a:t>
+            </a:r>
+            <a:r>
+              <a:rPr>
+                <a:solidFill>
+                  <a:srgbClr val="003B4F"/>
+                </a:solidFill>
+                <a:latin typeface="Courier"/>
+              </a:rPr>
+              <a:t>() </a:t>
+            </a:r>
+            <a:r>
+              <a:rPr>
+                <a:solidFill>
+                  <a:srgbClr val="5E5E5E"/>
+                </a:solidFill>
+                <a:latin typeface="Courier"/>
+              </a:rPr>
+              <a:t>+</a:t>
+            </a:r>
+            <a:br/>
+            <a:r>
+              <a:rPr>
+                <a:solidFill>
+                  <a:srgbClr val="003B4F"/>
+                </a:solidFill>
+                <a:latin typeface="Courier"/>
+              </a:rPr>
+              <a:t>  </a:t>
+            </a:r>
+            <a:r>
+              <a:rPr>
+                <a:solidFill>
+                  <a:srgbClr val="4758AB"/>
+                </a:solidFill>
+                <a:latin typeface="Courier"/>
+              </a:rPr>
+              <a:t>theme</a:t>
+            </a:r>
+            <a:r>
+              <a:rPr>
+                <a:solidFill>
+                  <a:srgbClr val="003B4F"/>
+                </a:solidFill>
+                <a:latin typeface="Courier"/>
+              </a:rPr>
+              <a:t>(</a:t>
+            </a:r>
+            <a:r>
+              <a:rPr>
+                <a:solidFill>
+                  <a:srgbClr val="657422"/>
+                </a:solidFill>
+                <a:latin typeface="Courier"/>
+              </a:rPr>
+              <a:t>legend.position =</a:t>
+            </a:r>
+            <a:r>
+              <a:rPr>
+                <a:solidFill>
+                  <a:srgbClr val="003B4F"/>
+                </a:solidFill>
+                <a:latin typeface="Courier"/>
+              </a:rPr>
+              <a:t> </a:t>
+            </a:r>
+            <a:r>
+              <a:rPr>
+                <a:solidFill>
+                  <a:srgbClr val="20794D"/>
+                </a:solidFill>
+                <a:latin typeface="Courier"/>
+              </a:rPr>
+              <a:t>"none"</a:t>
+            </a:r>
+            <a:r>
+              <a:rPr>
+                <a:solidFill>
+                  <a:srgbClr val="003B4F"/>
+                </a:solidFill>
+                <a:latin typeface="Courier"/>
+              </a:rPr>
+              <a:t>)</a:t>
+            </a:r>
+            <a:br/>
+            <a:br/>
+            <a:r>
+              <a:rPr>
+                <a:solidFill>
+                  <a:srgbClr val="003B4F"/>
+                </a:solidFill>
+                <a:latin typeface="Courier"/>
+              </a:rPr>
+              <a:t>pine_box_plot</a:t>
+            </a:r>
+          </a:p>
+        </p:txBody>
+      </p:sp>
+      <p:pic>
+        <p:nvPicPr>
+          <p:cNvPr descr="graphing_effectively_lecture_files/figure-pptx/unnamed-chunk-3-1.png" id="0" name="Picture 1"/>
+          <p:cNvPicPr>
+            <a:picLocks noGrp="1" noChangeAspect="1"/>
+          </p:cNvPicPr>
+          <p:nvPr/>
+        </p:nvPicPr>
+        <p:blipFill>
+          <a:blip r:embed="rId2"/>
+          <a:stretch>
+            <a:fillRect/>
+          </a:stretch>
+        </p:blipFill>
+        <p:spPr bwMode="auto">
+          <a:xfrm>
+            <a:off x="431800" y="1270000"/>
+            <a:ext cx="3810000" cy="3302000"/>
+          </a:xfrm>
+          <a:prstGeom prst="rect">
+            <a:avLst/>
+          </a:prstGeom>
+          <a:noFill/>
+          <a:ln w="9525">
+            <a:noFill/>
+            <a:headEnd/>
+            <a:tailEnd/>
+          </a:ln>
+        </p:spPr>
+      </p:pic>
+      <p:sp>
+        <p:nvSpPr>
+          <p:cNvPr id="5" name="Text Placeholder 4"/>
+          <p:cNvSpPr>
+            <a:spLocks noGrp="1"/>
+          </p:cNvSpPr>
+          <p:nvPr>
+            <p:ph idx="3" sz="quarter" type="body"/>
+          </p:nvPr>
+        </p:nvSpPr>
+        <p:spPr/>
+        <p:txBody>
+          <a:bodyPr/>
+          <a:lstStyle/>
+          <a:p>
+            <a:pPr lvl="0" indent="0" marL="0">
+              <a:buNone/>
+            </a:pPr>
+            <a:r>
+              <a:rPr b="1"/>
+              <a:t>Boxplot anatomy:</a:t>
+            </a:r>
+          </a:p>
+          <a:p>
+            <a:pPr lvl="0"/>
+            <a:r>
+              <a:rPr/>
+              <a:t>Middle line = </a:t>
+            </a:r>
+            <a:r>
+              <a:rPr b="1"/>
+              <a:t>median</a:t>
+            </a:r>
+          </a:p>
+          <a:p>
+            <a:pPr lvl="0"/>
+            <a:r>
+              <a:rPr/>
+              <a:t>Box edges = 25th and 75th percentile (</a:t>
+            </a:r>
+            <a:r>
+              <a:rPr b="1"/>
+              <a:t>IQR</a:t>
+            </a:r>
+            <a:r>
+              <a:rPr/>
+              <a:t>)</a:t>
+            </a:r>
+          </a:p>
+          <a:p>
+            <a:pPr lvl="0"/>
+            <a:r>
+              <a:rPr/>
+              <a:t>Whiskers = 1.5 × IQR</a:t>
+            </a:r>
+          </a:p>
+          <a:p>
+            <a:pPr lvl="0"/>
+            <a:r>
+              <a:rPr/>
+              <a:t>Dots beyond whiskers = </a:t>
+            </a:r>
+            <a:r>
+              <a:rPr b="1"/>
+              <a:t>outliers</a:t>
+            </a:r>
+          </a:p>
+          <a:p>
+            <a:pPr lvl="0" indent="0" marL="0">
+              <a:buNone/>
+            </a:pPr>
+            <a:r>
+              <a:rPr/>
+              <a:t>📖 R4DS §9 — Layers</a:t>
+            </a:r>
+          </a:p>
+        </p:txBody>
+      </p:sp>
+    </p:spTree>
+  </p:cSld>
+</p:sld>
+</file>
+
+<file path=ppt/slides/slide7.xml><?xml version="1.0" encoding="utf-8"?>
+<p:sld xmlns:a="http://schemas.openxmlformats.org/drawingml/2006/main" xmlns:r="http://schemas.openxmlformats.org/officeDocument/2006/relationships" xmlns:p="http://schemas.openxmlformats.org/presentationml/2006/main">
+  <p:cSld>
+    <p:spTree>
+      <p:nvGrpSpPr>
+        <p:cNvPr id="1" name=""/>
+        <p:cNvGrpSpPr/>
+        <p:nvPr/>
+      </p:nvGrpSpPr>
+      <p:grpSpPr>
+        <a:xfrm>
+          <a:off x="0" y="0"/>
+          <a:ext cx="0" cy="0"/>
+          <a:chOff x="0" y="0"/>
+          <a:chExt cx="0" cy="0"/>
+        </a:xfrm>
+      </p:grpSpPr>
+      <p:sp>
+        <p:nvSpPr>
+          <p:cNvPr id="2" name="Title 1"/>
+          <p:cNvSpPr>
+            <a:spLocks noGrp="1"/>
+          </p:cNvSpPr>
+          <p:nvPr>
+            <p:ph type="title"/>
+          </p:nvPr>
+        </p:nvSpPr>
+        <p:spPr>
+          <a:xfrm>
+            <a:off x="0" y="0"/>
+            <a:ext cx="9144000" cy="582780"/>
+          </a:xfrm>
+        </p:spPr>
+        <p:txBody>
+          <a:bodyPr/>
+          <a:lstStyle/>
+          <a:p>
+            <a:pPr lvl="0" indent="0" marL="0">
+              <a:buNone/>
+            </a:pPr>
+            <a:r>
+              <a:rPr/>
+              <a:t>Boxplot + Raw Points</a:t>
+            </a:r>
+          </a:p>
+        </p:txBody>
+      </p:sp>
+      <p:sp>
+        <p:nvSpPr>
+          <p:cNvPr id="3" name="Content Placeholder 2"/>
+          <p:cNvSpPr>
+            <a:spLocks noGrp="1"/>
+          </p:cNvSpPr>
+          <p:nvPr>
+            <p:ph idx="1"/>
+          </p:nvPr>
+        </p:nvSpPr>
+        <p:spPr/>
+        <p:txBody>
+          <a:bodyPr/>
+          <a:lstStyle/>
+          <a:p>
+            <a:pPr lvl="0" indent="0" marL="1270000">
+              <a:buNone/>
+            </a:pPr>
+            <a:r>
+              <a:rPr sz="2000" b="1"/>
+              <a:t>Note</a:t>
+            </a:r>
+          </a:p>
+          <a:p>
+            <a:pPr lvl="0" indent="0" marL="1270000">
+              <a:buNone/>
+            </a:pPr>
+            <a:r>
+              <a:rPr sz="2000" b="1"/>
+              <a:t>🔮 Predict first:</a:t>
+            </a:r>
+            <a:r>
+              <a:rPr sz="2000"/>
+              <a:t> With only 6 needles per side per tree, does a boxplot alone show you everything? What might it hide?</a:t>
+            </a:r>
+          </a:p>
+        </p:txBody>
+      </p:sp>
+    </p:spTree>
+  </p:cSld>
+</p:sld>
+</file>
+
+<file path=ppt/slides/slide8.xml><?xml version="1.0" encoding="utf-8"?>
+<p:sld xmlns:a="http://schemas.openxmlformats.org/drawingml/2006/main" xmlns:r="http://schemas.openxmlformats.org/officeDocument/2006/relationships" xmlns:p="http://schemas.openxmlformats.org/presentationml/2006/main">
+  <p:cSld>
+    <p:spTree>
+      <p:nvGrpSpPr>
+        <p:cNvPr id="1" name=""/>
+        <p:cNvGrpSpPr/>
+        <p:nvPr/>
+      </p:nvGrpSpPr>
+      <p:grpSpPr>
+        <a:xfrm>
+          <a:off x="0" y="0"/>
+          <a:ext cx="0" cy="0"/>
+          <a:chOff x="0" y="0"/>
+          <a:chExt cx="0" cy="0"/>
+        </a:xfrm>
+      </p:grpSpPr>
+      <p:sp>
+        <p:nvSpPr>
+          <p:cNvPr id="3" name="Text Placeholder 2"/>
+          <p:cNvSpPr>
+            <a:spLocks noGrp="1"/>
+          </p:cNvSpPr>
+          <p:nvPr>
+            <p:ph idx="1" type="body"/>
+          </p:nvPr>
+        </p:nvSpPr>
+        <p:spPr/>
+        <p:txBody>
+          <a:bodyPr/>
+          <a:lstStyle/>
+          <a:p>
+            <a:pPr lvl="0" indent="0">
+              <a:buNone/>
+            </a:pPr>
+            <a:r>
+              <a:rPr>
+                <a:solidFill>
+                  <a:srgbClr val="003B4F"/>
+                </a:solidFill>
+                <a:latin typeface="Courier"/>
+              </a:rPr>
+              <a:t>pine_jitter_plot &lt;- </a:t>
+            </a:r>
+            <a:r>
+              <a:rPr>
+                <a:solidFill>
+                  <a:srgbClr val="4758AB"/>
+                </a:solidFill>
+                <a:latin typeface="Courier"/>
+              </a:rPr>
+              <a:t>ggplot</a:t>
+            </a:r>
+            <a:r>
+              <a:rPr>
+                <a:solidFill>
+                  <a:srgbClr val="003B4F"/>
+                </a:solidFill>
+                <a:latin typeface="Courier"/>
+              </a:rPr>
+              <a:t>(pine_df, </a:t>
+            </a:r>
+            <a:r>
+              <a:rPr>
+                <a:solidFill>
+                  <a:srgbClr val="4758AB"/>
+                </a:solidFill>
+                <a:latin typeface="Courier"/>
+              </a:rPr>
+              <a:t>aes</a:t>
+            </a:r>
+            <a:r>
+              <a:rPr>
+                <a:solidFill>
+                  <a:srgbClr val="003B4F"/>
+                </a:solidFill>
+                <a:latin typeface="Courier"/>
+              </a:rPr>
+              <a:t>(</a:t>
+            </a:r>
+            <a:r>
+              <a:rPr>
+                <a:solidFill>
+                  <a:srgbClr val="657422"/>
+                </a:solidFill>
+                <a:latin typeface="Courier"/>
+              </a:rPr>
+              <a:t>x =</a:t>
+            </a:r>
+            <a:r>
+              <a:rPr>
+                <a:solidFill>
+                  <a:srgbClr val="003B4F"/>
+                </a:solidFill>
+                <a:latin typeface="Courier"/>
+              </a:rPr>
+              <a:t> n_s, </a:t>
+            </a:r>
+            <a:r>
+              <a:rPr>
+                <a:solidFill>
+                  <a:srgbClr val="657422"/>
+                </a:solidFill>
+                <a:latin typeface="Courier"/>
+              </a:rPr>
+              <a:t>y =</a:t>
+            </a:r>
+            <a:r>
+              <a:rPr>
+                <a:solidFill>
+                  <a:srgbClr val="003B4F"/>
+                </a:solidFill>
+                <a:latin typeface="Courier"/>
+              </a:rPr>
+              <a:t> length_mm, </a:t>
+            </a:r>
+            <a:r>
+              <a:rPr>
+                <a:solidFill>
+                  <a:srgbClr val="657422"/>
+                </a:solidFill>
+                <a:latin typeface="Courier"/>
+              </a:rPr>
+              <a:t>fill =</a:t>
+            </a:r>
+            <a:r>
+              <a:rPr>
+                <a:solidFill>
+                  <a:srgbClr val="003B4F"/>
+                </a:solidFill>
+                <a:latin typeface="Courier"/>
+              </a:rPr>
+              <a:t> n_s)) </a:t>
+            </a:r>
+            <a:r>
+              <a:rPr>
+                <a:solidFill>
+                  <a:srgbClr val="5E5E5E"/>
+                </a:solidFill>
+                <a:latin typeface="Courier"/>
+              </a:rPr>
+              <a:t>+</a:t>
+            </a:r>
+            <a:br/>
+            <a:r>
+              <a:rPr>
+                <a:solidFill>
+                  <a:srgbClr val="003B4F"/>
+                </a:solidFill>
+                <a:latin typeface="Courier"/>
+              </a:rPr>
+              <a:t>  </a:t>
+            </a:r>
+            <a:r>
+              <a:rPr>
+                <a:solidFill>
+                  <a:srgbClr val="4758AB"/>
+                </a:solidFill>
+                <a:latin typeface="Courier"/>
+              </a:rPr>
+              <a:t>geom_boxplot</a:t>
+            </a:r>
+            <a:r>
+              <a:rPr>
+                <a:solidFill>
+                  <a:srgbClr val="003B4F"/>
+                </a:solidFill>
+                <a:latin typeface="Courier"/>
+              </a:rPr>
+              <a:t>(</a:t>
+            </a:r>
+            <a:r>
+              <a:rPr>
+                <a:solidFill>
+                  <a:srgbClr val="657422"/>
+                </a:solidFill>
+                <a:latin typeface="Courier"/>
+              </a:rPr>
+              <a:t>alpha =</a:t>
+            </a:r>
+            <a:r>
+              <a:rPr>
+                <a:solidFill>
+                  <a:srgbClr val="003B4F"/>
+                </a:solidFill>
+                <a:latin typeface="Courier"/>
+              </a:rPr>
+              <a:t> </a:t>
+            </a:r>
+            <a:r>
+              <a:rPr>
+                <a:solidFill>
+                  <a:srgbClr val="AD0000"/>
+                </a:solidFill>
+                <a:latin typeface="Courier"/>
+              </a:rPr>
+              <a:t>0.5</a:t>
+            </a:r>
+            <a:r>
+              <a:rPr>
+                <a:solidFill>
+                  <a:srgbClr val="003B4F"/>
+                </a:solidFill>
+                <a:latin typeface="Courier"/>
+              </a:rPr>
+              <a:t>, </a:t>
+            </a:r>
+            <a:r>
+              <a:rPr>
+                <a:solidFill>
+                  <a:srgbClr val="657422"/>
+                </a:solidFill>
+                <a:latin typeface="Courier"/>
+              </a:rPr>
+              <a:t>outlier.shape =</a:t>
+            </a:r>
+            <a:r>
+              <a:rPr>
+                <a:solidFill>
+                  <a:srgbClr val="003B4F"/>
+                </a:solidFill>
+                <a:latin typeface="Courier"/>
+              </a:rPr>
+              <a:t> </a:t>
+            </a:r>
+            <a:r>
+              <a:rPr>
+                <a:solidFill>
+                  <a:srgbClr val="8F5902"/>
+                </a:solidFill>
+                <a:latin typeface="Courier"/>
+              </a:rPr>
+              <a:t>NA</a:t>
+            </a:r>
+            <a:r>
+              <a:rPr>
+                <a:solidFill>
+                  <a:srgbClr val="003B4F"/>
+                </a:solidFill>
+                <a:latin typeface="Courier"/>
+              </a:rPr>
+              <a:t>) </a:t>
+            </a:r>
+            <a:r>
+              <a:rPr>
+                <a:solidFill>
+                  <a:srgbClr val="5E5E5E"/>
+                </a:solidFill>
+                <a:latin typeface="Courier"/>
+              </a:rPr>
+              <a:t>+</a:t>
+            </a:r>
+            <a:br/>
+            <a:r>
+              <a:rPr>
+                <a:solidFill>
+                  <a:srgbClr val="003B4F"/>
+                </a:solidFill>
+                <a:latin typeface="Courier"/>
+              </a:rPr>
+              <a:t>  </a:t>
+            </a:r>
+            <a:r>
+              <a:rPr>
+                <a:solidFill>
+                  <a:srgbClr val="4758AB"/>
+                </a:solidFill>
+                <a:latin typeface="Courier"/>
+              </a:rPr>
+              <a:t>geom_point</a:t>
+            </a:r>
+            <a:r>
+              <a:rPr>
+                <a:solidFill>
+                  <a:srgbClr val="003B4F"/>
+                </a:solidFill>
+                <a:latin typeface="Courier"/>
+              </a:rPr>
+              <a:t>(</a:t>
+            </a:r>
+            <a:br/>
+            <a:r>
+              <a:rPr>
+                <a:solidFill>
+                  <a:srgbClr val="003B4F"/>
+                </a:solidFill>
+                <a:latin typeface="Courier"/>
+              </a:rPr>
+              <a:t>    </a:t>
+            </a:r>
+            <a:r>
+              <a:rPr>
+                <a:solidFill>
+                  <a:srgbClr val="657422"/>
+                </a:solidFill>
+                <a:latin typeface="Courier"/>
+              </a:rPr>
+              <a:t>position =</a:t>
+            </a:r>
+            <a:r>
+              <a:rPr>
+                <a:solidFill>
+                  <a:srgbClr val="003B4F"/>
+                </a:solidFill>
+                <a:latin typeface="Courier"/>
+              </a:rPr>
+              <a:t> </a:t>
+            </a:r>
+            <a:r>
+              <a:rPr>
+                <a:solidFill>
+                  <a:srgbClr val="4758AB"/>
+                </a:solidFill>
+                <a:latin typeface="Courier"/>
+              </a:rPr>
+              <a:t>position_jitter</a:t>
+            </a:r>
+            <a:r>
+              <a:rPr>
+                <a:solidFill>
+                  <a:srgbClr val="003B4F"/>
+                </a:solidFill>
+                <a:latin typeface="Courier"/>
+              </a:rPr>
+              <a:t>(</a:t>
+            </a:r>
+            <a:r>
+              <a:rPr>
+                <a:solidFill>
+                  <a:srgbClr val="657422"/>
+                </a:solidFill>
+                <a:latin typeface="Courier"/>
+              </a:rPr>
+              <a:t>width =</a:t>
+            </a:r>
+            <a:r>
+              <a:rPr>
+                <a:solidFill>
+                  <a:srgbClr val="003B4F"/>
+                </a:solidFill>
+                <a:latin typeface="Courier"/>
+              </a:rPr>
+              <a:t> </a:t>
+            </a:r>
+            <a:r>
+              <a:rPr>
+                <a:solidFill>
+                  <a:srgbClr val="AD0000"/>
+                </a:solidFill>
+                <a:latin typeface="Courier"/>
+              </a:rPr>
+              <a:t>0.15</a:t>
+            </a:r>
+            <a:r>
+              <a:rPr>
+                <a:solidFill>
+                  <a:srgbClr val="003B4F"/>
+                </a:solidFill>
+                <a:latin typeface="Courier"/>
+              </a:rPr>
+              <a:t>, </a:t>
+            </a:r>
+            <a:r>
+              <a:rPr>
+                <a:solidFill>
+                  <a:srgbClr val="657422"/>
+                </a:solidFill>
+                <a:latin typeface="Courier"/>
+              </a:rPr>
+              <a:t>seed =</a:t>
+            </a:r>
+            <a:r>
+              <a:rPr>
+                <a:solidFill>
+                  <a:srgbClr val="003B4F"/>
+                </a:solidFill>
+                <a:latin typeface="Courier"/>
+              </a:rPr>
+              <a:t> </a:t>
+            </a:r>
+            <a:r>
+              <a:rPr>
+                <a:solidFill>
+                  <a:srgbClr val="AD0000"/>
+                </a:solidFill>
+                <a:latin typeface="Courier"/>
+              </a:rPr>
+              <a:t>42</a:t>
+            </a:r>
+            <a:r>
+              <a:rPr>
+                <a:solidFill>
+                  <a:srgbClr val="003B4F"/>
+                </a:solidFill>
+                <a:latin typeface="Courier"/>
+              </a:rPr>
+              <a:t>),</a:t>
+            </a:r>
+            <a:br/>
+            <a:r>
+              <a:rPr>
+                <a:solidFill>
+                  <a:srgbClr val="003B4F"/>
+                </a:solidFill>
+                <a:latin typeface="Courier"/>
+              </a:rPr>
+              <a:t>    </a:t>
+            </a:r>
+            <a:r>
+              <a:rPr>
+                <a:solidFill>
+                  <a:srgbClr val="657422"/>
+                </a:solidFill>
+                <a:latin typeface="Courier"/>
+              </a:rPr>
+              <a:t>alpha =</a:t>
+            </a:r>
+            <a:r>
+              <a:rPr>
+                <a:solidFill>
+                  <a:srgbClr val="003B4F"/>
+                </a:solidFill>
+                <a:latin typeface="Courier"/>
+              </a:rPr>
+              <a:t> </a:t>
+            </a:r>
+            <a:r>
+              <a:rPr>
+                <a:solidFill>
+                  <a:srgbClr val="AD0000"/>
+                </a:solidFill>
+                <a:latin typeface="Courier"/>
+              </a:rPr>
+              <a:t>0.6</a:t>
+            </a:r>
+            <a:r>
+              <a:rPr>
+                <a:solidFill>
+                  <a:srgbClr val="003B4F"/>
+                </a:solidFill>
+                <a:latin typeface="Courier"/>
+              </a:rPr>
+              <a:t>,</a:t>
+            </a:r>
+            <a:br/>
+            <a:r>
+              <a:rPr>
+                <a:solidFill>
+                  <a:srgbClr val="003B4F"/>
+                </a:solidFill>
+                <a:latin typeface="Courier"/>
+              </a:rPr>
+              <a:t>    </a:t>
+            </a:r>
+            <a:r>
+              <a:rPr>
+                <a:solidFill>
+                  <a:srgbClr val="657422"/>
+                </a:solidFill>
+                <a:latin typeface="Courier"/>
+              </a:rPr>
+              <a:t>size =</a:t>
+            </a:r>
+            <a:r>
+              <a:rPr>
+                <a:solidFill>
+                  <a:srgbClr val="003B4F"/>
+                </a:solidFill>
+                <a:latin typeface="Courier"/>
+              </a:rPr>
+              <a:t> </a:t>
+            </a:r>
+            <a:r>
+              <a:rPr>
+                <a:solidFill>
+                  <a:srgbClr val="AD0000"/>
+                </a:solidFill>
+                <a:latin typeface="Courier"/>
+              </a:rPr>
+              <a:t>2</a:t>
+            </a:r>
+            <a:br/>
+            <a:r>
+              <a:rPr>
+                <a:solidFill>
+                  <a:srgbClr val="003B4F"/>
+                </a:solidFill>
+                <a:latin typeface="Courier"/>
+              </a:rPr>
+              <a:t>  ) </a:t>
+            </a:r>
+            <a:r>
+              <a:rPr>
+                <a:solidFill>
+                  <a:srgbClr val="5E5E5E"/>
+                </a:solidFill>
+                <a:latin typeface="Courier"/>
+              </a:rPr>
+              <a:t>+</a:t>
+            </a:r>
+            <a:br/>
+            <a:r>
+              <a:rPr>
+                <a:solidFill>
+                  <a:srgbClr val="003B4F"/>
+                </a:solidFill>
+                <a:latin typeface="Courier"/>
+              </a:rPr>
+              <a:t>  </a:t>
+            </a:r>
+            <a:r>
+              <a:rPr>
+                <a:solidFill>
+                  <a:srgbClr val="4758AB"/>
+                </a:solidFill>
+                <a:latin typeface="Courier"/>
+              </a:rPr>
+              <a:t>labs</a:t>
+            </a:r>
+            <a:r>
+              <a:rPr>
+                <a:solidFill>
+                  <a:srgbClr val="003B4F"/>
+                </a:solidFill>
+                <a:latin typeface="Courier"/>
+              </a:rPr>
+              <a:t>(</a:t>
+            </a:r>
+            <a:br/>
+            <a:r>
+              <a:rPr>
+                <a:solidFill>
+                  <a:srgbClr val="003B4F"/>
+                </a:solidFill>
+                <a:latin typeface="Courier"/>
+              </a:rPr>
+              <a:t>    </a:t>
+            </a:r>
+            <a:r>
+              <a:rPr>
+                <a:solidFill>
+                  <a:srgbClr val="657422"/>
+                </a:solidFill>
+                <a:latin typeface="Courier"/>
+              </a:rPr>
+              <a:t>title =</a:t>
+            </a:r>
+            <a:r>
+              <a:rPr>
+                <a:solidFill>
+                  <a:srgbClr val="003B4F"/>
+                </a:solidFill>
+                <a:latin typeface="Courier"/>
+              </a:rPr>
+              <a:t> </a:t>
+            </a:r>
+            <a:r>
+              <a:rPr>
+                <a:solidFill>
+                  <a:srgbClr val="20794D"/>
+                </a:solidFill>
+                <a:latin typeface="Courier"/>
+              </a:rPr>
+              <a:t>"Needle Length by Side of Tree"</a:t>
+            </a:r>
+            <a:r>
+              <a:rPr>
+                <a:solidFill>
+                  <a:srgbClr val="003B4F"/>
+                </a:solidFill>
+                <a:latin typeface="Courier"/>
+              </a:rPr>
+              <a:t>,</a:t>
+            </a:r>
+            <a:br/>
+            <a:r>
+              <a:rPr>
+                <a:solidFill>
+                  <a:srgbClr val="003B4F"/>
+                </a:solidFill>
+                <a:latin typeface="Courier"/>
+              </a:rPr>
+              <a:t>    </a:t>
+            </a:r>
+            <a:r>
+              <a:rPr>
+                <a:solidFill>
+                  <a:srgbClr val="657422"/>
+                </a:solidFill>
+                <a:latin typeface="Courier"/>
+              </a:rPr>
+              <a:t>x =</a:t>
+            </a:r>
+            <a:r>
+              <a:rPr>
+                <a:solidFill>
+                  <a:srgbClr val="003B4F"/>
+                </a:solidFill>
+                <a:latin typeface="Courier"/>
+              </a:rPr>
+              <a:t> </a:t>
+            </a:r>
+            <a:r>
+              <a:rPr>
+                <a:solidFill>
+                  <a:srgbClr val="20794D"/>
+                </a:solidFill>
+                <a:latin typeface="Courier"/>
+              </a:rPr>
+              <a:t>"Side of tree"</a:t>
+            </a:r>
+            <a:r>
+              <a:rPr>
+                <a:solidFill>
+                  <a:srgbClr val="003B4F"/>
+                </a:solidFill>
+                <a:latin typeface="Courier"/>
+              </a:rPr>
+              <a:t>,</a:t>
+            </a:r>
+            <a:br/>
+            <a:r>
+              <a:rPr>
+                <a:solidFill>
+                  <a:srgbClr val="003B4F"/>
+                </a:solidFill>
+                <a:latin typeface="Courier"/>
+              </a:rPr>
+              <a:t>    </a:t>
+            </a:r>
+            <a:r>
+              <a:rPr>
+                <a:solidFill>
+                  <a:srgbClr val="657422"/>
+                </a:solidFill>
+                <a:latin typeface="Courier"/>
+              </a:rPr>
+              <a:t>y =</a:t>
+            </a:r>
+            <a:r>
+              <a:rPr>
+                <a:solidFill>
+                  <a:srgbClr val="003B4F"/>
+                </a:solidFill>
+                <a:latin typeface="Courier"/>
+              </a:rPr>
+              <a:t> </a:t>
+            </a:r>
+            <a:r>
+              <a:rPr>
+                <a:solidFill>
+                  <a:srgbClr val="20794D"/>
+                </a:solidFill>
+                <a:latin typeface="Courier"/>
+              </a:rPr>
+              <a:t>"Needle length (mm)"</a:t>
+            </a:r>
+            <a:r>
+              <a:rPr>
+                <a:solidFill>
+                  <a:srgbClr val="003B4F"/>
+                </a:solidFill>
+                <a:latin typeface="Courier"/>
+              </a:rPr>
+              <a:t>,</a:t>
+            </a:r>
+            <a:br/>
+            <a:r>
+              <a:rPr>
+                <a:solidFill>
+                  <a:srgbClr val="003B4F"/>
+                </a:solidFill>
+                <a:latin typeface="Courier"/>
+              </a:rPr>
+              <a:t>    </a:t>
+            </a:r>
+            <a:r>
+              <a:rPr>
+                <a:solidFill>
+                  <a:srgbClr val="657422"/>
+                </a:solidFill>
+                <a:latin typeface="Courier"/>
+              </a:rPr>
+              <a:t>fill =</a:t>
+            </a:r>
+            <a:r>
+              <a:rPr>
+                <a:solidFill>
+                  <a:srgbClr val="003B4F"/>
+                </a:solidFill>
+                <a:latin typeface="Courier"/>
+              </a:rPr>
+              <a:t> </a:t>
+            </a:r>
+            <a:r>
+              <a:rPr>
+                <a:solidFill>
+                  <a:srgbClr val="20794D"/>
+                </a:solidFill>
+                <a:latin typeface="Courier"/>
+              </a:rPr>
+              <a:t>"Side"</a:t>
+            </a:r>
+            <a:br/>
+            <a:r>
+              <a:rPr>
+                <a:solidFill>
+                  <a:srgbClr val="003B4F"/>
+                </a:solidFill>
+                <a:latin typeface="Courier"/>
+              </a:rPr>
+              <a:t>  ) </a:t>
+            </a:r>
+            <a:r>
+              <a:rPr>
+                <a:solidFill>
+                  <a:srgbClr val="5E5E5E"/>
+                </a:solidFill>
+                <a:latin typeface="Courier"/>
+              </a:rPr>
+              <a:t>+</a:t>
+            </a:r>
+            <a:br/>
+            <a:r>
+              <a:rPr>
+                <a:solidFill>
+                  <a:srgbClr val="003B4F"/>
+                </a:solidFill>
+                <a:latin typeface="Courier"/>
+              </a:rPr>
+              <a:t>  </a:t>
+            </a:r>
+            <a:r>
+              <a:rPr>
+                <a:solidFill>
+                  <a:srgbClr val="4758AB"/>
+                </a:solidFill>
+                <a:latin typeface="Courier"/>
+              </a:rPr>
+              <a:t>theme_minimal</a:t>
+            </a:r>
+            <a:r>
+              <a:rPr>
+                <a:solidFill>
+                  <a:srgbClr val="003B4F"/>
+                </a:solidFill>
+                <a:latin typeface="Courier"/>
+              </a:rPr>
+              <a:t>() </a:t>
+            </a:r>
+            <a:r>
+              <a:rPr>
+                <a:solidFill>
+                  <a:srgbClr val="5E5E5E"/>
+                </a:solidFill>
+                <a:latin typeface="Courier"/>
+              </a:rPr>
+              <a:t>+</a:t>
+            </a:r>
+            <a:br/>
+            <a:r>
+              <a:rPr>
+                <a:solidFill>
+                  <a:srgbClr val="003B4F"/>
+                </a:solidFill>
+                <a:latin typeface="Courier"/>
+              </a:rPr>
+              <a:t>  </a:t>
+            </a:r>
+            <a:r>
+              <a:rPr>
+                <a:solidFill>
+                  <a:srgbClr val="4758AB"/>
+                </a:solidFill>
+                <a:latin typeface="Courier"/>
+              </a:rPr>
+              <a:t>theme</a:t>
+            </a:r>
+            <a:r>
+              <a:rPr>
+                <a:solidFill>
+                  <a:srgbClr val="003B4F"/>
+                </a:solidFill>
+                <a:latin typeface="Courier"/>
+              </a:rPr>
+              <a:t>(</a:t>
+            </a:r>
+            <a:r>
+              <a:rPr>
+                <a:solidFill>
+                  <a:srgbClr val="657422"/>
+                </a:solidFill>
+                <a:latin typeface="Courier"/>
+              </a:rPr>
+              <a:t>legend.position =</a:t>
+            </a:r>
+            <a:r>
+              <a:rPr>
+                <a:solidFill>
+                  <a:srgbClr val="003B4F"/>
+                </a:solidFill>
+                <a:latin typeface="Courier"/>
+              </a:rPr>
+              <a:t> </a:t>
+            </a:r>
+            <a:r>
+              <a:rPr>
+                <a:solidFill>
+                  <a:srgbClr val="20794D"/>
+                </a:solidFill>
+                <a:latin typeface="Courier"/>
+              </a:rPr>
+              <a:t>"none"</a:t>
+            </a:r>
+            <a:r>
+              <a:rPr>
+                <a:solidFill>
+                  <a:srgbClr val="003B4F"/>
+                </a:solidFill>
+                <a:latin typeface="Courier"/>
+              </a:rPr>
+              <a:t>)</a:t>
+            </a:r>
+            <a:br/>
+            <a:br/>
+            <a:r>
+              <a:rPr>
+                <a:solidFill>
+                  <a:srgbClr val="003B4F"/>
+                </a:solidFill>
+                <a:latin typeface="Courier"/>
+              </a:rPr>
+              <a:t>pine_jitter_plot</a:t>
+            </a:r>
+          </a:p>
+        </p:txBody>
+      </p:sp>
+      <p:pic>
+        <p:nvPicPr>
+          <p:cNvPr descr="graphing_effectively_lecture_files/figure-pptx/unnamed-chunk-4-1.png" id="0" name="Picture 1"/>
+          <p:cNvPicPr>
+            <a:picLocks noGrp="1" noChangeAspect="1"/>
+          </p:cNvPicPr>
+          <p:nvPr/>
+        </p:nvPicPr>
+        <p:blipFill>
+          <a:blip r:embed="rId2"/>
+          <a:stretch>
+            <a:fillRect/>
+          </a:stretch>
+        </p:blipFill>
+        <p:spPr bwMode="auto">
+          <a:xfrm>
+            <a:off x="431800" y="1270000"/>
+            <a:ext cx="3810000" cy="3302000"/>
+          </a:xfrm>
+          <a:prstGeom prst="rect">
+            <a:avLst/>
+          </a:prstGeom>
+          <a:noFill/>
+          <a:ln w="9525">
+            <a:noFill/>
+            <a:headEnd/>
+            <a:tailEnd/>
+          </a:ln>
+        </p:spPr>
+      </p:pic>
+      <p:sp>
+        <p:nvSpPr>
+          <p:cNvPr id="5" name="Text Placeholder 4"/>
+          <p:cNvSpPr>
+            <a:spLocks noGrp="1"/>
+          </p:cNvSpPr>
+          <p:nvPr>
+            <p:ph idx="3" sz="quarter" type="body"/>
+          </p:nvPr>
+        </p:nvSpPr>
+        <p:spPr/>
+        <p:txBody>
+          <a:bodyPr/>
+          <a:lstStyle/>
+          <a:p>
+            <a:pPr lvl="0"/>
+            <a:r>
+              <a:rPr>
+                <a:latin typeface="Courier"/>
+              </a:rPr>
+              <a:t>position_jitter(width = 0.15)</a:t>
+            </a:r>
+            <a:r>
+              <a:rPr/>
+              <a:t> spreads points sideways so they don’t overlap</a:t>
+            </a:r>
+          </a:p>
+          <a:p>
+            <a:pPr lvl="0"/>
+            <a:r>
+              <a:rPr>
+                <a:latin typeface="Courier"/>
+              </a:rPr>
+              <a:t>seed = 42</a:t>
+            </a:r>
+            <a:r>
+              <a:rPr/>
+              <a:t> — same jitter layout every time you render</a:t>
+            </a:r>
+          </a:p>
+          <a:p>
+            <a:pPr lvl="0"/>
+            <a:r>
+              <a:rPr>
+                <a:latin typeface="Courier"/>
+              </a:rPr>
+              <a:t>alpha = 0.6</a:t>
+            </a:r>
+            <a:r>
+              <a:rPr/>
+              <a:t> — semi-transparent, so overlapping points are still visible</a:t>
+            </a:r>
+          </a:p>
+          <a:p>
+            <a:pPr lvl="0" indent="0" marL="1270000">
+              <a:buNone/>
+            </a:pPr>
+            <a:r>
+              <a:rPr sz="2000" b="1"/>
+              <a:t>Tip</a:t>
+            </a:r>
+          </a:p>
+          <a:p>
+            <a:pPr lvl="0" indent="0" marL="1270000">
+              <a:buNone/>
+            </a:pPr>
+            <a:r>
+              <a:rPr sz="2000"/>
+              <a:t>Always show the raw points alongside a boxplot when </a:t>
+            </a:r>
+            <a:r>
+              <a:rPr sz="2000" i="1"/>
+              <a:t>n</a:t>
+            </a:r>
+            <a:r>
+              <a:rPr sz="2000"/>
+              <a:t> is small — every point matters, and a box alone can hide a bimodal or lopsided pattern.</a:t>
+            </a:r>
+          </a:p>
+        </p:txBody>
+      </p:sp>
+    </p:spTree>
+  </p:cSld>
+</p:sld>
+</file>
+
+<file path=ppt/slides/slide9.xml><?xml version="1.0" encoding="utf-8"?>
+<p:sld xmlns:a="http://schemas.openxmlformats.org/drawingml/2006/main" xmlns:r="http://schemas.openxmlformats.org/officeDocument/2006/relationships" xmlns:p="http://schemas.openxmlformats.org/presentationml/2006/main">
+  <p:cSld>
+    <p:spTree>
+      <p:nvGrpSpPr>
+        <p:cNvPr id="1" name=""/>
+        <p:cNvGrpSpPr/>
+        <p:nvPr/>
+      </p:nvGrpSpPr>
+      <p:grpSpPr>
+        <a:xfrm>
+          <a:off x="0" y="0"/>
+          <a:ext cx="0" cy="0"/>
+          <a:chOff x="0" y="0"/>
+          <a:chExt cx="0" cy="0"/>
+        </a:xfrm>
+      </p:grpSpPr>
+      <p:sp>
+        <p:nvSpPr>
+          <p:cNvPr id="2" name="Title 1"/>
+          <p:cNvSpPr>
+            <a:spLocks noGrp="1"/>
+          </p:cNvSpPr>
+          <p:nvPr>
+            <p:ph type="title"/>
+          </p:nvPr>
+        </p:nvSpPr>
+        <p:spPr>
+          <a:xfrm>
+            <a:off x="0" y="0"/>
+            <a:ext cx="9144000" cy="582780"/>
+          </a:xfrm>
+        </p:spPr>
+        <p:txBody>
+          <a:bodyPr/>
+          <a:lstStyle/>
+          <a:p>
+            <a:pPr lvl="0" indent="0" marL="0">
+              <a:buNone/>
+            </a:pPr>
+            <a:r>
+              <a:rPr/>
+              <a:t>Part 3 · Mapping Color by Group</a:t>
             </a:r>
           </a:p>
         </p:txBody>

--- a/docs/content/graphing_effectively/graphing_effectively_lecture.pptx
+++ b/docs/content/graphing_effectively/graphing_effectively_lecture.pptx
@@ -3326,7 +3326,7 @@
             </a:pPr>
             <a:r>
               <a:rPr/>
-              <a:t>Graphing Effectively</a:t>
+              <a:t>Lecture: Graphing Effectively</a:t>
             </a:r>
           </a:p>
         </p:txBody>
@@ -3681,7 +3681,43 @@
                 </a:solidFill>
                 <a:latin typeface="Courier"/>
               </a:rPr>
-              <a:t>() </a:t>
+              <a:t>(</a:t>
+            </a:r>
+            <a:r>
+              <a:rPr>
+                <a:solidFill>
+                  <a:srgbClr val="657422"/>
+                </a:solidFill>
+                <a:latin typeface="Courier"/>
+              </a:rPr>
+              <a:t>base_size =</a:t>
+            </a:r>
+            <a:r>
+              <a:rPr>
+                <a:solidFill>
+                  <a:srgbClr val="003B4F"/>
+                </a:solidFill>
+                <a:latin typeface="Courier"/>
+              </a:rPr>
+              <a:t> </a:t>
+            </a:r>
+            <a:r>
+              <a:rPr>
+                <a:solidFill>
+                  <a:srgbClr val="AD0000"/>
+                </a:solidFill>
+                <a:latin typeface="Courier"/>
+              </a:rPr>
+              <a:t>9</a:t>
+            </a:r>
+            <a:r>
+              <a:rPr>
+                <a:solidFill>
+                  <a:srgbClr val="003B4F"/>
+                </a:solidFill>
+                <a:latin typeface="Courier"/>
+              </a:rPr>
+              <a:t>) </a:t>
             </a:r>
             <a:r>
               <a:rPr>
@@ -4536,7 +4572,43 @@
                 </a:solidFill>
                 <a:latin typeface="Courier"/>
               </a:rPr>
-              <a:t>() </a:t>
+              <a:t>(</a:t>
+            </a:r>
+            <a:r>
+              <a:rPr>
+                <a:solidFill>
+                  <a:srgbClr val="657422"/>
+                </a:solidFill>
+                <a:latin typeface="Courier"/>
+              </a:rPr>
+              <a:t>base_size =</a:t>
+            </a:r>
+            <a:r>
+              <a:rPr>
+                <a:solidFill>
+                  <a:srgbClr val="003B4F"/>
+                </a:solidFill>
+                <a:latin typeface="Courier"/>
+              </a:rPr>
+              <a:t> </a:t>
+            </a:r>
+            <a:r>
+              <a:rPr>
+                <a:solidFill>
+                  <a:srgbClr val="AD0000"/>
+                </a:solidFill>
+                <a:latin typeface="Courier"/>
+              </a:rPr>
+              <a:t>9</a:t>
+            </a:r>
+            <a:r>
+              <a:rPr>
+                <a:solidFill>
+                  <a:srgbClr val="003B4F"/>
+                </a:solidFill>
+                <a:latin typeface="Courier"/>
+              </a:rPr>
+              <a:t>) </a:t>
             </a:r>
             <a:r>
               <a:rPr>
@@ -6237,7 +6309,43 @@
                 </a:solidFill>
                 <a:latin typeface="Courier"/>
               </a:rPr>
-              <a:t>()</a:t>
+              <a:t>(</a:t>
+            </a:r>
+            <a:r>
+              <a:rPr>
+                <a:solidFill>
+                  <a:srgbClr val="657422"/>
+                </a:solidFill>
+                <a:latin typeface="Courier"/>
+              </a:rPr>
+              <a:t>base_size =</a:t>
+            </a:r>
+            <a:r>
+              <a:rPr>
+                <a:solidFill>
+                  <a:srgbClr val="003B4F"/>
+                </a:solidFill>
+                <a:latin typeface="Courier"/>
+              </a:rPr>
+              <a:t> </a:t>
+            </a:r>
+            <a:r>
+              <a:rPr>
+                <a:solidFill>
+                  <a:srgbClr val="AD0000"/>
+                </a:solidFill>
+                <a:latin typeface="Courier"/>
+              </a:rPr>
+              <a:t>9</a:t>
+            </a:r>
+            <a:r>
+              <a:rPr>
+                <a:solidFill>
+                  <a:srgbClr val="003B4F"/>
+                </a:solidFill>
+                <a:latin typeface="Courier"/>
+              </a:rPr>
+              <a:t>)</a:t>
             </a:r>
             <a:br/>
             <a:br/>
@@ -6576,7 +6684,7 @@
             </a:r>
             <a:r>
               <a:rPr sz="2000"/>
-              <a:t> Module 3 found </a:t>
+              <a:t> We found </a:t>
             </a:r>
             <a:r>
               <a:rPr sz="2000">
@@ -6586,7 +6694,7 @@
             </a:r>
             <a:r>
               <a:rPr sz="2000"/>
-              <a:t> ≈ 17.7 and a fairly small gap from the median. What shape do you expect the full distribution to have — symmetric, or skewed?</a:t>
+              <a:t> ≈ 17.7 in Describing Your Data, with a fairly small gap from the median. What shape do you expect the full distribution to have — symmetric, or skewed?</a:t>
             </a:r>
           </a:p>
         </p:txBody>
@@ -7041,7 +7149,43 @@
                 </a:solidFill>
                 <a:latin typeface="Courier"/>
               </a:rPr>
-              <a:t>()</a:t>
+              <a:t>(</a:t>
+            </a:r>
+            <a:r>
+              <a:rPr>
+                <a:solidFill>
+                  <a:srgbClr val="657422"/>
+                </a:solidFill>
+                <a:latin typeface="Courier"/>
+              </a:rPr>
+              <a:t>base_size =</a:t>
+            </a:r>
+            <a:r>
+              <a:rPr>
+                <a:solidFill>
+                  <a:srgbClr val="003B4F"/>
+                </a:solidFill>
+                <a:latin typeface="Courier"/>
+              </a:rPr>
+              <a:t> </a:t>
+            </a:r>
+            <a:r>
+              <a:rPr>
+                <a:solidFill>
+                  <a:srgbClr val="AD0000"/>
+                </a:solidFill>
+                <a:latin typeface="Courier"/>
+              </a:rPr>
+              <a:t>9</a:t>
+            </a:r>
+            <a:r>
+              <a:rPr>
+                <a:solidFill>
+                  <a:srgbClr val="003B4F"/>
+                </a:solidFill>
+                <a:latin typeface="Courier"/>
+              </a:rPr>
+              <a:t>)</a:t>
             </a:r>
           </a:p>
         </p:txBody>
@@ -7755,7 +7899,43 @@
                 </a:solidFill>
                 <a:latin typeface="Courier"/>
               </a:rPr>
-              <a:t>() </a:t>
+              <a:t>(</a:t>
+            </a:r>
+            <a:r>
+              <a:rPr>
+                <a:solidFill>
+                  <a:srgbClr val="657422"/>
+                </a:solidFill>
+                <a:latin typeface="Courier"/>
+              </a:rPr>
+              <a:t>base_size =</a:t>
+            </a:r>
+            <a:r>
+              <a:rPr>
+                <a:solidFill>
+                  <a:srgbClr val="003B4F"/>
+                </a:solidFill>
+                <a:latin typeface="Courier"/>
+              </a:rPr>
+              <a:t> </a:t>
+            </a:r>
+            <a:r>
+              <a:rPr>
+                <a:solidFill>
+                  <a:srgbClr val="AD0000"/>
+                </a:solidFill>
+                <a:latin typeface="Courier"/>
+              </a:rPr>
+              <a:t>8</a:t>
+            </a:r>
+            <a:r>
+              <a:rPr>
+                <a:solidFill>
+                  <a:srgbClr val="003B4F"/>
+                </a:solidFill>
+                <a:latin typeface="Courier"/>
+              </a:rPr>
+              <a:t>) </a:t>
             </a:r>
             <a:r>
               <a:rPr>
@@ -8378,7 +8558,43 @@
                 </a:solidFill>
                 <a:latin typeface="Courier"/>
               </a:rPr>
-              <a:t>()</a:t>
+              <a:t>(</a:t>
+            </a:r>
+            <a:r>
+              <a:rPr>
+                <a:solidFill>
+                  <a:srgbClr val="657422"/>
+                </a:solidFill>
+                <a:latin typeface="Courier"/>
+              </a:rPr>
+              <a:t>base_size =</a:t>
+            </a:r>
+            <a:r>
+              <a:rPr>
+                <a:solidFill>
+                  <a:srgbClr val="003B4F"/>
+                </a:solidFill>
+                <a:latin typeface="Courier"/>
+              </a:rPr>
+              <a:t> </a:t>
+            </a:r>
+            <a:r>
+              <a:rPr>
+                <a:solidFill>
+                  <a:srgbClr val="AD0000"/>
+                </a:solidFill>
+                <a:latin typeface="Courier"/>
+              </a:rPr>
+              <a:t>9</a:t>
+            </a:r>
+            <a:r>
+              <a:rPr>
+                <a:solidFill>
+                  <a:srgbClr val="003B4F"/>
+                </a:solidFill>
+                <a:latin typeface="Courier"/>
+              </a:rPr>
+              <a:t>)</a:t>
             </a:r>
           </a:p>
         </p:txBody>
@@ -8608,7 +8824,7 @@
             </a:pPr>
             <a:r>
               <a:rPr sz="2000" b="1"/>
-              <a:t>✅ Key idea from Module 3</a:t>
+              <a:t>✅ Key idea from Describing Your Data</a:t>
             </a:r>
           </a:p>
           <a:p>
@@ -9778,7 +9994,43 @@
                 </a:solidFill>
                 <a:latin typeface="Courier"/>
               </a:rPr>
-              <a:t>() </a:t>
+              <a:t>(</a:t>
+            </a:r>
+            <a:r>
+              <a:rPr>
+                <a:solidFill>
+                  <a:srgbClr val="657422"/>
+                </a:solidFill>
+                <a:latin typeface="Courier"/>
+              </a:rPr>
+              <a:t>base_size =</a:t>
+            </a:r>
+            <a:r>
+              <a:rPr>
+                <a:solidFill>
+                  <a:srgbClr val="003B4F"/>
+                </a:solidFill>
+                <a:latin typeface="Courier"/>
+              </a:rPr>
+              <a:t> </a:t>
+            </a:r>
+            <a:r>
+              <a:rPr>
+                <a:solidFill>
+                  <a:srgbClr val="AD0000"/>
+                </a:solidFill>
+                <a:latin typeface="Courier"/>
+              </a:rPr>
+              <a:t>9</a:t>
+            </a:r>
+            <a:r>
+              <a:rPr>
+                <a:solidFill>
+                  <a:srgbClr val="003B4F"/>
+                </a:solidFill>
+                <a:latin typeface="Courier"/>
+              </a:rPr>
+              <a:t>) </a:t>
             </a:r>
             <a:r>
               <a:rPr>
@@ -10133,7 +10385,7 @@
             </a:pPr>
             <a:r>
               <a:rPr sz="2000"/>
-              <a:t>This is the exact same mean and SE you calculated by hand in Module 3 — now you can see them.</a:t>
+              <a:t>This is the exact same mean and SE you calculated by hand in Describing Your Data — now you can see them.</a:t>
             </a:r>
           </a:p>
         </p:txBody>
@@ -10734,7 +10986,43 @@
                 </a:solidFill>
                 <a:latin typeface="Courier"/>
               </a:rPr>
-              <a:t>() </a:t>
+              <a:t>(</a:t>
+            </a:r>
+            <a:r>
+              <a:rPr>
+                <a:solidFill>
+                  <a:srgbClr val="657422"/>
+                </a:solidFill>
+                <a:latin typeface="Courier"/>
+              </a:rPr>
+              <a:t>base_size =</a:t>
+            </a:r>
+            <a:r>
+              <a:rPr>
+                <a:solidFill>
+                  <a:srgbClr val="003B4F"/>
+                </a:solidFill>
+                <a:latin typeface="Courier"/>
+              </a:rPr>
+              <a:t> </a:t>
+            </a:r>
+            <a:r>
+              <a:rPr>
+                <a:solidFill>
+                  <a:srgbClr val="AD0000"/>
+                </a:solidFill>
+                <a:latin typeface="Courier"/>
+              </a:rPr>
+              <a:t>7</a:t>
+            </a:r>
+            <a:r>
+              <a:rPr>
+                <a:solidFill>
+                  <a:srgbClr val="003B4F"/>
+                </a:solidFill>
+                <a:latin typeface="Courier"/>
+              </a:rPr>
+              <a:t>) </a:t>
             </a:r>
             <a:r>
               <a:rPr>
@@ -11100,7 +11388,43 @@
                 </a:solidFill>
                 <a:latin typeface="Courier"/>
               </a:rPr>
-              <a:t>()</a:t>
+              <a:t>(</a:t>
+            </a:r>
+            <a:r>
+              <a:rPr>
+                <a:solidFill>
+                  <a:srgbClr val="657422"/>
+                </a:solidFill>
+                <a:latin typeface="Courier"/>
+              </a:rPr>
+              <a:t>base_size =</a:t>
+            </a:r>
+            <a:r>
+              <a:rPr>
+                <a:solidFill>
+                  <a:srgbClr val="003B4F"/>
+                </a:solidFill>
+                <a:latin typeface="Courier"/>
+              </a:rPr>
+              <a:t> </a:t>
+            </a:r>
+            <a:r>
+              <a:rPr>
+                <a:solidFill>
+                  <a:srgbClr val="AD0000"/>
+                </a:solidFill>
+                <a:latin typeface="Courier"/>
+              </a:rPr>
+              <a:t>9</a:t>
+            </a:r>
+            <a:r>
+              <a:rPr>
+                <a:solidFill>
+                  <a:srgbClr val="003B4F"/>
+                </a:solidFill>
+                <a:latin typeface="Courier"/>
+              </a:rPr>
+              <a:t>)</a:t>
             </a:r>
           </a:p>
         </p:txBody>
@@ -11196,7 +11520,43 @@
                 </a:solidFill>
                 <a:latin typeface="Courier"/>
               </a:rPr>
-              <a:t>()</a:t>
+              <a:t>(</a:t>
+            </a:r>
+            <a:r>
+              <a:rPr>
+                <a:solidFill>
+                  <a:srgbClr val="657422"/>
+                </a:solidFill>
+                <a:latin typeface="Courier"/>
+              </a:rPr>
+              <a:t>base_size =</a:t>
+            </a:r>
+            <a:r>
+              <a:rPr>
+                <a:solidFill>
+                  <a:srgbClr val="003B4F"/>
+                </a:solidFill>
+                <a:latin typeface="Courier"/>
+              </a:rPr>
+              <a:t> </a:t>
+            </a:r>
+            <a:r>
+              <a:rPr>
+                <a:solidFill>
+                  <a:srgbClr val="AD0000"/>
+                </a:solidFill>
+                <a:latin typeface="Courier"/>
+              </a:rPr>
+              <a:t>9</a:t>
+            </a:r>
+            <a:r>
+              <a:rPr>
+                <a:solidFill>
+                  <a:srgbClr val="003B4F"/>
+                </a:solidFill>
+                <a:latin typeface="Courier"/>
+              </a:rPr>
+              <a:t>)</a:t>
             </a:r>
           </a:p>
         </p:txBody>
@@ -13064,7 +13424,43 @@
                 </a:solidFill>
                 <a:latin typeface="Courier"/>
               </a:rPr>
-              <a:t>()</a:t>
+              <a:t>(</a:t>
+            </a:r>
+            <a:r>
+              <a:rPr>
+                <a:solidFill>
+                  <a:srgbClr val="657422"/>
+                </a:solidFill>
+                <a:latin typeface="Courier"/>
+              </a:rPr>
+              <a:t>base_size =</a:t>
+            </a:r>
+            <a:r>
+              <a:rPr>
+                <a:solidFill>
+                  <a:srgbClr val="003B4F"/>
+                </a:solidFill>
+                <a:latin typeface="Courier"/>
+              </a:rPr>
+              <a:t> </a:t>
+            </a:r>
+            <a:r>
+              <a:rPr>
+                <a:solidFill>
+                  <a:srgbClr val="AD0000"/>
+                </a:solidFill>
+                <a:latin typeface="Courier"/>
+              </a:rPr>
+              <a:t>9</a:t>
+            </a:r>
+            <a:r>
+              <a:rPr>
+                <a:solidFill>
+                  <a:srgbClr val="003B4F"/>
+                </a:solidFill>
+                <a:latin typeface="Courier"/>
+              </a:rPr>
+              <a:t>)</a:t>
             </a:r>
           </a:p>
         </p:txBody>
@@ -14616,7 +15012,43 @@
                 </a:solidFill>
                 <a:latin typeface="Courier"/>
               </a:rPr>
-              <a:t>()</a:t>
+              <a:t>(</a:t>
+            </a:r>
+            <a:r>
+              <a:rPr>
+                <a:solidFill>
+                  <a:srgbClr val="657422"/>
+                </a:solidFill>
+                <a:latin typeface="Courier"/>
+              </a:rPr>
+              <a:t>base_size =</a:t>
+            </a:r>
+            <a:r>
+              <a:rPr>
+                <a:solidFill>
+                  <a:srgbClr val="003B4F"/>
+                </a:solidFill>
+                <a:latin typeface="Courier"/>
+              </a:rPr>
+              <a:t> </a:t>
+            </a:r>
+            <a:r>
+              <a:rPr>
+                <a:solidFill>
+                  <a:srgbClr val="AD0000"/>
+                </a:solidFill>
+                <a:latin typeface="Courier"/>
+              </a:rPr>
+              <a:t>9</a:t>
+            </a:r>
+            <a:r>
+              <a:rPr>
+                <a:solidFill>
+                  <a:srgbClr val="003B4F"/>
+                </a:solidFill>
+                <a:latin typeface="Courier"/>
+              </a:rPr>
+              <a:t>)</a:t>
             </a:r>
           </a:p>
         </p:txBody>
@@ -15576,7 +16008,7 @@
             </a:pPr>
             <a:r>
               <a:rPr sz="2000" b="1"/>
-              <a:t>🖐 Recap from Module 1</a:t>
+              <a:t>🖐 Recap from Getting Started</a:t>
             </a:r>
           </a:p>
           <a:p>
@@ -16287,7 +16719,43 @@
                 </a:solidFill>
                 <a:latin typeface="Courier"/>
               </a:rPr>
-              <a:t>() </a:t>
+              <a:t>(</a:t>
+            </a:r>
+            <a:r>
+              <a:rPr>
+                <a:solidFill>
+                  <a:srgbClr val="657422"/>
+                </a:solidFill>
+                <a:latin typeface="Courier"/>
+              </a:rPr>
+              <a:t>base_size =</a:t>
+            </a:r>
+            <a:r>
+              <a:rPr>
+                <a:solidFill>
+                  <a:srgbClr val="003B4F"/>
+                </a:solidFill>
+                <a:latin typeface="Courier"/>
+              </a:rPr>
+              <a:t> </a:t>
+            </a:r>
+            <a:r>
+              <a:rPr>
+                <a:solidFill>
+                  <a:srgbClr val="AD0000"/>
+                </a:solidFill>
+                <a:latin typeface="Courier"/>
+              </a:rPr>
+              <a:t>9</a:t>
+            </a:r>
+            <a:r>
+              <a:rPr>
+                <a:solidFill>
+                  <a:srgbClr val="003B4F"/>
+                </a:solidFill>
+                <a:latin typeface="Courier"/>
+              </a:rPr>
+              <a:t>) </a:t>
             </a:r>
             <a:r>
               <a:rPr>
@@ -17327,7 +17795,43 @@
                 </a:solidFill>
                 <a:latin typeface="Courier"/>
               </a:rPr>
-              <a:t>() </a:t>
+              <a:t>(</a:t>
+            </a:r>
+            <a:r>
+              <a:rPr>
+                <a:solidFill>
+                  <a:srgbClr val="657422"/>
+                </a:solidFill>
+                <a:latin typeface="Courier"/>
+              </a:rPr>
+              <a:t>base_size =</a:t>
+            </a:r>
+            <a:r>
+              <a:rPr>
+                <a:solidFill>
+                  <a:srgbClr val="003B4F"/>
+                </a:solidFill>
+                <a:latin typeface="Courier"/>
+              </a:rPr>
+              <a:t> </a:t>
+            </a:r>
+            <a:r>
+              <a:rPr>
+                <a:solidFill>
+                  <a:srgbClr val="AD0000"/>
+                </a:solidFill>
+                <a:latin typeface="Courier"/>
+              </a:rPr>
+              <a:t>9</a:t>
+            </a:r>
+            <a:r>
+              <a:rPr>
+                <a:solidFill>
+                  <a:srgbClr val="003B4F"/>
+                </a:solidFill>
+                <a:latin typeface="Courier"/>
+              </a:rPr>
+              <a:t>) </a:t>
             </a:r>
             <a:r>
               <a:rPr>

--- a/docs/content/graphing_effectively/graphing_effectively_lecture.pptx
+++ b/docs/content/graphing_effectively/graphing_effectively_lecture.pptx
@@ -4387,7 +4387,7 @@
                 </a:solidFill>
                 <a:latin typeface="Courier"/>
               </a:rPr>
-              <a:t>"Side of tree (lee = n, windward = s)"</a:t>
+              <a:t>"Side of tree (shady = n, sunny = s)"</a:t>
             </a:r>
             <a:r>
               <a:rPr>
@@ -8833,7 +8833,7 @@
             </a:pPr>
             <a:r>
               <a:rPr sz="2000"/>
-              <a:t>You now have real numbers describing lee vs. windward needles. Today we make those numbers </a:t>
+              <a:t>You now have real numbers describing shady vs. sunny needles. Today we make those numbers </a:t>
             </a:r>
             <a:r>
               <a:rPr sz="2000" b="1"/>
@@ -13105,7 +13105,7 @@
                 </a:solidFill>
                 <a:latin typeface="Courier"/>
               </a:rPr>
-              <a:t>"Lee (sheltered)"</a:t>
+              <a:t>"Shady (sheltered)"</a:t>
             </a:r>
             <a:r>
               <a:rPr>
@@ -13141,7 +13141,7 @@
                 </a:solidFill>
                 <a:latin typeface="Courier"/>
               </a:rPr>
-              <a:t>"Windward"</a:t>
+              <a:t>"Sunny"</a:t>
             </a:r>
             <a:r>
               <a:rPr>
@@ -13875,7 +13875,7 @@
                 </a:solidFill>
                 <a:latin typeface="Courier"/>
               </a:rPr>
-              <a:t># Typo: "wind" instead of the real value "s"</a:t>
+              <a:t># Typo: "sun" instead of the real value "s"</a:t>
             </a:r>
             <a:br/>
             <a:r>
@@ -14131,7 +14131,7 @@
                 </a:solidFill>
                 <a:latin typeface="Courier"/>
               </a:rPr>
-              <a:t>wind =</a:t>
+              <a:t>sun =</a:t>
             </a:r>
             <a:r>
               <a:rPr>
@@ -14693,7 +14693,7 @@
                 </a:solidFill>
                 <a:latin typeface="Courier"/>
               </a:rPr>
-              <a:t>"Lee (sheltered)"</a:t>
+              <a:t>"Shady (sheltered)"</a:t>
             </a:r>
             <a:r>
               <a:rPr>
@@ -14729,7 +14729,7 @@
                 </a:solidFill>
                 <a:latin typeface="Courier"/>
               </a:rPr>
-              <a:t>"Windward"</a:t>
+              <a:t>"Sunny"</a:t>
             </a:r>
             <a:r>
               <a:rPr>
@@ -16580,7 +16580,7 @@
                 </a:solidFill>
                 <a:latin typeface="Courier"/>
               </a:rPr>
-              <a:t>"Side (n = lee, s = windward)"</a:t>
+              <a:t>"Side (n = shady, s = sunny)"</a:t>
             </a:r>
             <a:r>
               <a:rPr>

--- a/docs/content/graphing_effectively/graphing_effectively_lecture.pptx
+++ b/docs/content/graphing_effectively/graphing_effectively_lecture.pptx
@@ -6482,7 +6482,7 @@
               <a:rPr sz="2000">
                 <a:latin typeface="Courier"/>
               </a:rPr>
-              <a:t>color = "steelblue"</a:t>
+              <a:t>color = "darkblue"</a:t>
             </a:r>
             <a:r>
               <a:rPr sz="2000"/>
@@ -6891,7 +6891,7 @@
                 </a:solidFill>
                 <a:latin typeface="Courier"/>
               </a:rPr>
-              <a:t>"steelblue"</a:t>
+              <a:t>"darkblue"</a:t>
             </a:r>
             <a:r>
               <a:rPr>

--- a/docs/content/graphing_effectively/graphing_effectively_lecture.pptx
+++ b/docs/content/graphing_effectively/graphing_effectively_lecture.pptx
@@ -4277,7 +4277,7 @@
                 </a:solidFill>
                 <a:latin typeface="Courier"/>
               </a:rPr>
-              <a:t>title    =</a:t>
+              <a:t>title =</a:t>
             </a:r>
             <a:r>
               <a:rPr>
@@ -4369,7 +4369,7 @@
                 </a:solidFill>
                 <a:latin typeface="Courier"/>
               </a:rPr>
-              <a:t>x        =</a:t>
+              <a:t>x =</a:t>
             </a:r>
             <a:r>
               <a:rPr>
@@ -4415,7 +4415,7 @@
                 </a:solidFill>
                 <a:latin typeface="Courier"/>
               </a:rPr>
-              <a:t>y        =</a:t>
+              <a:t>y =</a:t>
             </a:r>
             <a:r>
               <a:rPr>
@@ -4461,7 +4461,7 @@
                 </a:solidFill>
                 <a:latin typeface="Courier"/>
               </a:rPr>
-              <a:t>fill     =</a:t>
+              <a:t>fill =</a:t>
             </a:r>
             <a:r>
               <a:rPr>
@@ -4507,7 +4507,7 @@
                 </a:solidFill>
                 <a:latin typeface="Courier"/>
               </a:rPr>
-              <a:t>caption  =</a:t>
+              <a:t>caption =</a:t>
             </a:r>
             <a:r>
               <a:rPr>
@@ -5438,7 +5438,7 @@
                 </a:solidFill>
                 <a:latin typeface="Courier"/>
               </a:rPr>
-              <a:t>)   </a:t>
+              <a:t>) </a:t>
             </a:r>
             <a:r>
               <a:rPr>
@@ -13005,7 +13005,7 @@
                 </a:solidFill>
                 <a:latin typeface="Courier"/>
               </a:rPr>
-              <a:t>name   =</a:t>
+              <a:t>name =</a:t>
             </a:r>
             <a:r>
               <a:rPr>
@@ -14206,9 +14206,7 @@
             </a:r>
           </a:p>
           <a:p>
-            <a:pPr lvl="0" indent="0" marL="1270000">
-              <a:buNone/>
-            </a:pPr>
+            <a:pPr lvl="0"/>
             <a:r>
               <a:rPr sz="2000"/>
               <a:t>Every level that appears in your data </a:t>
@@ -14227,9 +14225,12 @@
               </a:rPr>
               <a:t>values</a:t>
             </a:r>
+          </a:p>
+          <a:p>
+            <a:pPr lvl="0"/>
             <a:r>
               <a:rPr sz="2000"/>
-              <a:t> (and in </a:t>
+              <a:t>(and in </a:t>
             </a:r>
             <a:r>
               <a:rPr sz="2000">
@@ -14239,7 +14240,14 @@
             </a:r>
             <a:r>
               <a:rPr sz="2000"/>
-              <a:t>, if you supply it), spelled exactly as it appears in the column — check with </a:t>
+              <a:t>, if you supply it), spelled exactly as it appears in the column</a:t>
+            </a:r>
+          </a:p>
+          <a:p>
+            <a:pPr lvl="0"/>
+            <a:r>
+              <a:rPr sz="2000"/>
+              <a:t>check with </a:t>
             </a:r>
             <a:r>
               <a:rPr sz="2000">
@@ -14249,7 +14257,14 @@
             </a:r>
             <a:r>
               <a:rPr sz="2000"/>
-              <a:t> first if you’re not sure. A missing or misspelled level draws as grey with a warning.</a:t>
+              <a:t> first if you’re not sure</a:t>
+            </a:r>
+          </a:p>
+          <a:p>
+            <a:pPr lvl="0"/>
+            <a:r>
+              <a:rPr sz="2000"/>
+              <a:t>A missing or misspelled level draws as grey with a warning.</a:t>
             </a:r>
           </a:p>
         </p:txBody>
@@ -14593,7 +14608,7 @@
                 </a:solidFill>
                 <a:latin typeface="Courier"/>
               </a:rPr>
-              <a:t>name   =</a:t>
+              <a:t>name =</a:t>
             </a:r>
             <a:r>
               <a:rPr>
